--- a/S1-CL3-Cloud-Infrastructure-Improvement/delivery/topic_03/Topic_03_Slides.pptx
+++ b/S1-CL3-Cloud-Infrastructure-Improvement/delivery/topic_03/Topic_03_Slides.pptx
@@ -3383,7 +3383,7 @@
           <a:noFill/>
         </p:spPr>
         <p:txBody>
-          <a:bodyPr wrap="square" anchor="t" lIns="0" rIns="0" tIns="0" bIns="0">
+          <a:bodyPr wrap="square" anchor="ctr" lIns="0" rIns="0" tIns="0" bIns="0">
             <a:spAutoFit/>
           </a:bodyPr>
           <a:lstStyle/>
@@ -3400,7 +3400,7 @@
               </a:spcAft>
             </a:pPr>
             <a:r>
-              <a:rPr sz="1800" b="1" i="0">
+              <a:rPr sz="2400" b="1" i="0">
                 <a:solidFill>
                   <a:srgbClr val="EDAB0C"/>
                 </a:solidFill>
@@ -3409,7 +3409,7 @@
               <a:t>■  </a:t>
             </a:r>
             <a:r>
-              <a:rPr sz="1800" b="0" i="0">
+              <a:rPr sz="2400" b="0" i="0">
                 <a:solidFill>
                   <a:srgbClr val="2A2929"/>
                 </a:solidFill>
@@ -3431,7 +3431,7 @@
               </a:spcAft>
             </a:pPr>
             <a:r>
-              <a:rPr sz="1800" b="1" i="0">
+              <a:rPr sz="2400" b="1" i="0">
                 <a:solidFill>
                   <a:srgbClr val="EDAB0C"/>
                 </a:solidFill>
@@ -3440,7 +3440,7 @@
               <a:t>■  </a:t>
             </a:r>
             <a:r>
-              <a:rPr sz="1800" b="0" i="0">
+              <a:rPr sz="2400" b="0" i="0">
                 <a:solidFill>
                   <a:srgbClr val="2A2929"/>
                 </a:solidFill>
@@ -3462,7 +3462,7 @@
               </a:spcAft>
             </a:pPr>
             <a:r>
-              <a:rPr sz="1800" b="1" i="0">
+              <a:rPr sz="2400" b="1" i="0">
                 <a:solidFill>
                   <a:srgbClr val="EDAB0C"/>
                 </a:solidFill>
@@ -3471,7 +3471,7 @@
               <a:t>■  </a:t>
             </a:r>
             <a:r>
-              <a:rPr sz="1800" b="0" i="0">
+              <a:rPr sz="2400" b="0" i="0">
                 <a:solidFill>
                   <a:srgbClr val="2A2929"/>
                 </a:solidFill>
@@ -3725,7 +3725,7 @@
           <a:noFill/>
         </p:spPr>
         <p:txBody>
-          <a:bodyPr wrap="square" anchor="t" lIns="0" rIns="0" tIns="0" bIns="0">
+          <a:bodyPr wrap="square" anchor="ctr" lIns="0" rIns="0" tIns="0" bIns="0">
             <a:spAutoFit/>
           </a:bodyPr>
           <a:lstStyle/>
@@ -3742,7 +3742,7 @@
               </a:spcAft>
             </a:pPr>
             <a:r>
-              <a:rPr sz="1800" b="1" i="0">
+              <a:rPr sz="2400" b="1" i="0">
                 <a:solidFill>
                   <a:srgbClr val="EDAB0C"/>
                 </a:solidFill>
@@ -3751,7 +3751,7 @@
               <a:t>■  </a:t>
             </a:r>
             <a:r>
-              <a:rPr sz="1800" b="0" i="0">
+              <a:rPr sz="2400" b="0" i="0">
                 <a:solidFill>
                   <a:srgbClr val="2A2929"/>
                 </a:solidFill>
@@ -3773,7 +3773,7 @@
               </a:spcAft>
             </a:pPr>
             <a:r>
-              <a:rPr sz="1800" b="1" i="0">
+              <a:rPr sz="2400" b="1" i="0">
                 <a:solidFill>
                   <a:srgbClr val="EDAB0C"/>
                 </a:solidFill>
@@ -3782,7 +3782,7 @@
               <a:t>■  </a:t>
             </a:r>
             <a:r>
-              <a:rPr sz="1800" b="0" i="0">
+              <a:rPr sz="2400" b="0" i="0">
                 <a:solidFill>
                   <a:srgbClr val="2A2929"/>
                 </a:solidFill>
@@ -3804,7 +3804,7 @@
               </a:spcAft>
             </a:pPr>
             <a:r>
-              <a:rPr sz="1800" b="1" i="0">
+              <a:rPr sz="2400" b="1" i="0">
                 <a:solidFill>
                   <a:srgbClr val="EDAB0C"/>
                 </a:solidFill>
@@ -3813,7 +3813,7 @@
               <a:t>■  </a:t>
             </a:r>
             <a:r>
-              <a:rPr sz="1800" b="0" i="0">
+              <a:rPr sz="2400" b="0" i="0">
                 <a:solidFill>
                   <a:srgbClr val="2A2929"/>
                 </a:solidFill>
@@ -6100,7 +6100,7 @@
           <a:noFill/>
         </p:spPr>
         <p:txBody>
-          <a:bodyPr wrap="square" anchor="t" lIns="0" rIns="0" tIns="0" bIns="0">
+          <a:bodyPr wrap="square" anchor="ctr" lIns="0" rIns="0" tIns="0" bIns="0">
             <a:spAutoFit/>
           </a:bodyPr>
           <a:lstStyle/>
@@ -6117,7 +6117,7 @@
               </a:spcAft>
             </a:pPr>
             <a:r>
-              <a:rPr sz="1800" b="1" i="0">
+              <a:rPr sz="2400" b="1" i="0">
                 <a:solidFill>
                   <a:srgbClr val="EDAB0C"/>
                 </a:solidFill>
@@ -6126,7 +6126,7 @@
               <a:t>■  </a:t>
             </a:r>
             <a:r>
-              <a:rPr sz="1800" b="0" i="0">
+              <a:rPr sz="2400" b="0" i="0">
                 <a:solidFill>
                   <a:srgbClr val="2A2929"/>
                 </a:solidFill>
@@ -6148,7 +6148,7 @@
               </a:spcAft>
             </a:pPr>
             <a:r>
-              <a:rPr sz="1800" b="1" i="0">
+              <a:rPr sz="2400" b="1" i="0">
                 <a:solidFill>
                   <a:srgbClr val="EDAB0C"/>
                 </a:solidFill>
@@ -6157,7 +6157,7 @@
               <a:t>■  </a:t>
             </a:r>
             <a:r>
-              <a:rPr sz="1800" b="0" i="0">
+              <a:rPr sz="2400" b="0" i="0">
                 <a:solidFill>
                   <a:srgbClr val="2A2929"/>
                 </a:solidFill>
@@ -6179,7 +6179,7 @@
               </a:spcAft>
             </a:pPr>
             <a:r>
-              <a:rPr sz="1800" b="1" i="0">
+              <a:rPr sz="2400" b="1" i="0">
                 <a:solidFill>
                   <a:srgbClr val="EDAB0C"/>
                 </a:solidFill>
@@ -6188,7 +6188,7 @@
               <a:t>■  </a:t>
             </a:r>
             <a:r>
-              <a:rPr sz="1800" b="0" i="0">
+              <a:rPr sz="2400" b="0" i="0">
                 <a:solidFill>
                   <a:srgbClr val="2A2929"/>
                 </a:solidFill>
@@ -6808,7 +6808,7 @@
           <a:noFill/>
         </p:spPr>
         <p:txBody>
-          <a:bodyPr wrap="square" anchor="t" lIns="0" rIns="0" tIns="0" bIns="0">
+          <a:bodyPr wrap="square" anchor="ctr" lIns="0" rIns="0" tIns="0" bIns="0">
             <a:spAutoFit/>
           </a:bodyPr>
           <a:lstStyle/>
@@ -6825,7 +6825,7 @@
               </a:spcAft>
             </a:pPr>
             <a:r>
-              <a:rPr sz="1800" b="1" i="0">
+              <a:rPr sz="2400" b="1" i="0">
                 <a:solidFill>
                   <a:srgbClr val="EDAB0C"/>
                 </a:solidFill>
@@ -6834,7 +6834,7 @@
               <a:t>■  </a:t>
             </a:r>
             <a:r>
-              <a:rPr sz="1800" b="0" i="0">
+              <a:rPr sz="2400" b="0" i="0">
                 <a:solidFill>
                   <a:srgbClr val="2A2929"/>
                 </a:solidFill>
@@ -6856,7 +6856,7 @@
               </a:spcAft>
             </a:pPr>
             <a:r>
-              <a:rPr sz="1800" b="1" i="0">
+              <a:rPr sz="2400" b="1" i="0">
                 <a:solidFill>
                   <a:srgbClr val="EDAB0C"/>
                 </a:solidFill>
@@ -6865,7 +6865,7 @@
               <a:t>■  </a:t>
             </a:r>
             <a:r>
-              <a:rPr sz="1800" b="0" i="0">
+              <a:rPr sz="2400" b="0" i="0">
                 <a:solidFill>
                   <a:srgbClr val="2A2929"/>
                 </a:solidFill>
@@ -6887,7 +6887,7 @@
               </a:spcAft>
             </a:pPr>
             <a:r>
-              <a:rPr sz="1800" b="1" i="0">
+              <a:rPr sz="2400" b="1" i="0">
                 <a:solidFill>
                   <a:srgbClr val="EDAB0C"/>
                 </a:solidFill>
@@ -6896,7 +6896,7 @@
               <a:t>■  </a:t>
             </a:r>
             <a:r>
-              <a:rPr sz="1800" b="0" i="0">
+              <a:rPr sz="2400" b="0" i="0">
                 <a:solidFill>
                   <a:srgbClr val="2A2929"/>
                 </a:solidFill>
@@ -6918,7 +6918,7 @@
               </a:spcAft>
             </a:pPr>
             <a:r>
-              <a:rPr sz="1800" b="1" i="0">
+              <a:rPr sz="2400" b="1" i="0">
                 <a:solidFill>
                   <a:srgbClr val="EDAB0C"/>
                 </a:solidFill>
@@ -6927,7 +6927,7 @@
               <a:t>■  </a:t>
             </a:r>
             <a:r>
-              <a:rPr sz="1800" b="0" i="0">
+              <a:rPr sz="2400" b="0" i="0">
                 <a:solidFill>
                   <a:srgbClr val="2A2929"/>
                 </a:solidFill>
@@ -7181,7 +7181,7 @@
           <a:noFill/>
         </p:spPr>
         <p:txBody>
-          <a:bodyPr wrap="square" anchor="t" lIns="0" rIns="0" tIns="0" bIns="0">
+          <a:bodyPr wrap="square" anchor="ctr" lIns="0" rIns="0" tIns="0" bIns="0">
             <a:spAutoFit/>
           </a:bodyPr>
           <a:lstStyle/>
@@ -7198,7 +7198,7 @@
               </a:spcAft>
             </a:pPr>
             <a:r>
-              <a:rPr sz="1800" b="1" i="0">
+              <a:rPr sz="2400" b="1" i="0">
                 <a:solidFill>
                   <a:srgbClr val="EDAB0C"/>
                 </a:solidFill>
@@ -7207,7 +7207,7 @@
               <a:t>■  </a:t>
             </a:r>
             <a:r>
-              <a:rPr sz="1800" b="0" i="0">
+              <a:rPr sz="2400" b="0" i="0">
                 <a:solidFill>
                   <a:srgbClr val="2A2929"/>
                 </a:solidFill>
@@ -7229,7 +7229,7 @@
               </a:spcAft>
             </a:pPr>
             <a:r>
-              <a:rPr sz="1800" b="1" i="0">
+              <a:rPr sz="2400" b="1" i="0">
                 <a:solidFill>
                   <a:srgbClr val="EDAB0C"/>
                 </a:solidFill>
@@ -7238,7 +7238,7 @@
               <a:t>■  </a:t>
             </a:r>
             <a:r>
-              <a:rPr sz="1800" b="0" i="0">
+              <a:rPr sz="2400" b="0" i="0">
                 <a:solidFill>
                   <a:srgbClr val="2A2929"/>
                 </a:solidFill>
@@ -7260,7 +7260,7 @@
               </a:spcAft>
             </a:pPr>
             <a:r>
-              <a:rPr sz="1800" b="1" i="0">
+              <a:rPr sz="2400" b="1" i="0">
                 <a:solidFill>
                   <a:srgbClr val="EDAB0C"/>
                 </a:solidFill>
@@ -7269,7 +7269,7 @@
               <a:t>■  </a:t>
             </a:r>
             <a:r>
-              <a:rPr sz="1800" b="0" i="0">
+              <a:rPr sz="2400" b="0" i="0">
                 <a:solidFill>
                   <a:srgbClr val="2A2929"/>
                 </a:solidFill>

--- a/S1-CL3-Cloud-Infrastructure-Improvement/delivery/topic_03/Topic_03_Slides.pptx
+++ b/S1-CL3-Cloud-Infrastructure-Improvement/delivery/topic_03/Topic_03_Slides.pptx
@@ -7,18 +7,18 @@
   <p:sldIdLst>
     <p:sldId id="256" r:id="rId7"/>
     <p:sldId id="257" r:id="rId8"/>
-    <p:sldId id="258" r:id="rId9"/>
-    <p:sldId id="259" r:id="rId10"/>
-    <p:sldId id="260" r:id="rId11"/>
-    <p:sldId id="261" r:id="rId12"/>
-    <p:sldId id="262" r:id="rId13"/>
-    <p:sldId id="263" r:id="rId14"/>
-    <p:sldId id="264" r:id="rId15"/>
-    <p:sldId id="265" r:id="rId16"/>
-    <p:sldId id="266" r:id="rId17"/>
-    <p:sldId id="267" r:id="rId18"/>
-    <p:sldId id="268" r:id="rId19"/>
-    <p:sldId id="269" r:id="rId20"/>
+    <p:sldId id="258" r:id="rId10"/>
+    <p:sldId id="259" r:id="rId11"/>
+    <p:sldId id="260" r:id="rId12"/>
+    <p:sldId id="261" r:id="rId13"/>
+    <p:sldId id="262" r:id="rId14"/>
+    <p:sldId id="263" r:id="rId15"/>
+    <p:sldId id="264" r:id="rId16"/>
+    <p:sldId id="265" r:id="rId17"/>
+    <p:sldId id="266" r:id="rId18"/>
+    <p:sldId id="267" r:id="rId19"/>
+    <p:sldId id="268" r:id="rId20"/>
+    <p:sldId id="269" r:id="rId21"/>
   </p:sldIdLst>
   <p:sldSz cx="12191695" cy="6858000" type="screen4x3"/>
   <p:notesSz cx="6858000" cy="9144000"/>
@@ -118,6 +118,1601 @@
     </a:lvl9pPr>
   </p:defaultTextStyle>
 </p:presentation>
+</file>
+
+<file path=ppt/notesMasters/notesMaster1.xml><?xml version="1.0" encoding="utf-8"?>
+<p:notesMaster xmlns:a="http://schemas.openxmlformats.org/drawingml/2006/main" xmlns:p="http://schemas.openxmlformats.org/presentationml/2006/main" xmlns:r="http://schemas.openxmlformats.org/officeDocument/2006/relationships">
+  <p:cSld>
+    <p:bg>
+      <p:bgRef idx="1001">
+        <a:schemeClr val="bg1"/>
+      </p:bgRef>
+    </p:bg>
+    <p:spTree>
+      <p:nvGrpSpPr>
+        <p:cNvPr id="1" name=""/>
+        <p:cNvGrpSpPr/>
+        <p:nvPr/>
+      </p:nvGrpSpPr>
+      <p:grpSpPr>
+        <a:xfrm>
+          <a:off x="0" y="0"/>
+          <a:ext cx="0" cy="0"/>
+          <a:chOff x="0" y="0"/>
+          <a:chExt cx="0" cy="0"/>
+        </a:xfrm>
+      </p:grpSpPr>
+      <p:sp>
+        <p:nvSpPr>
+          <p:cNvPr id="2" name="Header Placeholder 1"/>
+          <p:cNvSpPr>
+            <a:spLocks noGrp="1"/>
+          </p:cNvSpPr>
+          <p:nvPr>
+            <p:ph type="hdr" sz="quarter"/>
+          </p:nvPr>
+        </p:nvSpPr>
+        <p:spPr>
+          <a:xfrm>
+            <a:off x="0" y="0"/>
+            <a:ext cx="2971800" cy="457200"/>
+          </a:xfrm>
+          <a:prstGeom prst="rect">
+            <a:avLst/>
+          </a:prstGeom>
+        </p:spPr>
+        <p:txBody>
+          <a:bodyPr vert="horz" lIns="91440" tIns="45720" rIns="91440" bIns="45720" rtlCol="0"/>
+          <a:lstStyle>
+            <a:lvl1pPr algn="l">
+              <a:defRPr sz="1200"/>
+            </a:lvl1pPr>
+          </a:lstStyle>
+          <a:p>
+            <a:endParaRPr lang="en-US"/>
+          </a:p>
+        </p:txBody>
+      </p:sp>
+      <p:sp>
+        <p:nvSpPr>
+          <p:cNvPr id="3" name="Date Placeholder 2"/>
+          <p:cNvSpPr>
+            <a:spLocks noGrp="1"/>
+          </p:cNvSpPr>
+          <p:nvPr>
+            <p:ph type="dt" idx="1"/>
+          </p:nvPr>
+        </p:nvSpPr>
+        <p:spPr>
+          <a:xfrm>
+            <a:off x="3884613" y="0"/>
+            <a:ext cx="2971800" cy="457200"/>
+          </a:xfrm>
+          <a:prstGeom prst="rect">
+            <a:avLst/>
+          </a:prstGeom>
+        </p:spPr>
+        <p:txBody>
+          <a:bodyPr vert="horz" lIns="91440" tIns="45720" rIns="91440" bIns="45720" rtlCol="0"/>
+          <a:lstStyle>
+            <a:lvl1pPr algn="r">
+              <a:defRPr sz="1200"/>
+            </a:lvl1pPr>
+          </a:lstStyle>
+          <a:p>
+            <a:fld id="{0F89C1C7-3DCD-1040-A9CF-14679D8B5DDD}" type="datetimeFigureOut">
+              <a:rPr lang="en-US" smtClean="0"/>
+              <a:t>10/17/16</a:t>
+            </a:fld>
+            <a:endParaRPr lang="en-US"/>
+          </a:p>
+        </p:txBody>
+      </p:sp>
+      <p:sp>
+        <p:nvSpPr>
+          <p:cNvPr id="4" name="Slide Image Placeholder 3"/>
+          <p:cNvSpPr>
+            <a:spLocks noGrp="1" noRot="1" noChangeAspect="1"/>
+          </p:cNvSpPr>
+          <p:nvPr>
+            <p:ph type="sldImg" idx="2"/>
+          </p:nvPr>
+        </p:nvSpPr>
+        <p:spPr>
+          <a:xfrm>
+            <a:off x="1143000" y="685800"/>
+            <a:ext cx="4572000" cy="3429000"/>
+          </a:xfrm>
+          <a:prstGeom prst="rect">
+            <a:avLst/>
+          </a:prstGeom>
+          <a:noFill/>
+          <a:ln w="12700">
+            <a:solidFill>
+              <a:prstClr val="black"/>
+            </a:solidFill>
+          </a:ln>
+        </p:spPr>
+        <p:txBody>
+          <a:bodyPr vert="horz" lIns="91440" tIns="45720" rIns="91440" bIns="45720" rtlCol="0" anchor="ctr"/>
+          <a:lstStyle/>
+          <a:p>
+            <a:endParaRPr lang="en-US"/>
+          </a:p>
+        </p:txBody>
+      </p:sp>
+      <p:sp>
+        <p:nvSpPr>
+          <p:cNvPr id="5" name="Notes Placeholder 4"/>
+          <p:cNvSpPr>
+            <a:spLocks noGrp="1"/>
+          </p:cNvSpPr>
+          <p:nvPr>
+            <p:ph type="body" sz="quarter" idx="3"/>
+          </p:nvPr>
+        </p:nvSpPr>
+        <p:spPr>
+          <a:xfrm>
+            <a:off x="685800" y="4343400"/>
+            <a:ext cx="5486400" cy="4114800"/>
+          </a:xfrm>
+          <a:prstGeom prst="rect">
+            <a:avLst/>
+          </a:prstGeom>
+        </p:spPr>
+        <p:txBody>
+          <a:bodyPr vert="horz" lIns="91440" tIns="45720" rIns="91440" bIns="45720" rtlCol="0"/>
+          <a:lstStyle/>
+          <a:p>
+            <a:pPr lvl="0"/>
+            <a:r>
+              <a:rPr lang="en-US" smtClean="0"/>
+              <a:t>Click to edit Master text styles</a:t>
+            </a:r>
+          </a:p>
+          <a:p>
+            <a:pPr lvl="1"/>
+            <a:r>
+              <a:rPr lang="en-US" smtClean="0"/>
+              <a:t>Second level</a:t>
+            </a:r>
+          </a:p>
+          <a:p>
+            <a:pPr lvl="2"/>
+            <a:r>
+              <a:rPr lang="en-US" smtClean="0"/>
+              <a:t>Third level</a:t>
+            </a:r>
+          </a:p>
+          <a:p>
+            <a:pPr lvl="3"/>
+            <a:r>
+              <a:rPr lang="en-US" smtClean="0"/>
+              <a:t>Fourth level</a:t>
+            </a:r>
+          </a:p>
+          <a:p>
+            <a:pPr lvl="4"/>
+            <a:r>
+              <a:rPr lang="en-US" smtClean="0"/>
+              <a:t>Fifth level</a:t>
+            </a:r>
+            <a:endParaRPr lang="en-US"/>
+          </a:p>
+        </p:txBody>
+      </p:sp>
+      <p:sp>
+        <p:nvSpPr>
+          <p:cNvPr id="6" name="Footer Placeholder 5"/>
+          <p:cNvSpPr>
+            <a:spLocks noGrp="1"/>
+          </p:cNvSpPr>
+          <p:nvPr>
+            <p:ph type="ftr" sz="quarter" idx="4"/>
+          </p:nvPr>
+        </p:nvSpPr>
+        <p:spPr>
+          <a:xfrm>
+            <a:off x="0" y="8685213"/>
+            <a:ext cx="2971800" cy="457200"/>
+          </a:xfrm>
+          <a:prstGeom prst="rect">
+            <a:avLst/>
+          </a:prstGeom>
+        </p:spPr>
+        <p:txBody>
+          <a:bodyPr vert="horz" lIns="91440" tIns="45720" rIns="91440" bIns="45720" rtlCol="0" anchor="b"/>
+          <a:lstStyle>
+            <a:lvl1pPr algn="l">
+              <a:defRPr sz="1200"/>
+            </a:lvl1pPr>
+          </a:lstStyle>
+          <a:p>
+            <a:endParaRPr lang="en-US"/>
+          </a:p>
+        </p:txBody>
+      </p:sp>
+      <p:sp>
+        <p:nvSpPr>
+          <p:cNvPr id="7" name="Slide Number Placeholder 6"/>
+          <p:cNvSpPr>
+            <a:spLocks noGrp="1"/>
+          </p:cNvSpPr>
+          <p:nvPr>
+            <p:ph type="sldNum" sz="quarter" idx="5"/>
+          </p:nvPr>
+        </p:nvSpPr>
+        <p:spPr>
+          <a:xfrm>
+            <a:off x="3884613" y="8685213"/>
+            <a:ext cx="2971800" cy="457200"/>
+          </a:xfrm>
+          <a:prstGeom prst="rect">
+            <a:avLst/>
+          </a:prstGeom>
+        </p:spPr>
+        <p:txBody>
+          <a:bodyPr vert="horz" lIns="91440" tIns="45720" rIns="91440" bIns="45720" rtlCol="0" anchor="b"/>
+          <a:lstStyle>
+            <a:lvl1pPr algn="r">
+              <a:defRPr sz="1200"/>
+            </a:lvl1pPr>
+          </a:lstStyle>
+          <a:p>
+            <a:fld id="{BB5E49A5-4136-284D-997B-48E1D791AD67}" type="slidenum">
+              <a:rPr lang="en-US" smtClean="0"/>
+              <a:t>‹#›</a:t>
+            </a:fld>
+            <a:endParaRPr lang="en-US"/>
+          </a:p>
+        </p:txBody>
+      </p:sp>
+    </p:spTree>
+    <p:extLst>
+      <p:ext uri="{BB962C8B-B14F-4D97-AF65-F5344CB8AC3E}">
+        <p14:creationId xmlns:p14="http://schemas.microsoft.com/office/powerpoint/2010/main" val="2623252185"/>
+      </p:ext>
+    </p:extLst>
+  </p:cSld>
+  <p:clrMap bg1="lt1" tx1="dk1" bg2="lt2" tx2="dk2" accent1="accent1" accent2="accent2" accent3="accent3" accent4="accent4" accent5="accent5" accent6="accent6" hlink="hlink" folHlink="folHlink"/>
+  <p:notesStyle>
+    <a:lvl1pPr marL="0" algn="l" defTabSz="457200" rtl="0" eaLnBrk="1" latinLnBrk="0" hangingPunct="1">
+      <a:defRPr sz="1200" kern="1200">
+        <a:solidFill>
+          <a:schemeClr val="tx1"/>
+        </a:solidFill>
+        <a:latin typeface="+mn-lt"/>
+        <a:ea typeface="+mn-ea"/>
+        <a:cs typeface="+mn-cs"/>
+      </a:defRPr>
+    </a:lvl1pPr>
+    <a:lvl2pPr marL="457200" algn="l" defTabSz="457200" rtl="0" eaLnBrk="1" latinLnBrk="0" hangingPunct="1">
+      <a:defRPr sz="1200" kern="1200">
+        <a:solidFill>
+          <a:schemeClr val="tx1"/>
+        </a:solidFill>
+        <a:latin typeface="+mn-lt"/>
+        <a:ea typeface="+mn-ea"/>
+        <a:cs typeface="+mn-cs"/>
+      </a:defRPr>
+    </a:lvl2pPr>
+    <a:lvl3pPr marL="914400" algn="l" defTabSz="457200" rtl="0" eaLnBrk="1" latinLnBrk="0" hangingPunct="1">
+      <a:defRPr sz="1200" kern="1200">
+        <a:solidFill>
+          <a:schemeClr val="tx1"/>
+        </a:solidFill>
+        <a:latin typeface="+mn-lt"/>
+        <a:ea typeface="+mn-ea"/>
+        <a:cs typeface="+mn-cs"/>
+      </a:defRPr>
+    </a:lvl3pPr>
+    <a:lvl4pPr marL="1371600" algn="l" defTabSz="457200" rtl="0" eaLnBrk="1" latinLnBrk="0" hangingPunct="1">
+      <a:defRPr sz="1200" kern="1200">
+        <a:solidFill>
+          <a:schemeClr val="tx1"/>
+        </a:solidFill>
+        <a:latin typeface="+mn-lt"/>
+        <a:ea typeface="+mn-ea"/>
+        <a:cs typeface="+mn-cs"/>
+      </a:defRPr>
+    </a:lvl4pPr>
+    <a:lvl5pPr marL="1828800" algn="l" defTabSz="457200" rtl="0" eaLnBrk="1" latinLnBrk="0" hangingPunct="1">
+      <a:defRPr sz="1200" kern="1200">
+        <a:solidFill>
+          <a:schemeClr val="tx1"/>
+        </a:solidFill>
+        <a:latin typeface="+mn-lt"/>
+        <a:ea typeface="+mn-ea"/>
+        <a:cs typeface="+mn-cs"/>
+      </a:defRPr>
+    </a:lvl5pPr>
+    <a:lvl6pPr marL="2286000" algn="l" defTabSz="457200" rtl="0" eaLnBrk="1" latinLnBrk="0" hangingPunct="1">
+      <a:defRPr sz="1200" kern="1200">
+        <a:solidFill>
+          <a:schemeClr val="tx1"/>
+        </a:solidFill>
+        <a:latin typeface="+mn-lt"/>
+        <a:ea typeface="+mn-ea"/>
+        <a:cs typeface="+mn-cs"/>
+      </a:defRPr>
+    </a:lvl6pPr>
+    <a:lvl7pPr marL="2743200" algn="l" defTabSz="457200" rtl="0" eaLnBrk="1" latinLnBrk="0" hangingPunct="1">
+      <a:defRPr sz="1200" kern="1200">
+        <a:solidFill>
+          <a:schemeClr val="tx1"/>
+        </a:solidFill>
+        <a:latin typeface="+mn-lt"/>
+        <a:ea typeface="+mn-ea"/>
+        <a:cs typeface="+mn-cs"/>
+      </a:defRPr>
+    </a:lvl7pPr>
+    <a:lvl8pPr marL="3200400" algn="l" defTabSz="457200" rtl="0" eaLnBrk="1" latinLnBrk="0" hangingPunct="1">
+      <a:defRPr sz="1200" kern="1200">
+        <a:solidFill>
+          <a:schemeClr val="tx1"/>
+        </a:solidFill>
+        <a:latin typeface="+mn-lt"/>
+        <a:ea typeface="+mn-ea"/>
+        <a:cs typeface="+mn-cs"/>
+      </a:defRPr>
+    </a:lvl8pPr>
+    <a:lvl9pPr marL="3657600" algn="l" defTabSz="457200" rtl="0" eaLnBrk="1" latinLnBrk="0" hangingPunct="1">
+      <a:defRPr sz="1200" kern="1200">
+        <a:solidFill>
+          <a:schemeClr val="tx1"/>
+        </a:solidFill>
+        <a:latin typeface="+mn-lt"/>
+        <a:ea typeface="+mn-ea"/>
+        <a:cs typeface="+mn-cs"/>
+      </a:defRPr>
+    </a:lvl9pPr>
+  </p:notesStyle>
+</p:notesMaster>
+</file>
+
+<file path=ppt/notesSlides/notesSlide1.xml><?xml version="1.0" encoding="utf-8"?>
+<p:notes xmlns:a="http://schemas.openxmlformats.org/drawingml/2006/main" xmlns:p="http://schemas.openxmlformats.org/presentationml/2006/main" xmlns:r="http://schemas.openxmlformats.org/officeDocument/2006/relationships">
+  <p:cSld>
+    <p:spTree>
+      <p:nvGrpSpPr>
+        <p:cNvPr id="1" name=""/>
+        <p:cNvGrpSpPr/>
+        <p:nvPr/>
+      </p:nvGrpSpPr>
+      <p:grpSpPr>
+        <a:xfrm>
+          <a:off x="0" y="0"/>
+          <a:ext cx="0" cy="0"/>
+          <a:chOff x="0" y="0"/>
+          <a:chExt cx="0" cy="0"/>
+        </a:xfrm>
+      </p:grpSpPr>
+      <p:sp>
+        <p:nvSpPr>
+          <p:cNvPr id="2" name="Slide Image Placeholder 1"/>
+          <p:cNvSpPr>
+            <a:spLocks noGrp="1"/>
+          </p:cNvSpPr>
+          <p:nvPr>
+            <p:ph type="sldImg" idx="2"/>
+          </p:nvPr>
+        </p:nvSpPr>
+        <p:spPr/>
+      </p:sp>
+      <p:sp>
+        <p:nvSpPr>
+          <p:cNvPr id="3" name="Notes Placeholder 2"/>
+          <p:cNvSpPr>
+            <a:spLocks noGrp="1"/>
+          </p:cNvSpPr>
+          <p:nvPr>
+            <p:ph type="body" idx="3" sz="quarter"/>
+          </p:nvPr>
+        </p:nvSpPr>
+        <p:spPr/>
+        <p:txBody>
+          <a:bodyPr/>
+          <a:lstStyle/>
+          <a:p>
+            <a:r>
+              <a:t>Frame the scalability half of AT1's design — structured by the FOUR resource components that also</a:t>
+            </a:r>
+          </a:p>
+          <a:p>
+            <a:r>
+              <a:t>become the AT2 team's work-split. Set the depth: design to the business needs, prove-by-test at AT3, no</a:t>
+            </a:r>
+          </a:p>
+          <a:p>
+            <a:r>
+              <a:t>over-provisioning.</a:t>
+            </a:r>
+          </a:p>
+          <a:p>
+            <a:r>
+              <a:t>• First two bullets: Topic 3 continues AT1 — design the scalability improvements for Ledgerline,</a:t>
+            </a:r>
+          </a:p>
+          <a:p>
+            <a:r>
+              <a:t>structured by four components: network, compute, database, storage. These are the same four units the</a:t>
+            </a:r>
+          </a:p>
+          <a:p>
+            <a:r>
+              <a:t>AT2 team later divides the IaC write by — flag the seam.</a:t>
+            </a:r>
+          </a:p>
+          <a:p>
+            <a:r>
+              <a:t>• Third bullet: scalability here = elastic capacity-on-demand, demonstrable BY TEST at AT3 — not a</a:t>
+            </a:r>
+          </a:p>
+          <a:p>
+            <a:r>
+              <a:t>forecast, and not over-provisioning.</a:t>
+            </a:r>
+          </a:p>
+          <a:p>
+            <a:r>
+              <a:t>• Fourth bullet (the discipline): design only, to the business needs — the build is AT3.</a:t>
+            </a:r>
+          </a:p>
+          <a:p>
+            <a:r>
+              <a:t>Misconception to pre-empt: "scalable = big enough for the busiest day." No — that's over-provisioning</a:t>
+            </a:r>
+          </a:p>
+          <a:p>
+            <a:r>
+              <a:t>(paying for idle capacity); scalable means it GROWS and SHRINKS on demand. Different idea entirely.</a:t>
+            </a:r>
+          </a:p>
+          <a:p>
+            <a:r>
+              <a:t>Question to pose: "What's the difference between a scalable design and just buying a bigger server?"</a:t>
+            </a:r>
+          </a:p>
+          <a:p>
+            <a:r>
+              <a:t>(elastic capacity-on-demand vs fixed spare capacity you pay for whether used or not).</a:t>
+            </a:r>
+          </a:p>
+          <a:p>
+            <a:r>
+              <a:t>UoC/AT1 tie: this Topic develops ICTCLD504 PC 2.2 and KE 6; the output is the resource-selection</a:t>
+            </a:r>
+          </a:p>
+          <a:p>
+            <a:r>
+              <a:t>sections of the AT1 Solution Design + the object-storage KE-appendix question.</a:t>
+            </a:r>
+          </a:p>
+        </p:txBody>
+      </p:sp>
+      <p:sp>
+        <p:nvSpPr>
+          <p:cNvPr id="4" name="Slide Number Placeholder 3"/>
+          <p:cNvSpPr>
+            <a:spLocks noGrp="1"/>
+          </p:cNvSpPr>
+          <p:nvPr>
+            <p:ph type="sldNum" idx="5" sz="quarter"/>
+          </p:nvPr>
+        </p:nvSpPr>
+        <p:spPr/>
+      </p:sp>
+    </p:spTree>
+  </p:cSld>
+  <p:clrMapOvr>
+    <a:masterClrMapping/>
+  </p:clrMapOvr>
+</p:notes>
+</file>
+
+<file path=ppt/notesSlides/notesSlide2.xml><?xml version="1.0" encoding="utf-8"?>
+<p:notes xmlns:a="http://schemas.openxmlformats.org/drawingml/2006/main" xmlns:p="http://schemas.openxmlformats.org/presentationml/2006/main" xmlns:r="http://schemas.openxmlformats.org/officeDocument/2006/relationships">
+  <p:cSld>
+    <p:spTree>
+      <p:nvGrpSpPr>
+        <p:cNvPr id="1" name=""/>
+        <p:cNvGrpSpPr/>
+        <p:nvPr/>
+      </p:nvGrpSpPr>
+      <p:grpSpPr>
+        <a:xfrm>
+          <a:off x="0" y="0"/>
+          <a:ext cx="0" cy="0"/>
+          <a:chOff x="0" y="0"/>
+          <a:chExt cx="0" cy="0"/>
+        </a:xfrm>
+      </p:grpSpPr>
+      <p:sp>
+        <p:nvSpPr>
+          <p:cNvPr id="2" name="Slide Image Placeholder 1"/>
+          <p:cNvSpPr>
+            <a:spLocks noGrp="1"/>
+          </p:cNvSpPr>
+          <p:nvPr>
+            <p:ph type="sldImg" idx="2"/>
+          </p:nvPr>
+        </p:nvSpPr>
+        <p:spPr/>
+      </p:sp>
+      <p:sp>
+        <p:nvSpPr>
+          <p:cNvPr id="3" name="Notes Placeholder 2"/>
+          <p:cNvSpPr>
+            <a:spLocks noGrp="1"/>
+          </p:cNvSpPr>
+          <p:nvPr>
+            <p:ph type="body" idx="3" sz="quarter"/>
+          </p:nvPr>
+        </p:nvSpPr>
+        <p:spPr/>
+        <p:txBody>
+          <a:bodyPr/>
+          <a:lstStyle/>
+          <a:p>
+            <a:r>
+              <a:t>Open Section 1 with the definition that governs the whole Topic — scalability is elasticity, and it's</a:t>
+            </a:r>
+          </a:p>
+          <a:p>
+            <a:r>
+              <a:t>PROVEN by test, not asserted on paper.</a:t>
+            </a:r>
+          </a:p>
+          <a:p>
+            <a:r>
+              <a:t>• First bullet: elastic capacity — add resources as load rises, release them as load falls; pay for what</a:t>
+            </a:r>
+          </a:p>
+          <a:p>
+            <a:r>
+              <a:t>you use. Both directions matter.</a:t>
+            </a:r>
+          </a:p>
+          <a:p>
+            <a:r>
+              <a:t>• Second bullet: the TEST of a scalable design is a demonstration — it scales on demand (proven at AT3),</a:t>
+            </a:r>
+          </a:p>
+          <a:p>
+            <a:r>
+              <a:t>not a load forecast on paper. Design so it can be demonstrated.</a:t>
+            </a:r>
+          </a:p>
+          <a:p>
+            <a:r>
+              <a:t>• Third bullet: over-provisioning fixed spare capacity is NOT scalability — it's gold-plating;</a:t>
+            </a:r>
+          </a:p>
+          <a:p>
+            <a:r>
+              <a:t>right-size instead. The anti-over-engineering rule, made concrete.</a:t>
+            </a:r>
+          </a:p>
+          <a:p>
+            <a:r>
+              <a:t>Misconception to pre-empt: "add auto scaling everywhere and you're scalable." No — only some tiers scale</a:t>
+            </a:r>
+          </a:p>
+          <a:p>
+            <a:r>
+              <a:t>elastically (compute, storage); scalability is designed per tier to the need, and it must be</a:t>
+            </a:r>
+          </a:p>
+          <a:p>
+            <a:r>
+              <a:t>demonstrable.</a:t>
+            </a:r>
+          </a:p>
+          <a:p>
+            <a:r>
+              <a:t>Question to pose: "A design with a huge fixed server 'handles any load' — is it scalable?" (No — it's</a:t>
+            </a:r>
+          </a:p>
+          <a:p>
+            <a:r>
+              <a:t>over-provisioned; scalable means capacity moves WITH load).</a:t>
+            </a:r>
+          </a:p>
+          <a:p>
+            <a:r>
+              <a:t>UoC/AT1 tie: ICTCLD504 PC 2.2 (select &amp; improve resources for scalability) → AT1 Solution Design</a:t>
+            </a:r>
+          </a:p>
+          <a:p>
+            <a:r>
+              <a:t>resource-selection sections.</a:t>
+            </a:r>
+          </a:p>
+        </p:txBody>
+      </p:sp>
+      <p:sp>
+        <p:nvSpPr>
+          <p:cNvPr id="4" name="Slide Number Placeholder 3"/>
+          <p:cNvSpPr>
+            <a:spLocks noGrp="1"/>
+          </p:cNvSpPr>
+          <p:nvPr>
+            <p:ph type="sldNum" idx="5" sz="quarter"/>
+          </p:nvPr>
+        </p:nvSpPr>
+        <p:spPr/>
+      </p:sp>
+    </p:spTree>
+  </p:cSld>
+  <p:clrMapOvr>
+    <a:masterClrMapping/>
+  </p:clrMapOvr>
+</p:notes>
+</file>
+
+<file path=ppt/notesSlides/notesSlide3.xml><?xml version="1.0" encoding="utf-8"?>
+<p:notes xmlns:a="http://schemas.openxmlformats.org/drawingml/2006/main" xmlns:p="http://schemas.openxmlformats.org/presentationml/2006/main" xmlns:r="http://schemas.openxmlformats.org/officeDocument/2006/relationships">
+  <p:cSld>
+    <p:spTree>
+      <p:nvGrpSpPr>
+        <p:cNvPr id="1" name=""/>
+        <p:cNvGrpSpPr/>
+        <p:nvPr/>
+      </p:nvGrpSpPr>
+      <p:grpSpPr>
+        <a:xfrm>
+          <a:off x="0" y="0"/>
+          <a:ext cx="0" cy="0"/>
+          <a:chOff x="0" y="0"/>
+          <a:chExt cx="0" cy="0"/>
+        </a:xfrm>
+      </p:grpSpPr>
+      <p:sp>
+        <p:nvSpPr>
+          <p:cNvPr id="2" name="Slide Image Placeholder 1"/>
+          <p:cNvSpPr>
+            <a:spLocks noGrp="1"/>
+          </p:cNvSpPr>
+          <p:nvPr>
+            <p:ph type="sldImg" idx="2"/>
+          </p:nvPr>
+        </p:nvSpPr>
+        <p:spPr/>
+      </p:sp>
+      <p:sp>
+        <p:nvSpPr>
+          <p:cNvPr id="3" name="Notes Placeholder 2"/>
+          <p:cNvSpPr>
+            <a:spLocks noGrp="1"/>
+          </p:cNvSpPr>
+          <p:nvPr>
+            <p:ph type="body" idx="3" sz="quarter"/>
+          </p:nvPr>
+        </p:nvSpPr>
+        <p:spPr/>
+        <p:txBody>
+          <a:bodyPr/>
+          <a:lstStyle/>
+          <a:p>
+            <a:r>
+              <a:t>Install the FOUR-COMPONENT structure off the diagram — the frame the whole scalability design (and the</a:t>
+            </a:r>
+          </a:p>
+          <a:p>
+            <a:r>
+              <a:t>AT2 build) is organised by.</a:t>
+            </a:r>
+          </a:p>
+          <a:p>
+            <a:r>
+              <a:t>• First bullet: split the design across four tiers — network, compute, database, storage. Point to each</a:t>
+            </a:r>
+          </a:p>
+          <a:p>
+            <a:r>
+              <a:t>on the diagram.</a:t>
+            </a:r>
+          </a:p>
+          <a:p>
+            <a:r>
+              <a:t>• Second bullet: compute and storage are the tiers that scale ELASTICALLY on demand; network and</a:t>
+            </a:r>
+          </a:p>
+          <a:p>
+            <a:r>
+              <a:t>database are selected and configured to SUPPORT that scale. Not all four scale the same way.</a:t>
+            </a:r>
+          </a:p>
+          <a:p>
+            <a:r>
+              <a:t>• Third bullet (the seam): these are the same four units the AT2 team later divides the IaC write by — a</a:t>
+            </a:r>
+          </a:p>
+          <a:p>
+            <a:r>
+              <a:t>clean seam from design (now) to build (AT2/AT3). Flag it; it's a deliberate design-to-build hand-off.</a:t>
+            </a:r>
+          </a:p>
+          <a:p>
+            <a:r>
+              <a:t>Misconception to pre-empt: "all four tiers scale the same way." No — compute/storage scale elastically;</a:t>
+            </a:r>
+          </a:p>
+          <a:p>
+            <a:r>
+              <a:t>network/database are sized and configured to carry that scale. Treating them identically misdesigns the</a:t>
+            </a:r>
+          </a:p>
+          <a:p>
+            <a:r>
+              <a:t>tier.</a:t>
+            </a:r>
+          </a:p>
+          <a:p>
+            <a:r>
+              <a:t>Question to pose: "Which of the four tiers actually add and remove capacity on demand — and which just</a:t>
+            </a:r>
+          </a:p>
+          <a:p>
+            <a:r>
+              <a:t>have to support that?" (compute + storage scale; network + database support).</a:t>
+            </a:r>
+          </a:p>
+          <a:p>
+            <a:r>
+              <a:t>UoC/AT1 tie: ICTCLD504 PC 2.2 (select &amp; improve compute/storage/database/network resources) → AT1</a:t>
+            </a:r>
+          </a:p>
+          <a:p>
+            <a:r>
+              <a:t>Solution Design; the four components are also the AT2 IaC work-split.</a:t>
+            </a:r>
+          </a:p>
+        </p:txBody>
+      </p:sp>
+      <p:sp>
+        <p:nvSpPr>
+          <p:cNvPr id="4" name="Slide Number Placeholder 3"/>
+          <p:cNvSpPr>
+            <a:spLocks noGrp="1"/>
+          </p:cNvSpPr>
+          <p:nvPr>
+            <p:ph type="sldNum" idx="5" sz="quarter"/>
+          </p:nvPr>
+        </p:nvSpPr>
+        <p:spPr/>
+      </p:sp>
+    </p:spTree>
+  </p:cSld>
+  <p:clrMapOvr>
+    <a:masterClrMapping/>
+  </p:clrMapOvr>
+</p:notes>
+</file>
+
+<file path=ppt/notesSlides/notesSlide4.xml><?xml version="1.0" encoding="utf-8"?>
+<p:notes xmlns:a="http://schemas.openxmlformats.org/drawingml/2006/main" xmlns:p="http://schemas.openxmlformats.org/presentationml/2006/main" xmlns:r="http://schemas.openxmlformats.org/officeDocument/2006/relationships">
+  <p:cSld>
+    <p:spTree>
+      <p:nvGrpSpPr>
+        <p:cNvPr id="1" name=""/>
+        <p:cNvGrpSpPr/>
+        <p:nvPr/>
+      </p:nvGrpSpPr>
+      <p:grpSpPr>
+        <a:xfrm>
+          <a:off x="0" y="0"/>
+          <a:ext cx="0" cy="0"/>
+          <a:chOff x="0" y="0"/>
+          <a:chExt cx="0" cy="0"/>
+        </a:xfrm>
+      </p:grpSpPr>
+      <p:sp>
+        <p:nvSpPr>
+          <p:cNvPr id="2" name="Slide Image Placeholder 1"/>
+          <p:cNvSpPr>
+            <a:spLocks noGrp="1"/>
+          </p:cNvSpPr>
+          <p:nvPr>
+            <p:ph type="sldImg" idx="2"/>
+          </p:nvPr>
+        </p:nvSpPr>
+        <p:spPr/>
+      </p:sp>
+      <p:sp>
+        <p:nvSpPr>
+          <p:cNvPr id="3" name="Notes Placeholder 2"/>
+          <p:cNvSpPr>
+            <a:spLocks noGrp="1"/>
+          </p:cNvSpPr>
+          <p:nvPr>
+            <p:ph type="body" idx="3" sz="quarter"/>
+          </p:nvPr>
+        </p:nvSpPr>
+        <p:spPr/>
+        <p:txBody>
+          <a:bodyPr/>
+          <a:lstStyle/>
+          <a:p>
+            <a:r>
+              <a:t>Walk each of the four tiers concretely — what "select and improve for scalability" means per tier. This</a:t>
+            </a:r>
+          </a:p>
+          <a:p>
+            <a:r>
+              <a:t>is the how-to behind the four-component frame.</a:t>
+            </a:r>
+          </a:p>
+          <a:p>
+            <a:r>
+              <a:t>• Network: right-size the path and the load-spreading so the tier below can scale OUT behind it.</a:t>
+            </a:r>
+          </a:p>
+          <a:p>
+            <a:r>
+              <a:t>• Compute: move from fixed capacity to a POOL that grows and shrinks on demand (auto scaling) — the</a:t>
+            </a:r>
+          </a:p>
+          <a:p>
+            <a:r>
+              <a:t>clearest example of elasticity.</a:t>
+            </a:r>
+          </a:p>
+          <a:p>
+            <a:r>
+              <a:t>• Database: select a managed data service that scales READS without a rebuild, while keeping</a:t>
+            </a:r>
+          </a:p>
+          <a:p>
+            <a:r>
+              <a:t>Ledgerline's accounting data consistent. (Note the consistency constraint — it's an accounting system.)</a:t>
+            </a:r>
+          </a:p>
+          <a:p>
+            <a:r>
+              <a:t>• Storage: select storage that grows on demand rather than a fixed-size volume.</a:t>
+            </a:r>
+          </a:p>
+          <a:p>
+            <a:r>
+              <a:t>Misconception to pre-empt: "scale the database by adding write replicas." No — an accounting system</a:t>
+            </a:r>
+          </a:p>
+          <a:p>
+            <a:r>
+              <a:t>needs consistency; you scale READS and keep writes consistent, you don't shard the ledger for</a:t>
+            </a:r>
+          </a:p>
+          <a:p>
+            <a:r>
+              <a:t>throughput.</a:t>
+            </a:r>
+          </a:p>
+          <a:p>
+            <a:r>
+              <a:t>Question to pose: "Compute scales by a pool that grows/shrinks — what's the equivalent move for</a:t>
+            </a:r>
+          </a:p>
+          <a:p>
+            <a:r>
+              <a:t>storage?" (grows on demand vs a fixed-size volume).</a:t>
+            </a:r>
+          </a:p>
+          <a:p>
+            <a:r>
+              <a:t>UoC/AT1 tie: ICTCLD504 PC 2.2 (select &amp; improve each resource tier to business needs) → AT1 Solution</a:t>
+            </a:r>
+          </a:p>
+          <a:p>
+            <a:r>
+              <a:t>Design resource selection.</a:t>
+            </a:r>
+          </a:p>
+        </p:txBody>
+      </p:sp>
+      <p:sp>
+        <p:nvSpPr>
+          <p:cNvPr id="4" name="Slide Number Placeholder 3"/>
+          <p:cNvSpPr>
+            <a:spLocks noGrp="1"/>
+          </p:cNvSpPr>
+          <p:nvPr>
+            <p:ph type="sldNum" idx="5" sz="quarter"/>
+          </p:nvPr>
+        </p:nvSpPr>
+        <p:spPr/>
+      </p:sp>
+    </p:spTree>
+  </p:cSld>
+  <p:clrMapOvr>
+    <a:masterClrMapping/>
+  </p:clrMapOvr>
+</p:notes>
+</file>
+
+<file path=ppt/notesSlides/notesSlide5.xml><?xml version="1.0" encoding="utf-8"?>
+<p:notes xmlns:a="http://schemas.openxmlformats.org/drawingml/2006/main" xmlns:p="http://schemas.openxmlformats.org/presentationml/2006/main" xmlns:r="http://schemas.openxmlformats.org/officeDocument/2006/relationships">
+  <p:cSld>
+    <p:spTree>
+      <p:nvGrpSpPr>
+        <p:cNvPr id="1" name=""/>
+        <p:cNvGrpSpPr/>
+        <p:nvPr/>
+      </p:nvGrpSpPr>
+      <p:grpSpPr>
+        <a:xfrm>
+          <a:off x="0" y="0"/>
+          <a:ext cx="0" cy="0"/>
+          <a:chOff x="0" y="0"/>
+          <a:chExt cx="0" cy="0"/>
+        </a:xfrm>
+      </p:grpSpPr>
+      <p:sp>
+        <p:nvSpPr>
+          <p:cNvPr id="2" name="Slide Image Placeholder 1"/>
+          <p:cNvSpPr>
+            <a:spLocks noGrp="1"/>
+          </p:cNvSpPr>
+          <p:nvPr>
+            <p:ph type="sldImg" idx="2"/>
+          </p:nvPr>
+        </p:nvSpPr>
+        <p:spPr/>
+      </p:sp>
+      <p:sp>
+        <p:nvSpPr>
+          <p:cNvPr id="3" name="Notes Placeholder 2"/>
+          <p:cNvSpPr>
+            <a:spLocks noGrp="1"/>
+          </p:cNvSpPr>
+          <p:nvPr>
+            <p:ph type="body" idx="3" sz="quarter"/>
+          </p:nvPr>
+        </p:nvSpPr>
+        <p:spPr/>
+        <p:txBody>
+          <a:bodyPr/>
+          <a:lstStyle/>
+          <a:p>
+            <a:r>
+              <a:t>The justification discipline — every resource choice ties to a stated business need, and nothing is</a:t>
+            </a:r>
+          </a:p>
+          <a:p>
+            <a:r>
+              <a:t>scaled further than a need justifies. This is what turns selections into a defensible design.</a:t>
+            </a:r>
+          </a:p>
+          <a:p>
+            <a:r>
+              <a:t>• First bullet: tie every resource choice to a stated Ledgerline business need — why THIS tier, why THIS</a:t>
+            </a:r>
+          </a:p>
+          <a:p>
+            <a:r>
+              <a:t>size. No choice without a reason.</a:t>
+            </a:r>
+          </a:p>
+          <a:p>
+            <a:r>
+              <a:t>• Second bullet: choose the simplest option that meets the need; note where capacity scales elastically</a:t>
+            </a:r>
+          </a:p>
+          <a:p>
+            <a:r>
+              <a:t>and HOW it would be demonstrated by test (the AT3 link).</a:t>
+            </a:r>
+          </a:p>
+          <a:p>
+            <a:r>
+              <a:t>• Third bullet: do not over-engineer — no tier scaled beyond what a need justifies.</a:t>
+            </a:r>
+          </a:p>
+          <a:p>
+            <a:r>
+              <a:t>Misconception to pre-empt: "more headroom is safer, so scale up." No — unjustified capacity is</a:t>
+            </a:r>
+          </a:p>
+          <a:p>
+            <a:r>
+              <a:t>gold-plating and loses marks; the defensible design is the simplest one that meets the need.</a:t>
+            </a:r>
+          </a:p>
+          <a:p>
+            <a:r>
+              <a:t>Question to pose: "If I asked 'why is the compute tier sized like that?', what's your answer?" (a named</a:t>
+            </a:r>
+          </a:p>
+          <a:p>
+            <a:r>
+              <a:t>business need + how it scales on demand — not 'to be safe').</a:t>
+            </a:r>
+          </a:p>
+          <a:p>
+            <a:r>
+              <a:t>UoC/AT1 tie: ICTCLD504 PC 2.2 (select &amp; improve resources ACCORDING TO business needs) → AT1 Solution</a:t>
+            </a:r>
+          </a:p>
+          <a:p>
+            <a:r>
+              <a:t>Design resource justification.</a:t>
+            </a:r>
+          </a:p>
+        </p:txBody>
+      </p:sp>
+      <p:sp>
+        <p:nvSpPr>
+          <p:cNvPr id="4" name="Slide Number Placeholder 3"/>
+          <p:cNvSpPr>
+            <a:spLocks noGrp="1"/>
+          </p:cNvSpPr>
+          <p:nvPr>
+            <p:ph type="sldNum" idx="5" sz="quarter"/>
+          </p:nvPr>
+        </p:nvSpPr>
+        <p:spPr/>
+      </p:sp>
+    </p:spTree>
+  </p:cSld>
+  <p:clrMapOvr>
+    <a:masterClrMapping/>
+  </p:clrMapOvr>
+</p:notes>
+</file>
+
+<file path=ppt/notesSlides/notesSlide6.xml><?xml version="1.0" encoding="utf-8"?>
+<p:notes xmlns:a="http://schemas.openxmlformats.org/drawingml/2006/main" xmlns:p="http://schemas.openxmlformats.org/presentationml/2006/main" xmlns:r="http://schemas.openxmlformats.org/officeDocument/2006/relationships">
+  <p:cSld>
+    <p:spTree>
+      <p:nvGrpSpPr>
+        <p:cNvPr id="1" name=""/>
+        <p:cNvGrpSpPr/>
+        <p:nvPr/>
+      </p:nvGrpSpPr>
+      <p:grpSpPr>
+        <a:xfrm>
+          <a:off x="0" y="0"/>
+          <a:ext cx="0" cy="0"/>
+          <a:chOff x="0" y="0"/>
+          <a:chExt cx="0" cy="0"/>
+        </a:xfrm>
+      </p:grpSpPr>
+      <p:sp>
+        <p:nvSpPr>
+          <p:cNvPr id="2" name="Slide Image Placeholder 1"/>
+          <p:cNvSpPr>
+            <a:spLocks noGrp="1"/>
+          </p:cNvSpPr>
+          <p:nvPr>
+            <p:ph type="sldImg" idx="2"/>
+          </p:nvPr>
+        </p:nvSpPr>
+        <p:spPr/>
+      </p:sp>
+      <p:sp>
+        <p:nvSpPr>
+          <p:cNvPr id="3" name="Notes Placeholder 2"/>
+          <p:cNvSpPr>
+            <a:spLocks noGrp="1"/>
+          </p:cNvSpPr>
+          <p:nvPr>
+            <p:ph type="body" idx="3" sz="quarter"/>
+          </p:nvPr>
+        </p:nvSpPr>
+        <p:spPr/>
+        <p:txBody>
+          <a:bodyPr/>
+          <a:lstStyle/>
+          <a:p>
+            <a:r>
+              <a:t>Facilitation — the Section 1 practice; students select and improve the four tiers for the practice</a:t>
+            </a:r>
+          </a:p>
+          <a:p>
+            <a:r>
+              <a:t>engagement, marking where capacity scales elastically and justifying each choice.</a:t>
+            </a:r>
+          </a:p>
+          <a:p>
+            <a:r>
+              <a:t>Tell students: "For the practice engagement, select and improve the network, compute, database and</a:t>
+            </a:r>
+          </a:p>
+          <a:p>
+            <a:r>
+              <a:t>storage tiers to its business needs. Mark where capacity scales elastically, and justify each choice</a:t>
+            </a:r>
+          </a:p>
+          <a:p>
+            <a:r>
+              <a:t>against a named need."</a:t>
+            </a:r>
+          </a:p>
+          <a:p>
+            <a:r>
+              <a:t>Steps (put on the board):</a:t>
+            </a:r>
+          </a:p>
+          <a:p>
+            <a:r>
+              <a:t>1. Take the four tiers one at a time — network, compute, database, storage.</a:t>
+            </a:r>
+          </a:p>
+          <a:p>
+            <a:r>
+              <a:t>2. For each, choose how to select/improve it for scalability to a stated need.</a:t>
+            </a:r>
+          </a:p>
+          <a:p>
+            <a:r>
+              <a:t>3. Mark which tiers scale ELASTICALLY on demand, and note how you'd demonstrate it by test.</a:t>
+            </a:r>
+          </a:p>
+          <a:p>
+            <a:r>
+              <a:t>Must produce: a four-tier resource design, each choice tied to a named need, elastic tiers marked.</a:t>
+            </a:r>
+          </a:p>
+          <a:p>
+            <a:r>
+              <a:t>Timing: ~30 min then discuss. Where they get stuck: they over-provision "to be safe" (push</a:t>
+            </a:r>
+          </a:p>
+          <a:p>
+            <a:r>
+              <a:t>right-sizing), and they mark network/database as elastic when those SUPPORT scale rather than scale</a:t>
+            </a:r>
+          </a:p>
+          <a:p>
+            <a:r>
+              <a:t>themselves — circulate and correct.</a:t>
+            </a:r>
+          </a:p>
+          <a:p>
+            <a:r>
+              <a:t>Share-back prompt: ask one student which tiers they marked elastic, and challenge any that are really</a:t>
+            </a:r>
+          </a:p>
+          <a:p>
+            <a:r>
+              <a:t>just "big."</a:t>
+            </a:r>
+          </a:p>
+          <a:p>
+            <a:r>
+              <a:t>No-leakage note: the website is the practice vehicle; AT1 assesses resource selection on Ledgerline —</a:t>
+            </a:r>
+          </a:p>
+          <a:p>
+            <a:r>
+              <a:t>comparable, not identical.</a:t>
+            </a:r>
+          </a:p>
+        </p:txBody>
+      </p:sp>
+      <p:sp>
+        <p:nvSpPr>
+          <p:cNvPr id="4" name="Slide Number Placeholder 3"/>
+          <p:cNvSpPr>
+            <a:spLocks noGrp="1"/>
+          </p:cNvSpPr>
+          <p:nvPr>
+            <p:ph type="sldNum" idx="5" sz="quarter"/>
+          </p:nvPr>
+        </p:nvSpPr>
+        <p:spPr/>
+      </p:sp>
+    </p:spTree>
+  </p:cSld>
+  <p:clrMapOvr>
+    <a:masterClrMapping/>
+  </p:clrMapOvr>
+</p:notes>
+</file>
+
+<file path=ppt/notesSlides/notesSlide7.xml><?xml version="1.0" encoding="utf-8"?>
+<p:notes xmlns:a="http://schemas.openxmlformats.org/drawingml/2006/main" xmlns:p="http://schemas.openxmlformats.org/presentationml/2006/main" xmlns:r="http://schemas.openxmlformats.org/officeDocument/2006/relationships">
+  <p:cSld>
+    <p:spTree>
+      <p:nvGrpSpPr>
+        <p:cNvPr id="1" name=""/>
+        <p:cNvGrpSpPr/>
+        <p:nvPr/>
+      </p:nvGrpSpPr>
+      <p:grpSpPr>
+        <a:xfrm>
+          <a:off x="0" y="0"/>
+          <a:ext cx="0" cy="0"/>
+          <a:chOff x="0" y="0"/>
+          <a:chExt cx="0" cy="0"/>
+        </a:xfrm>
+      </p:grpSpPr>
+      <p:sp>
+        <p:nvSpPr>
+          <p:cNvPr id="2" name="Slide Image Placeholder 1"/>
+          <p:cNvSpPr>
+            <a:spLocks noGrp="1"/>
+          </p:cNvSpPr>
+          <p:nvPr>
+            <p:ph type="sldImg" idx="2"/>
+          </p:nvPr>
+        </p:nvSpPr>
+        <p:spPr/>
+      </p:sp>
+      <p:sp>
+        <p:nvSpPr>
+          <p:cNvPr id="3" name="Notes Placeholder 2"/>
+          <p:cNvSpPr>
+            <a:spLocks noGrp="1"/>
+          </p:cNvSpPr>
+          <p:nvPr>
+            <p:ph type="body" idx="3" sz="quarter"/>
+          </p:nvPr>
+        </p:nvSpPr>
+        <p:spPr/>
+        <p:txBody>
+          <a:bodyPr/>
+          <a:lstStyle/>
+          <a:p>
+            <a:r>
+              <a:t>Open Section 2 — object storage, taught as CONTEXTUAL knowledge (KE 6). It's not a Ledgerline</a:t>
+            </a:r>
+          </a:p>
+          <a:p>
+            <a:r>
+              <a:t>requirement; it's the contrast that sharpens what Ledgerline's storage actually is.</a:t>
+            </a:r>
+          </a:p>
+          <a:p>
+            <a:r>
+              <a:t>• First bullet: object storage holds whole objects (files) addressed by key — it scales storage on</a:t>
+            </a:r>
+          </a:p>
+          <a:p>
+            <a:r>
+              <a:t>demand and serves static assets directly.</a:t>
+            </a:r>
+          </a:p>
+          <a:p>
+            <a:r>
+              <a:t>• Second bullet: it's the natural home for a STATIC web site's content — HTML, images, downloads served</a:t>
+            </a:r>
+          </a:p>
+          <a:p>
+            <a:r>
+              <a:t>without a server.</a:t>
+            </a:r>
+          </a:p>
+          <a:p>
+            <a:r>
+              <a:t>• Third bullet (the framing): contextual here — not a Ledgerline need, but the contrast that sharpens</a:t>
+            </a:r>
+          </a:p>
+          <a:p>
+            <a:r>
+              <a:t>what Ledgerline's storage actually needs. Signal this is a "know it for the KE question" slide.</a:t>
+            </a:r>
+          </a:p>
+          <a:p>
+            <a:r>
+              <a:t>Misconception to pre-empt: "so we should put Ledgerline on object storage." No — Ledgerline is a</a:t>
+            </a:r>
+          </a:p>
+          <a:p>
+            <a:r>
+              <a:t>transactional, database-backed system; object storage suits STATIC content. The next slide draws the</a:t>
+            </a:r>
+          </a:p>
+          <a:p>
+            <a:r>
+              <a:t>contrast.</a:t>
+            </a:r>
+          </a:p>
+          <a:p>
+            <a:r>
+              <a:t>Question to pose: "What kind of workload is object storage the natural home for — and is Ledgerline one</a:t>
+            </a:r>
+          </a:p>
+          <a:p>
+            <a:r>
+              <a:t>of them?" (static websites; no — Ledgerline is stateful).</a:t>
+            </a:r>
+          </a:p>
+          <a:p>
+            <a:r>
+              <a:t>UoC/AT1 tie: ICTCLD504 KE 6 (use of object storage for static web sites) → the object-storage-in-context</a:t>
+            </a:r>
+          </a:p>
+          <a:p>
+            <a:r>
+              <a:t>question in the AT1 Part A KE appendix.</a:t>
+            </a:r>
+          </a:p>
+        </p:txBody>
+      </p:sp>
+      <p:sp>
+        <p:nvSpPr>
+          <p:cNvPr id="4" name="Slide Number Placeholder 3"/>
+          <p:cNvSpPr>
+            <a:spLocks noGrp="1"/>
+          </p:cNvSpPr>
+          <p:nvPr>
+            <p:ph type="sldNum" idx="5" sz="quarter"/>
+          </p:nvPr>
+        </p:nvSpPr>
+        <p:spPr/>
+      </p:sp>
+    </p:spTree>
+  </p:cSld>
+  <p:clrMapOvr>
+    <a:masterClrMapping/>
+  </p:clrMapOvr>
+</p:notes>
+</file>
+
+<file path=ppt/notesSlides/notesSlide8.xml><?xml version="1.0" encoding="utf-8"?>
+<p:notes xmlns:a="http://schemas.openxmlformats.org/drawingml/2006/main" xmlns:p="http://schemas.openxmlformats.org/presentationml/2006/main" xmlns:r="http://schemas.openxmlformats.org/officeDocument/2006/relationships">
+  <p:cSld>
+    <p:spTree>
+      <p:nvGrpSpPr>
+        <p:cNvPr id="1" name=""/>
+        <p:cNvGrpSpPr/>
+        <p:nvPr/>
+      </p:nvGrpSpPr>
+      <p:grpSpPr>
+        <a:xfrm>
+          <a:off x="0" y="0"/>
+          <a:ext cx="0" cy="0"/>
+          <a:chOff x="0" y="0"/>
+          <a:chExt cx="0" cy="0"/>
+        </a:xfrm>
+      </p:grpSpPr>
+      <p:sp>
+        <p:nvSpPr>
+          <p:cNvPr id="2" name="Slide Image Placeholder 1"/>
+          <p:cNvSpPr>
+            <a:spLocks noGrp="1"/>
+          </p:cNvSpPr>
+          <p:nvPr>
+            <p:ph type="sldImg" idx="2"/>
+          </p:nvPr>
+        </p:nvSpPr>
+        <p:spPr/>
+      </p:sp>
+      <p:sp>
+        <p:nvSpPr>
+          <p:cNvPr id="3" name="Notes Placeholder 2"/>
+          <p:cNvSpPr>
+            <a:spLocks noGrp="1"/>
+          </p:cNvSpPr>
+          <p:nvPr>
+            <p:ph type="body" idx="3" sz="quarter"/>
+          </p:nvPr>
+        </p:nvSpPr>
+        <p:spPr/>
+        <p:txBody>
+          <a:bodyPr/>
+          <a:lstStyle/>
+          <a:p>
+            <a:r>
+              <a:t>Draw the CONTRAST explicitly — Ledgerline (stateful) versus an object-storage-dependent static-website</a:t>
+            </a:r>
+          </a:p>
+          <a:p>
+            <a:r>
+              <a:t>workload. The contrast is the answer to the KE-appendix question.</a:t>
+            </a:r>
+          </a:p>
+          <a:p>
+            <a:r>
+              <a:t>• First bullet: Ledgerline is a stateful accounting system — transactional, consistent, database-backed;</a:t>
+            </a:r>
+          </a:p>
+          <a:p>
+            <a:r>
+              <a:t>object storage is NOT its primary store.</a:t>
+            </a:r>
+          </a:p>
+          <a:p>
+            <a:r>
+              <a:t>• Second bullet: an object-storage-dependent static-website workload is the OPPOSITE — its content lives</a:t>
+            </a:r>
+          </a:p>
+          <a:p>
+            <a:r>
+              <a:t>in object storage and scales with it.</a:t>
+            </a:r>
+          </a:p>
+          <a:p>
+            <a:r>
+              <a:t>• Third bullet: be able to explain how you would PROVISION object storage for such a workload if the need</a:t>
+            </a:r>
+          </a:p>
+          <a:p>
+            <a:r>
+              <a:t>arose (the examinable skill).</a:t>
+            </a:r>
+          </a:p>
+          <a:p>
+            <a:r>
+              <a:t>Misconception to pre-empt: "every system should use object storage because it scales." No — fit to the</a:t>
+            </a:r>
+          </a:p>
+          <a:p>
+            <a:r>
+              <a:t>workload: static content → object storage; transactional accounting data → a managed database.</a:t>
+            </a:r>
+          </a:p>
+          <a:p>
+            <a:r>
+              <a:t>Question to pose: "For a static website you'd reach for object storage — walk me through provisioning it.</a:t>
+            </a:r>
+          </a:p>
+          <a:p>
+            <a:r>
+              <a:t>Now why is that the wrong store for Ledgerline's ledger?" (static vs transactional/consistent).</a:t>
+            </a:r>
+          </a:p>
+          <a:p>
+            <a:r>
+              <a:t>UoC/AT1 tie: ICTCLD504 KE 6 → AT1 Part A KE appendix (the object-storage-in-context question).</a:t>
+            </a:r>
+          </a:p>
+        </p:txBody>
+      </p:sp>
+      <p:sp>
+        <p:nvSpPr>
+          <p:cNvPr id="4" name="Slide Number Placeholder 3"/>
+          <p:cNvSpPr>
+            <a:spLocks noGrp="1"/>
+          </p:cNvSpPr>
+          <p:nvPr>
+            <p:ph type="sldNum" idx="5" sz="quarter"/>
+          </p:nvPr>
+        </p:nvSpPr>
+        <p:spPr/>
+      </p:sp>
+    </p:spTree>
+  </p:cSld>
+  <p:clrMapOvr>
+    <a:masterClrMapping/>
+  </p:clrMapOvr>
+</p:notes>
+</file>
+
+<file path=ppt/notesSlides/notesSlide9.xml><?xml version="1.0" encoding="utf-8"?>
+<p:notes xmlns:a="http://schemas.openxmlformats.org/drawingml/2006/main" xmlns:p="http://schemas.openxmlformats.org/presentationml/2006/main" xmlns:r="http://schemas.openxmlformats.org/officeDocument/2006/relationships">
+  <p:cSld>
+    <p:spTree>
+      <p:nvGrpSpPr>
+        <p:cNvPr id="1" name=""/>
+        <p:cNvGrpSpPr/>
+        <p:nvPr/>
+      </p:nvGrpSpPr>
+      <p:grpSpPr>
+        <a:xfrm>
+          <a:off x="0" y="0"/>
+          <a:ext cx="0" cy="0"/>
+          <a:chOff x="0" y="0"/>
+          <a:chExt cx="0" cy="0"/>
+        </a:xfrm>
+      </p:grpSpPr>
+      <p:sp>
+        <p:nvSpPr>
+          <p:cNvPr id="2" name="Slide Image Placeholder 1"/>
+          <p:cNvSpPr>
+            <a:spLocks noGrp="1"/>
+          </p:cNvSpPr>
+          <p:nvPr>
+            <p:ph type="sldImg" idx="2"/>
+          </p:nvPr>
+        </p:nvSpPr>
+        <p:spPr/>
+      </p:sp>
+      <p:sp>
+        <p:nvSpPr>
+          <p:cNvPr id="3" name="Notes Placeholder 2"/>
+          <p:cNvSpPr>
+            <a:spLocks noGrp="1"/>
+          </p:cNvSpPr>
+          <p:nvPr>
+            <p:ph type="body" idx="3" sz="quarter"/>
+          </p:nvPr>
+        </p:nvSpPr>
+        <p:spPr/>
+        <p:txBody>
+          <a:bodyPr/>
+          <a:lstStyle/>
+          <a:p>
+            <a:r>
+              <a:t>Facilitation — the Section 2 practice; students answer the object-storage-in-context question in</a:t>
+            </a:r>
+          </a:p>
+          <a:p>
+            <a:r>
+              <a:t>writing — a direct rehearsal of the AT1 KE-appendix question.</a:t>
+            </a:r>
+          </a:p>
+          <a:p>
+            <a:r>
+              <a:t>Tell students: "Contrast Ledgerline's storage needs with an object-storage-dependent website workload.</a:t>
+            </a:r>
+          </a:p>
+          <a:p>
+            <a:r>
+              <a:t>Then explain how you would provision object storage for the website workload if it were needed."</a:t>
+            </a:r>
+          </a:p>
+          <a:p>
+            <a:r>
+              <a:t>Steps (put on the board):</a:t>
+            </a:r>
+          </a:p>
+          <a:p>
+            <a:r>
+              <a:t>1. State Ledgerline's storage character — stateful, transactional, database-backed.</a:t>
+            </a:r>
+          </a:p>
+          <a:p>
+            <a:r>
+              <a:t>2. Contrast the static-website workload — content in object storage, scales with it.</a:t>
+            </a:r>
+          </a:p>
+          <a:p>
+            <a:r>
+              <a:t>3. Explain how you'd provision the object storage for that website workload.</a:t>
+            </a:r>
+          </a:p>
+          <a:p>
+            <a:r>
+              <a:t>Must produce: a short written answer with the contrast plus a provisioning explanation.</a:t>
+            </a:r>
+          </a:p>
+          <a:p>
+            <a:r>
+              <a:t>Timing: ~15 min then discuss. Where they get stuck: they describe object storage generically without the</a:t>
+            </a:r>
+          </a:p>
+          <a:p>
+            <a:r>
+              <a:t>CONTRAST, or forget the provisioning step — circulate and check both halves are present.</a:t>
+            </a:r>
+          </a:p>
+          <a:p>
+            <a:r>
+              <a:t>Share-back prompt: read one strong answer and ask the room whether it (a) contrasts and (b) provisions.</a:t>
+            </a:r>
+          </a:p>
+          <a:p>
+            <a:r>
+              <a:t>No-leakage note: this rehearses the KE-appendix question shape; AT1 asks it for Ledgerline — comparable,</a:t>
+            </a:r>
+          </a:p>
+          <a:p>
+            <a:r>
+              <a:t>not identical.</a:t>
+            </a:r>
+          </a:p>
+        </p:txBody>
+      </p:sp>
+      <p:sp>
+        <p:nvSpPr>
+          <p:cNvPr id="4" name="Slide Number Placeholder 3"/>
+          <p:cNvSpPr>
+            <a:spLocks noGrp="1"/>
+          </p:cNvSpPr>
+          <p:nvPr>
+            <p:ph type="sldNum" idx="5" sz="quarter"/>
+          </p:nvPr>
+        </p:nvSpPr>
+        <p:spPr/>
+      </p:sp>
+    </p:spTree>
+  </p:cSld>
+  <p:clrMapOvr>
+    <a:masterClrMapping/>
+  </p:clrMapOvr>
+</p:notes>
 </file>
 
 <file path=ppt/slideLayouts/slideLayout1.xml><?xml version="1.0" encoding="utf-8"?>
@@ -8464,4 +10059,324 @@
   </a:objectDefaults>
   <a:extraClrSchemeLst/>
 </a:theme>
+</file>
+
+<file path=ppt/theme/theme2.xml><?xml version="1.0" encoding="utf-8"?>
+<a:theme xmlns:a="http://schemas.openxmlformats.org/drawingml/2006/main" name="Office Theme">
+  <a:themeElements>
+    <a:clrScheme name="Office">
+      <a:dk1>
+        <a:sysClr val="windowText" lastClr="000000"/>
+      </a:dk1>
+      <a:lt1>
+        <a:sysClr val="window" lastClr="FFFFFF"/>
+      </a:lt1>
+      <a:dk2>
+        <a:srgbClr val="1F497D"/>
+      </a:dk2>
+      <a:lt2>
+        <a:srgbClr val="EEECE1"/>
+      </a:lt2>
+      <a:accent1>
+        <a:srgbClr val="4F81BD"/>
+      </a:accent1>
+      <a:accent2>
+        <a:srgbClr val="C0504D"/>
+      </a:accent2>
+      <a:accent3>
+        <a:srgbClr val="9BBB59"/>
+      </a:accent3>
+      <a:accent4>
+        <a:srgbClr val="8064A2"/>
+      </a:accent4>
+      <a:accent5>
+        <a:srgbClr val="4BACC6"/>
+      </a:accent5>
+      <a:accent6>
+        <a:srgbClr val="F79646"/>
+      </a:accent6>
+      <a:hlink>
+        <a:srgbClr val="0000FF"/>
+      </a:hlink>
+      <a:folHlink>
+        <a:srgbClr val="800080"/>
+      </a:folHlink>
+    </a:clrScheme>
+    <a:fontScheme name="Office">
+      <a:majorFont>
+        <a:latin typeface="Calibri"/>
+        <a:ea typeface=""/>
+        <a:cs typeface=""/>
+        <a:font script="Jpan" typeface="ＭＳ Ｐゴシック"/>
+        <a:font script="Hang" typeface="맑은 고딕"/>
+        <a:font script="Hans" typeface="宋体"/>
+        <a:font script="Hant" typeface="新細明體"/>
+        <a:font script="Arab" typeface="Times New Roman"/>
+        <a:font script="Hebr" typeface="Times New Roman"/>
+        <a:font script="Thai" typeface="Angsana New"/>
+        <a:font script="Ethi" typeface="Nyala"/>
+        <a:font script="Beng" typeface="Vrinda"/>
+        <a:font script="Gujr" typeface="Shruti"/>
+        <a:font script="Khmr" typeface="MoolBoran"/>
+        <a:font script="Knda" typeface="Tunga"/>
+        <a:font script="Guru" typeface="Raavi"/>
+        <a:font script="Cans" typeface="Euphemia"/>
+        <a:font script="Cher" typeface="Plantagenet Cherokee"/>
+        <a:font script="Yiii" typeface="Microsoft Yi Baiti"/>
+        <a:font script="Tibt" typeface="Microsoft Himalaya"/>
+        <a:font script="Thaa" typeface="MV Boli"/>
+        <a:font script="Deva" typeface="Mangal"/>
+        <a:font script="Telu" typeface="Gautami"/>
+        <a:font script="Taml" typeface="Latha"/>
+        <a:font script="Syrc" typeface="Estrangelo Edessa"/>
+        <a:font script="Orya" typeface="Kalinga"/>
+        <a:font script="Mlym" typeface="Kartika"/>
+        <a:font script="Laoo" typeface="DokChampa"/>
+        <a:font script="Sinh" typeface="Iskoola Pota"/>
+        <a:font script="Mong" typeface="Mongolian Baiti"/>
+        <a:font script="Viet" typeface="Times New Roman"/>
+        <a:font script="Uigh" typeface="Microsoft Uighur"/>
+        <a:font script="Geor" typeface="Sylfaen"/>
+      </a:majorFont>
+      <a:minorFont>
+        <a:latin typeface="Calibri"/>
+        <a:ea typeface=""/>
+        <a:cs typeface=""/>
+        <a:font script="Jpan" typeface="ＭＳ Ｐゴシック"/>
+        <a:font script="Hang" typeface="맑은 고딕"/>
+        <a:font script="Hans" typeface="宋体"/>
+        <a:font script="Hant" typeface="新細明體"/>
+        <a:font script="Arab" typeface="Arial"/>
+        <a:font script="Hebr" typeface="Arial"/>
+        <a:font script="Thai" typeface="Cordia New"/>
+        <a:font script="Ethi" typeface="Nyala"/>
+        <a:font script="Beng" typeface="Vrinda"/>
+        <a:font script="Gujr" typeface="Shruti"/>
+        <a:font script="Khmr" typeface="DaunPenh"/>
+        <a:font script="Knda" typeface="Tunga"/>
+        <a:font script="Guru" typeface="Raavi"/>
+        <a:font script="Cans" typeface="Euphemia"/>
+        <a:font script="Cher" typeface="Plantagenet Cherokee"/>
+        <a:font script="Yiii" typeface="Microsoft Yi Baiti"/>
+        <a:font script="Tibt" typeface="Microsoft Himalaya"/>
+        <a:font script="Thaa" typeface="MV Boli"/>
+        <a:font script="Deva" typeface="Mangal"/>
+        <a:font script="Telu" typeface="Gautami"/>
+        <a:font script="Taml" typeface="Latha"/>
+        <a:font script="Syrc" typeface="Estrangelo Edessa"/>
+        <a:font script="Orya" typeface="Kalinga"/>
+        <a:font script="Mlym" typeface="Kartika"/>
+        <a:font script="Laoo" typeface="DokChampa"/>
+        <a:font script="Sinh" typeface="Iskoola Pota"/>
+        <a:font script="Mong" typeface="Mongolian Baiti"/>
+        <a:font script="Viet" typeface="Arial"/>
+        <a:font script="Uigh" typeface="Microsoft Uighur"/>
+        <a:font script="Geor" typeface="Sylfaen"/>
+      </a:minorFont>
+    </a:fontScheme>
+    <a:fmtScheme name="Office">
+      <a:fillStyleLst>
+        <a:solidFill>
+          <a:schemeClr val="phClr"/>
+        </a:solidFill>
+        <a:gradFill rotWithShape="1">
+          <a:gsLst>
+            <a:gs pos="0">
+              <a:schemeClr val="phClr">
+                <a:tint val="50000"/>
+                <a:satMod val="300000"/>
+              </a:schemeClr>
+            </a:gs>
+            <a:gs pos="35000">
+              <a:schemeClr val="phClr">
+                <a:tint val="37000"/>
+                <a:satMod val="300000"/>
+              </a:schemeClr>
+            </a:gs>
+            <a:gs pos="100000">
+              <a:schemeClr val="phClr">
+                <a:tint val="15000"/>
+                <a:satMod val="350000"/>
+              </a:schemeClr>
+            </a:gs>
+          </a:gsLst>
+          <a:lin ang="16200000" scaled="1"/>
+        </a:gradFill>
+        <a:gradFill rotWithShape="1">
+          <a:gsLst>
+            <a:gs pos="0">
+              <a:schemeClr val="phClr">
+                <a:tint val="100000"/>
+                <a:shade val="100000"/>
+                <a:satMod val="130000"/>
+              </a:schemeClr>
+            </a:gs>
+            <a:gs pos="100000">
+              <a:schemeClr val="phClr">
+                <a:tint val="50000"/>
+                <a:shade val="100000"/>
+                <a:satMod val="350000"/>
+              </a:schemeClr>
+            </a:gs>
+          </a:gsLst>
+          <a:lin ang="16200000" scaled="0"/>
+        </a:gradFill>
+      </a:fillStyleLst>
+      <a:lnStyleLst>
+        <a:ln w="9525" cap="flat" cmpd="sng" algn="ctr">
+          <a:solidFill>
+            <a:schemeClr val="phClr">
+              <a:shade val="95000"/>
+              <a:satMod val="105000"/>
+            </a:schemeClr>
+          </a:solidFill>
+          <a:prstDash val="solid"/>
+        </a:ln>
+        <a:ln w="25400" cap="flat" cmpd="sng" algn="ctr">
+          <a:solidFill>
+            <a:schemeClr val="phClr"/>
+          </a:solidFill>
+          <a:prstDash val="solid"/>
+        </a:ln>
+        <a:ln w="38100" cap="flat" cmpd="sng" algn="ctr">
+          <a:solidFill>
+            <a:schemeClr val="phClr"/>
+          </a:solidFill>
+          <a:prstDash val="solid"/>
+        </a:ln>
+      </a:lnStyleLst>
+      <a:effectStyleLst>
+        <a:effectStyle>
+          <a:effectLst>
+            <a:outerShdw blurRad="40000" dist="20000" dir="5400000" rotWithShape="0">
+              <a:srgbClr val="000000">
+                <a:alpha val="38000"/>
+              </a:srgbClr>
+            </a:outerShdw>
+          </a:effectLst>
+        </a:effectStyle>
+        <a:effectStyle>
+          <a:effectLst>
+            <a:outerShdw blurRad="40000" dist="23000" dir="5400000" rotWithShape="0">
+              <a:srgbClr val="000000">
+                <a:alpha val="35000"/>
+              </a:srgbClr>
+            </a:outerShdw>
+          </a:effectLst>
+        </a:effectStyle>
+        <a:effectStyle>
+          <a:effectLst>
+            <a:outerShdw blurRad="40000" dist="23000" dir="5400000" rotWithShape="0">
+              <a:srgbClr val="000000">
+                <a:alpha val="35000"/>
+              </a:srgbClr>
+            </a:outerShdw>
+          </a:effectLst>
+          <a:scene3d>
+            <a:camera prst="orthographicFront">
+              <a:rot lat="0" lon="0" rev="0"/>
+            </a:camera>
+            <a:lightRig rig="threePt" dir="t">
+              <a:rot lat="0" lon="0" rev="1200000"/>
+            </a:lightRig>
+          </a:scene3d>
+          <a:sp3d>
+            <a:bevelT w="63500" h="25400"/>
+          </a:sp3d>
+        </a:effectStyle>
+      </a:effectStyleLst>
+      <a:bgFillStyleLst>
+        <a:solidFill>
+          <a:schemeClr val="phClr"/>
+        </a:solidFill>
+        <a:gradFill rotWithShape="1">
+          <a:gsLst>
+            <a:gs pos="0">
+              <a:schemeClr val="phClr">
+                <a:tint val="40000"/>
+                <a:satMod val="350000"/>
+              </a:schemeClr>
+            </a:gs>
+            <a:gs pos="40000">
+              <a:schemeClr val="phClr">
+                <a:tint val="45000"/>
+                <a:shade val="99000"/>
+                <a:satMod val="350000"/>
+              </a:schemeClr>
+            </a:gs>
+            <a:gs pos="100000">
+              <a:schemeClr val="phClr">
+                <a:shade val="20000"/>
+                <a:satMod val="255000"/>
+              </a:schemeClr>
+            </a:gs>
+          </a:gsLst>
+          <a:path path="circle">
+            <a:fillToRect l="50000" t="-80000" r="50000" b="180000"/>
+          </a:path>
+        </a:gradFill>
+        <a:gradFill rotWithShape="1">
+          <a:gsLst>
+            <a:gs pos="0">
+              <a:schemeClr val="phClr">
+                <a:tint val="80000"/>
+                <a:satMod val="300000"/>
+              </a:schemeClr>
+            </a:gs>
+            <a:gs pos="100000">
+              <a:schemeClr val="phClr">
+                <a:shade val="30000"/>
+                <a:satMod val="200000"/>
+              </a:schemeClr>
+            </a:gs>
+          </a:gsLst>
+          <a:path path="circle">
+            <a:fillToRect l="50000" t="50000" r="50000" b="50000"/>
+          </a:path>
+        </a:gradFill>
+      </a:bgFillStyleLst>
+    </a:fmtScheme>
+  </a:themeElements>
+  <a:objectDefaults>
+    <a:spDef>
+      <a:spPr/>
+      <a:bodyPr/>
+      <a:lstStyle/>
+      <a:style>
+        <a:lnRef idx="1">
+          <a:schemeClr val="accent1"/>
+        </a:lnRef>
+        <a:fillRef idx="3">
+          <a:schemeClr val="accent1"/>
+        </a:fillRef>
+        <a:effectRef idx="2">
+          <a:schemeClr val="accent1"/>
+        </a:effectRef>
+        <a:fontRef idx="minor">
+          <a:schemeClr val="lt1"/>
+        </a:fontRef>
+      </a:style>
+    </a:spDef>
+    <a:lnDef>
+      <a:spPr/>
+      <a:bodyPr/>
+      <a:lstStyle/>
+      <a:style>
+        <a:lnRef idx="2">
+          <a:schemeClr val="accent1"/>
+        </a:lnRef>
+        <a:fillRef idx="0">
+          <a:schemeClr val="accent1"/>
+        </a:fillRef>
+        <a:effectRef idx="1">
+          <a:schemeClr val="accent1"/>
+        </a:effectRef>
+        <a:fontRef idx="minor">
+          <a:schemeClr val="tx1"/>
+        </a:fontRef>
+      </a:style>
+    </a:lnDef>
+  </a:objectDefaults>
+  <a:extraClrSchemeLst/>
+</a:theme>
 </file>
--- a/S1-CL3-Cloud-Infrastructure-Improvement/delivery/topic_03/Topic_03_Slides.pptx
+++ b/S1-CL3-Cloud-Infrastructure-Improvement/delivery/topic_03/Topic_03_Slides.pptx
@@ -19,6 +19,16 @@
     <p:sldId id="267" r:id="rId19"/>
     <p:sldId id="268" r:id="rId20"/>
     <p:sldId id="269" r:id="rId21"/>
+    <p:sldId id="270" r:id="rId22"/>
+    <p:sldId id="271" r:id="rId23"/>
+    <p:sldId id="272" r:id="rId24"/>
+    <p:sldId id="273" r:id="rId25"/>
+    <p:sldId id="274" r:id="rId26"/>
+    <p:sldId id="275" r:id="rId27"/>
+    <p:sldId id="276" r:id="rId28"/>
+    <p:sldId id="277" r:id="rId29"/>
+    <p:sldId id="278" r:id="rId30"/>
+    <p:sldId id="279" r:id="rId31"/>
   </p:sldIdLst>
   <p:sldSz cx="12191695" cy="6858000" type="screen4x3"/>
   <p:notesSz cx="6858000" cy="9144000"/>
@@ -515,77 +525,307 @@
           <a:lstStyle/>
           <a:p>
             <a:r>
-              <a:t>Frame the scalability half of AT1's design — structured by the FOUR resource components that also</a:t>
-            </a:r>
-          </a:p>
-          <a:p>
-            <a:r>
-              <a:t>become the AT2 team's work-split. Set the depth: design to the business needs, prove-by-test at AT3, no</a:t>
-            </a:r>
-          </a:p>
-          <a:p>
-            <a:r>
-              <a:t>over-provisioning.</a:t>
-            </a:r>
-          </a:p>
-          <a:p>
-            <a:r>
-              <a:t>• First two bullets: Topic 3 continues AT1 — design the scalability improvements for Ledgerline,</a:t>
-            </a:r>
-          </a:p>
-          <a:p>
-            <a:r>
-              <a:t>structured by four components: network, compute, database, storage. These are the same four units the</a:t>
-            </a:r>
-          </a:p>
-          <a:p>
-            <a:r>
-              <a:t>AT2 team later divides the IaC write by — flag the seam.</a:t>
-            </a:r>
-          </a:p>
-          <a:p>
-            <a:r>
-              <a:t>• Third bullet: scalability here = elastic capacity-on-demand, demonstrable BY TEST at AT3 — not a</a:t>
-            </a:r>
-          </a:p>
-          <a:p>
-            <a:r>
-              <a:t>forecast, and not over-provisioning.</a:t>
-            </a:r>
-          </a:p>
-          <a:p>
-            <a:r>
-              <a:t>• Fourth bullet (the discipline): design only, to the business needs — the build is AT3.</a:t>
-            </a:r>
-          </a:p>
-          <a:p>
-            <a:r>
-              <a:t>Misconception to pre-empt: "scalable = big enough for the busiest day." No — that's over-provisioning</a:t>
-            </a:r>
-          </a:p>
-          <a:p>
-            <a:r>
-              <a:t>(paying for idle capacity); scalable means it GROWS and SHRINKS on demand. Different idea entirely.</a:t>
-            </a:r>
-          </a:p>
-          <a:p>
-            <a:r>
-              <a:t>Question to pose: "What's the difference between a scalable design and just buying a bigger server?"</a:t>
-            </a:r>
-          </a:p>
-          <a:p>
-            <a:r>
-              <a:t>(elastic capacity-on-demand vs fixed spare capacity you pay for whether used or not).</a:t>
-            </a:r>
-          </a:p>
-          <a:p>
-            <a:r>
-              <a:t>UoC/AT1 tie: this Topic develops ICTCLD504 PC 2.2 and KE 6; the output is the resource-selection</a:t>
-            </a:r>
-          </a:p>
-          <a:p>
-            <a:r>
-              <a:t>sections of the AT1 Solution Design + the object-storage KE-appendix question.</a:t>
+              <a:t>Workbook tasks 10 to 13, in order — three improvement passes then the cost-benefit case.</a:t>
+            </a:r>
+          </a:p>
+          <a:p>
+            <a:r>
+              <a:t>The centrepiece lands in this Topic: rejecting an improvement can be the strongest design move in the cluster.</a:t>
+            </a:r>
+          </a:p>
+        </p:txBody>
+      </p:sp>
+      <p:sp>
+        <p:nvSpPr>
+          <p:cNvPr id="4" name="Slide Number Placeholder 3"/>
+          <p:cNvSpPr>
+            <a:spLocks noGrp="1"/>
+          </p:cNvSpPr>
+          <p:nvPr>
+            <p:ph type="sldNum" idx="5" sz="quarter"/>
+          </p:nvPr>
+        </p:nvSpPr>
+        <p:spPr/>
+      </p:sp>
+    </p:spTree>
+  </p:cSld>
+  <p:clrMapOvr>
+    <a:masterClrMapping/>
+  </p:clrMapOvr>
+</p:notes>
+</file>
+
+<file path=ppt/notesSlides/notesSlide10.xml><?xml version="1.0" encoding="utf-8"?>
+<p:notes xmlns:a="http://schemas.openxmlformats.org/drawingml/2006/main" xmlns:p="http://schemas.openxmlformats.org/presentationml/2006/main" xmlns:r="http://schemas.openxmlformats.org/officeDocument/2006/relationships">
+  <p:cSld>
+    <p:spTree>
+      <p:nvGrpSpPr>
+        <p:cNvPr id="1" name=""/>
+        <p:cNvGrpSpPr/>
+        <p:nvPr/>
+      </p:nvGrpSpPr>
+      <p:grpSpPr>
+        <a:xfrm>
+          <a:off x="0" y="0"/>
+          <a:ext cx="0" cy="0"/>
+          <a:chOff x="0" y="0"/>
+          <a:chExt cx="0" cy="0"/>
+        </a:xfrm>
+      </p:grpSpPr>
+      <p:sp>
+        <p:nvSpPr>
+          <p:cNvPr id="2" name="Slide Image Placeholder 1"/>
+          <p:cNvSpPr>
+            <a:spLocks noGrp="1"/>
+          </p:cNvSpPr>
+          <p:nvPr>
+            <p:ph type="sldImg" idx="2"/>
+          </p:nvPr>
+        </p:nvSpPr>
+        <p:spPr/>
+      </p:sp>
+      <p:sp>
+        <p:nvSpPr>
+          <p:cNvPr id="3" name="Notes Placeholder 2"/>
+          <p:cNvSpPr>
+            <a:spLocks noGrp="1"/>
+          </p:cNvSpPr>
+          <p:nvPr>
+            <p:ph type="body" idx="3" sz="quarter"/>
+          </p:nvPr>
+        </p:nvSpPr>
+        <p:spPr/>
+        <p:txBody>
+          <a:bodyPr/>
+          <a:lstStyle/>
+          <a:p>
+            <a:r>
+              <a:t>Task 12, second half. The metrics from Topic 2 come back as the things monitored — the thread is deliberate.</a:t>
+            </a:r>
+          </a:p>
+        </p:txBody>
+      </p:sp>
+      <p:sp>
+        <p:nvSpPr>
+          <p:cNvPr id="4" name="Slide Number Placeholder 3"/>
+          <p:cNvSpPr>
+            <a:spLocks noGrp="1"/>
+          </p:cNvSpPr>
+          <p:nvPr>
+            <p:ph type="sldNum" idx="5" sz="quarter"/>
+          </p:nvPr>
+        </p:nvSpPr>
+        <p:spPr/>
+      </p:sp>
+    </p:spTree>
+  </p:cSld>
+  <p:clrMapOvr>
+    <a:masterClrMapping/>
+  </p:clrMapOvr>
+</p:notes>
+</file>
+
+<file path=ppt/notesSlides/notesSlide11.xml><?xml version="1.0" encoding="utf-8"?>
+<p:notes xmlns:a="http://schemas.openxmlformats.org/drawingml/2006/main" xmlns:p="http://schemas.openxmlformats.org/presentationml/2006/main" xmlns:r="http://schemas.openxmlformats.org/officeDocument/2006/relationships">
+  <p:cSld>
+    <p:spTree>
+      <p:nvGrpSpPr>
+        <p:cNvPr id="1" name=""/>
+        <p:cNvGrpSpPr/>
+        <p:nvPr/>
+      </p:nvGrpSpPr>
+      <p:grpSpPr>
+        <a:xfrm>
+          <a:off x="0" y="0"/>
+          <a:ext cx="0" cy="0"/>
+          <a:chOff x="0" y="0"/>
+          <a:chExt cx="0" cy="0"/>
+        </a:xfrm>
+      </p:grpSpPr>
+      <p:sp>
+        <p:nvSpPr>
+          <p:cNvPr id="2" name="Slide Image Placeholder 1"/>
+          <p:cNvSpPr>
+            <a:spLocks noGrp="1"/>
+          </p:cNvSpPr>
+          <p:nvPr>
+            <p:ph type="sldImg" idx="2"/>
+          </p:nvPr>
+        </p:nvSpPr>
+        <p:spPr/>
+      </p:sp>
+      <p:sp>
+        <p:nvSpPr>
+          <p:cNvPr id="3" name="Notes Placeholder 2"/>
+          <p:cNvSpPr>
+            <a:spLocks noGrp="1"/>
+          </p:cNvSpPr>
+          <p:nvPr>
+            <p:ph type="body" idx="3" sz="quarter"/>
+          </p:nvPr>
+        </p:nvSpPr>
+        <p:spPr/>
+        <p:txBody>
+          <a:bodyPr/>
+          <a:lstStyle/>
+          <a:p>
+            <a:r>
+              <a:t>Activity = practice workbook task 12.</a:t>
+            </a:r>
+          </a:p>
+          <a:p>
+            <a:r>
+              <a:t>Every monitored metric should trace to task 8; every cost claim to a tier.</a:t>
+            </a:r>
+          </a:p>
+        </p:txBody>
+      </p:sp>
+      <p:sp>
+        <p:nvSpPr>
+          <p:cNvPr id="4" name="Slide Number Placeholder 3"/>
+          <p:cNvSpPr>
+            <a:spLocks noGrp="1"/>
+          </p:cNvSpPr>
+          <p:nvPr>
+            <p:ph type="sldNum" idx="5" sz="quarter"/>
+          </p:nvPr>
+        </p:nvSpPr>
+        <p:spPr/>
+      </p:sp>
+    </p:spTree>
+  </p:cSld>
+  <p:clrMapOvr>
+    <a:masterClrMapping/>
+  </p:clrMapOvr>
+</p:notes>
+</file>
+
+<file path=ppt/notesSlides/notesSlide12.xml><?xml version="1.0" encoding="utf-8"?>
+<p:notes xmlns:a="http://schemas.openxmlformats.org/drawingml/2006/main" xmlns:p="http://schemas.openxmlformats.org/presentationml/2006/main" xmlns:r="http://schemas.openxmlformats.org/officeDocument/2006/relationships">
+  <p:cSld>
+    <p:spTree>
+      <p:nvGrpSpPr>
+        <p:cNvPr id="1" name=""/>
+        <p:cNvGrpSpPr/>
+        <p:nvPr/>
+      </p:nvGrpSpPr>
+      <p:grpSpPr>
+        <a:xfrm>
+          <a:off x="0" y="0"/>
+          <a:ext cx="0" cy="0"/>
+          <a:chOff x="0" y="0"/>
+          <a:chExt cx="0" cy="0"/>
+        </a:xfrm>
+      </p:grpSpPr>
+      <p:sp>
+        <p:nvSpPr>
+          <p:cNvPr id="2" name="Slide Image Placeholder 1"/>
+          <p:cNvSpPr>
+            <a:spLocks noGrp="1"/>
+          </p:cNvSpPr>
+          <p:nvPr>
+            <p:ph type="sldImg" idx="2"/>
+          </p:nvPr>
+        </p:nvSpPr>
+        <p:spPr/>
+      </p:sp>
+      <p:sp>
+        <p:nvSpPr>
+          <p:cNvPr id="3" name="Notes Placeholder 2"/>
+          <p:cNvSpPr>
+            <a:spLocks noGrp="1"/>
+          </p:cNvSpPr>
+          <p:nvPr>
+            <p:ph type="body" idx="3" sz="quarter"/>
+          </p:nvPr>
+        </p:nvSpPr>
+        <p:spPr/>
+        <p:txBody>
+          <a:bodyPr/>
+          <a:lstStyle/>
+          <a:p>
+            <a:r>
+              <a:t>Workbook task 13 — the written case. The operational costing document is the baseline; every claim cites it.</a:t>
+            </a:r>
+          </a:p>
+          <a:p>
+            <a:r>
+              <a:t>The centrepiece rejection from C2 is the worked example of the form.</a:t>
+            </a:r>
+          </a:p>
+        </p:txBody>
+      </p:sp>
+      <p:sp>
+        <p:nvSpPr>
+          <p:cNvPr id="4" name="Slide Number Placeholder 3"/>
+          <p:cNvSpPr>
+            <a:spLocks noGrp="1"/>
+          </p:cNvSpPr>
+          <p:nvPr>
+            <p:ph type="sldNum" idx="5" sz="quarter"/>
+          </p:nvPr>
+        </p:nvSpPr>
+        <p:spPr/>
+      </p:sp>
+    </p:spTree>
+  </p:cSld>
+  <p:clrMapOvr>
+    <a:masterClrMapping/>
+  </p:clrMapOvr>
+</p:notes>
+</file>
+
+<file path=ppt/notesSlides/notesSlide13.xml><?xml version="1.0" encoding="utf-8"?>
+<p:notes xmlns:a="http://schemas.openxmlformats.org/drawingml/2006/main" xmlns:p="http://schemas.openxmlformats.org/presentationml/2006/main" xmlns:r="http://schemas.openxmlformats.org/officeDocument/2006/relationships">
+  <p:cSld>
+    <p:spTree>
+      <p:nvGrpSpPr>
+        <p:cNvPr id="1" name=""/>
+        <p:cNvGrpSpPr/>
+        <p:nvPr/>
+      </p:nvGrpSpPr>
+      <p:grpSpPr>
+        <a:xfrm>
+          <a:off x="0" y="0"/>
+          <a:ext cx="0" cy="0"/>
+          <a:chOff x="0" y="0"/>
+          <a:chExt cx="0" cy="0"/>
+        </a:xfrm>
+      </p:grpSpPr>
+      <p:sp>
+        <p:nvSpPr>
+          <p:cNvPr id="2" name="Slide Image Placeholder 1"/>
+          <p:cNvSpPr>
+            <a:spLocks noGrp="1"/>
+          </p:cNvSpPr>
+          <p:nvPr>
+            <p:ph type="sldImg" idx="2"/>
+          </p:nvPr>
+        </p:nvSpPr>
+        <p:spPr/>
+      </p:sp>
+      <p:sp>
+        <p:nvSpPr>
+          <p:cNvPr id="3" name="Notes Placeholder 2"/>
+          <p:cNvSpPr>
+            <a:spLocks noGrp="1"/>
+          </p:cNvSpPr>
+          <p:nvPr>
+            <p:ph type="body" idx="3" sz="quarter"/>
+          </p:nvPr>
+        </p:nvSpPr>
+        <p:spPr/>
+        <p:txBody>
+          <a:bodyPr/>
+          <a:lstStyle/>
+          <a:p>
+            <a:r>
+              <a:t>Activity = practice workbook task 13.</a:t>
+            </a:r>
+          </a:p>
+          <a:p>
+            <a:r>
+              <a:t>Push for numbers from the costing document, and for at least one argued rejection.</a:t>
             </a:r>
           </a:p>
         </p:txBody>
@@ -655,77 +895,12 @@
           <a:lstStyle/>
           <a:p>
             <a:r>
-              <a:t>Open Section 1 with the definition that governs the whole Topic — scalability is elasticity, and it's</a:t>
-            </a:r>
-          </a:p>
-          <a:p>
-            <a:r>
-              <a:t>PROVEN by test, not asserted on paper.</a:t>
-            </a:r>
-          </a:p>
-          <a:p>
-            <a:r>
-              <a:t>• First bullet: elastic capacity — add resources as load rises, release them as load falls; pay for what</a:t>
-            </a:r>
-          </a:p>
-          <a:p>
-            <a:r>
-              <a:t>you use. Both directions matter.</a:t>
-            </a:r>
-          </a:p>
-          <a:p>
-            <a:r>
-              <a:t>• Second bullet: the TEST of a scalable design is a demonstration — it scales on demand (proven at AT3),</a:t>
-            </a:r>
-          </a:p>
-          <a:p>
-            <a:r>
-              <a:t>not a load forecast on paper. Design so it can be demonstrated.</a:t>
-            </a:r>
-          </a:p>
-          <a:p>
-            <a:r>
-              <a:t>• Third bullet: over-provisioning fixed spare capacity is NOT scalability — it's gold-plating;</a:t>
-            </a:r>
-          </a:p>
-          <a:p>
-            <a:r>
-              <a:t>right-size instead. The anti-over-engineering rule, made concrete.</a:t>
-            </a:r>
-          </a:p>
-          <a:p>
-            <a:r>
-              <a:t>Misconception to pre-empt: "add auto scaling everywhere and you're scalable." No — only some tiers scale</a:t>
-            </a:r>
-          </a:p>
-          <a:p>
-            <a:r>
-              <a:t>elastically (compute, storage); scalability is designed per tier to the need, and it must be</a:t>
-            </a:r>
-          </a:p>
-          <a:p>
-            <a:r>
-              <a:t>demonstrable.</a:t>
-            </a:r>
-          </a:p>
-          <a:p>
-            <a:r>
-              <a:t>Question to pose: "A design with a huge fixed server 'handles any load' — is it scalable?" (No — it's</a:t>
-            </a:r>
-          </a:p>
-          <a:p>
-            <a:r>
-              <a:t>over-provisioned; scalable means capacity moves WITH load).</a:t>
-            </a:r>
-          </a:p>
-          <a:p>
-            <a:r>
-              <a:t>UoC/AT1 tie: ICTCLD504 PC 2.2 (select &amp; improve resources for scalability) → AT1 Solution Design</a:t>
-            </a:r>
-          </a:p>
-          <a:p>
-            <a:r>
-              <a:t>resource-selection sections.</a:t>
+              <a:t>Workbook task 10 — the security pass. Encryption is assumed on by default, including any cross-region copy.</a:t>
+            </a:r>
+          </a:p>
+          <a:p>
+            <a:r>
+              <a:t>Misconception: a DR copy is "just a backup" and can be looser. A weaker copy is the breach.</a:t>
             </a:r>
           </a:p>
         </p:txBody>
@@ -795,77 +970,12 @@
           <a:lstStyle/>
           <a:p>
             <a:r>
-              <a:t>Install the FOUR-COMPONENT structure off the diagram — the frame the whole scalability design (and the</a:t>
-            </a:r>
-          </a:p>
-          <a:p>
-            <a:r>
-              <a:t>AT2 build) is organised by.</a:t>
-            </a:r>
-          </a:p>
-          <a:p>
-            <a:r>
-              <a:t>• First bullet: split the design across four tiers — network, compute, database, storage. Point to each</a:t>
-            </a:r>
-          </a:p>
-          <a:p>
-            <a:r>
-              <a:t>on the diagram.</a:t>
-            </a:r>
-          </a:p>
-          <a:p>
-            <a:r>
-              <a:t>• Second bullet: compute and storage are the tiers that scale ELASTICALLY on demand; network and</a:t>
-            </a:r>
-          </a:p>
-          <a:p>
-            <a:r>
-              <a:t>database are selected and configured to SUPPORT that scale. Not all four scale the same way.</a:t>
-            </a:r>
-          </a:p>
-          <a:p>
-            <a:r>
-              <a:t>• Third bullet (the seam): these are the same four units the AT2 team later divides the IaC write by — a</a:t>
-            </a:r>
-          </a:p>
-          <a:p>
-            <a:r>
-              <a:t>clean seam from design (now) to build (AT2/AT3). Flag it; it's a deliberate design-to-build hand-off.</a:t>
-            </a:r>
-          </a:p>
-          <a:p>
-            <a:r>
-              <a:t>Misconception to pre-empt: "all four tiers scale the same way." No — compute/storage scale elastically;</a:t>
-            </a:r>
-          </a:p>
-          <a:p>
-            <a:r>
-              <a:t>network/database are sized and configured to carry that scale. Treating them identically misdesigns the</a:t>
-            </a:r>
-          </a:p>
-          <a:p>
-            <a:r>
-              <a:t>tier.</a:t>
-            </a:r>
-          </a:p>
-          <a:p>
-            <a:r>
-              <a:t>Question to pose: "Which of the four tiers actually add and remove capacity on demand — and which just</a:t>
-            </a:r>
-          </a:p>
-          <a:p>
-            <a:r>
-              <a:t>have to support that?" (compute + storage scale; network + database support).</a:t>
-            </a:r>
-          </a:p>
-          <a:p>
-            <a:r>
-              <a:t>UoC/AT1 tie: ICTCLD504 PC 2.2 (select &amp; improve compute/storage/database/network resources) → AT1</a:t>
-            </a:r>
-          </a:p>
-          <a:p>
-            <a:r>
-              <a:t>Solution Design; the four components are also the AT2 IaC work-split.</a:t>
+              <a:t>Activity = practice workbook task 10.</a:t>
+            </a:r>
+          </a:p>
+          <a:p>
+            <a:r>
+              <a:t>Push tightening-first: an improvement that adds a service before fixing a loose group has the order wrong.</a:t>
             </a:r>
           </a:p>
         </p:txBody>
@@ -935,77 +1045,7 @@
           <a:lstStyle/>
           <a:p>
             <a:r>
-              <a:t>Walk each of the four tiers concretely — what "select and improve for scalability" means per tier. This</a:t>
-            </a:r>
-          </a:p>
-          <a:p>
-            <a:r>
-              <a:t>is the how-to behind the four-component frame.</a:t>
-            </a:r>
-          </a:p>
-          <a:p>
-            <a:r>
-              <a:t>• Network: right-size the path and the load-spreading so the tier below can scale OUT behind it.</a:t>
-            </a:r>
-          </a:p>
-          <a:p>
-            <a:r>
-              <a:t>• Compute: move from fixed capacity to a POOL that grows and shrinks on demand (auto scaling) — the</a:t>
-            </a:r>
-          </a:p>
-          <a:p>
-            <a:r>
-              <a:t>clearest example of elasticity.</a:t>
-            </a:r>
-          </a:p>
-          <a:p>
-            <a:r>
-              <a:t>• Database: select a managed data service that scales READS without a rebuild, while keeping</a:t>
-            </a:r>
-          </a:p>
-          <a:p>
-            <a:r>
-              <a:t>Ledgerline's accounting data consistent. (Note the consistency constraint — it's an accounting system.)</a:t>
-            </a:r>
-          </a:p>
-          <a:p>
-            <a:r>
-              <a:t>• Storage: select storage that grows on demand rather than a fixed-size volume.</a:t>
-            </a:r>
-          </a:p>
-          <a:p>
-            <a:r>
-              <a:t>Misconception to pre-empt: "scale the database by adding write replicas." No — an accounting system</a:t>
-            </a:r>
-          </a:p>
-          <a:p>
-            <a:r>
-              <a:t>needs consistency; you scale READS and keep writes consistent, you don't shard the ledger for</a:t>
-            </a:r>
-          </a:p>
-          <a:p>
-            <a:r>
-              <a:t>throughput.</a:t>
-            </a:r>
-          </a:p>
-          <a:p>
-            <a:r>
-              <a:t>Question to pose: "Compute scales by a pool that grows/shrinks — what's the equivalent move for</a:t>
-            </a:r>
-          </a:p>
-          <a:p>
-            <a:r>
-              <a:t>storage?" (grows on demand vs a fixed-size volume).</a:t>
-            </a:r>
-          </a:p>
-          <a:p>
-            <a:r>
-              <a:t>UoC/AT1 tie: ICTCLD504 PC 2.2 (select &amp; improve each resource tier to business needs) → AT1 Solution</a:t>
-            </a:r>
-          </a:p>
-          <a:p>
-            <a:r>
-              <a:t>Design resource selection.</a:t>
+              <a:t>The frame before the design. Map each building block to the failure it answers.</a:t>
             </a:r>
           </a:p>
         </p:txBody>
@@ -1075,67 +1115,12 @@
           <a:lstStyle/>
           <a:p>
             <a:r>
-              <a:t>The justification discipline — every resource choice ties to a stated business need, and nothing is</a:t>
-            </a:r>
-          </a:p>
-          <a:p>
-            <a:r>
-              <a:t>scaled further than a need justifies. This is what turns selections into a defensible design.</a:t>
-            </a:r>
-          </a:p>
-          <a:p>
-            <a:r>
-              <a:t>• First bullet: tie every resource choice to a stated Ledgerline business need — why THIS tier, why THIS</a:t>
-            </a:r>
-          </a:p>
-          <a:p>
-            <a:r>
-              <a:t>size. No choice without a reason.</a:t>
-            </a:r>
-          </a:p>
-          <a:p>
-            <a:r>
-              <a:t>• Second bullet: choose the simplest option that meets the need; note where capacity scales elastically</a:t>
-            </a:r>
-          </a:p>
-          <a:p>
-            <a:r>
-              <a:t>and HOW it would be demonstrated by test (the AT3 link).</a:t>
-            </a:r>
-          </a:p>
-          <a:p>
-            <a:r>
-              <a:t>• Third bullet: do not over-engineer — no tier scaled beyond what a need justifies.</a:t>
-            </a:r>
-          </a:p>
-          <a:p>
-            <a:r>
-              <a:t>Misconception to pre-empt: "more headroom is safer, so scale up." No — unjustified capacity is</a:t>
-            </a:r>
-          </a:p>
-          <a:p>
-            <a:r>
-              <a:t>gold-plating and loses marks; the defensible design is the simplest one that meets the need.</a:t>
-            </a:r>
-          </a:p>
-          <a:p>
-            <a:r>
-              <a:t>Question to pose: "If I asked 'why is the compute tier sized like that?', what's your answer?" (a named</a:t>
-            </a:r>
-          </a:p>
-          <a:p>
-            <a:r>
-              <a:t>business need + how it scales on demand — not 'to be safe').</a:t>
-            </a:r>
-          </a:p>
-          <a:p>
-            <a:r>
-              <a:t>UoC/AT1 tie: ICTCLD504 PC 2.2 (select &amp; improve resources ACCORDING TO business needs) → AT1 Solution</a:t>
-            </a:r>
-          </a:p>
-          <a:p>
-            <a:r>
-              <a:t>Design resource justification.</a:t>
+              <a:t>Walk the diagram tier by tier. Leave the database tension unresolved for one slide on purpose.</a:t>
+            </a:r>
+          </a:p>
+          <a:p>
+            <a:r>
+              <a:t>Redundancy is applied tier by tier, to the goal — not painted across everything.</a:t>
             </a:r>
           </a:p>
         </p:txBody>
@@ -1205,87 +1190,12 @@
           <a:lstStyle/>
           <a:p>
             <a:r>
-              <a:t>Facilitation — the Section 1 practice; students select and improve the four tiers for the practice</a:t>
-            </a:r>
-          </a:p>
-          <a:p>
-            <a:r>
-              <a:t>engagement, marking where capacity scales elastically and justifying each choice.</a:t>
-            </a:r>
-          </a:p>
-          <a:p>
-            <a:r>
-              <a:t>Tell students: "For the practice engagement, select and improve the network, compute, database and</a:t>
-            </a:r>
-          </a:p>
-          <a:p>
-            <a:r>
-              <a:t>storage tiers to its business needs. Mark where capacity scales elastically, and justify each choice</a:t>
-            </a:r>
-          </a:p>
-          <a:p>
-            <a:r>
-              <a:t>against a named need."</a:t>
-            </a:r>
-          </a:p>
-          <a:p>
-            <a:r>
-              <a:t>Steps (put on the board):</a:t>
-            </a:r>
-          </a:p>
-          <a:p>
-            <a:r>
-              <a:t>1. Take the four tiers one at a time — network, compute, database, storage.</a:t>
-            </a:r>
-          </a:p>
-          <a:p>
-            <a:r>
-              <a:t>2. For each, choose how to select/improve it for scalability to a stated need.</a:t>
-            </a:r>
-          </a:p>
-          <a:p>
-            <a:r>
-              <a:t>3. Mark which tiers scale ELASTICALLY on demand, and note how you'd demonstrate it by test.</a:t>
-            </a:r>
-          </a:p>
-          <a:p>
-            <a:r>
-              <a:t>Must produce: a four-tier resource design, each choice tied to a named need, elastic tiers marked.</a:t>
-            </a:r>
-          </a:p>
-          <a:p>
-            <a:r>
-              <a:t>Timing: ~30 min then discuss. Where they get stuck: they over-provision "to be safe" (push</a:t>
-            </a:r>
-          </a:p>
-          <a:p>
-            <a:r>
-              <a:t>right-sizing), and they mark network/database as elastic when those SUPPORT scale rather than scale</a:t>
-            </a:r>
-          </a:p>
-          <a:p>
-            <a:r>
-              <a:t>themselves — circulate and correct.</a:t>
-            </a:r>
-          </a:p>
-          <a:p>
-            <a:r>
-              <a:t>Share-back prompt: ask one student which tiers they marked elastic, and challenge any that are really</a:t>
-            </a:r>
-          </a:p>
-          <a:p>
-            <a:r>
-              <a:t>just "big."</a:t>
-            </a:r>
-          </a:p>
-          <a:p>
-            <a:r>
-              <a:t>No-leakage note: the website is the practice vehicle; AT1 assesses resource selection on Ledgerline —</a:t>
-            </a:r>
-          </a:p>
-          <a:p>
-            <a:r>
-              <a:t>comparable, not identical.</a:t>
+              <a:t>The single most assessed piece of reasoning in AT1 — slow down here.</a:t>
+            </a:r>
+          </a:p>
+          <a:p>
+            <a:r>
+              <a:t>The assessed skill is arguing the trade-off, not naming the feature. A rejection argued well outscores a feature added by reflex.</a:t>
             </a:r>
           </a:p>
         </p:txBody>
@@ -1355,77 +1265,12 @@
           <a:lstStyle/>
           <a:p>
             <a:r>
-              <a:t>Open Section 2 — object storage, taught as CONTEXTUAL knowledge (KE 6). It's not a Ledgerline</a:t>
-            </a:r>
-          </a:p>
-          <a:p>
-            <a:r>
-              <a:t>requirement; it's the contrast that sharpens what Ledgerline's storage actually is.</a:t>
-            </a:r>
-          </a:p>
-          <a:p>
-            <a:r>
-              <a:t>• First bullet: object storage holds whole objects (files) addressed by key — it scales storage on</a:t>
-            </a:r>
-          </a:p>
-          <a:p>
-            <a:r>
-              <a:t>demand and serves static assets directly.</a:t>
-            </a:r>
-          </a:p>
-          <a:p>
-            <a:r>
-              <a:t>• Second bullet: it's the natural home for a STATIC web site's content — HTML, images, downloads served</a:t>
-            </a:r>
-          </a:p>
-          <a:p>
-            <a:r>
-              <a:t>without a server.</a:t>
-            </a:r>
-          </a:p>
-          <a:p>
-            <a:r>
-              <a:t>• Third bullet (the framing): contextual here — not a Ledgerline need, but the contrast that sharpens</a:t>
-            </a:r>
-          </a:p>
-          <a:p>
-            <a:r>
-              <a:t>what Ledgerline's storage actually needs. Signal this is a "know it for the KE question" slide.</a:t>
-            </a:r>
-          </a:p>
-          <a:p>
-            <a:r>
-              <a:t>Misconception to pre-empt: "so we should put Ledgerline on object storage." No — Ledgerline is a</a:t>
-            </a:r>
-          </a:p>
-          <a:p>
-            <a:r>
-              <a:t>transactional, database-backed system; object storage suits STATIC content. The next slide draws the</a:t>
-            </a:r>
-          </a:p>
-          <a:p>
-            <a:r>
-              <a:t>contrast.</a:t>
-            </a:r>
-          </a:p>
-          <a:p>
-            <a:r>
-              <a:t>Question to pose: "What kind of workload is object storage the natural home for — and is Ledgerline one</a:t>
-            </a:r>
-          </a:p>
-          <a:p>
-            <a:r>
-              <a:t>of them?" (static websites; no — Ledgerline is stateful).</a:t>
-            </a:r>
-          </a:p>
-          <a:p>
-            <a:r>
-              <a:t>UoC/AT1 tie: ICTCLD504 KE 6 (use of object storage for static web sites) → the object-storage-in-context</a:t>
-            </a:r>
-          </a:p>
-          <a:p>
-            <a:r>
-              <a:t>question in the AT1 Part A KE appendix.</a:t>
+              <a:t>Keep it light — one constraint shaping where specific data sits, nothing more.</a:t>
+            </a:r>
+          </a:p>
+          <a:p>
+            <a:r>
+              <a:t>Ties back to workbook task 3; the compliance reading becomes a design input here.</a:t>
             </a:r>
           </a:p>
         </p:txBody>
@@ -1495,67 +1340,17 @@
           <a:lstStyle/>
           <a:p>
             <a:r>
-              <a:t>Draw the CONTRAST explicitly — Ledgerline (stateful) versus an object-storage-dependent static-website</a:t>
-            </a:r>
-          </a:p>
-          <a:p>
-            <a:r>
-              <a:t>workload. The contrast is the answer to the KE-appendix question.</a:t>
-            </a:r>
-          </a:p>
-          <a:p>
-            <a:r>
-              <a:t>• First bullet: Ledgerline is a stateful accounting system — transactional, consistent, database-backed;</a:t>
-            </a:r>
-          </a:p>
-          <a:p>
-            <a:r>
-              <a:t>object storage is NOT its primary store.</a:t>
-            </a:r>
-          </a:p>
-          <a:p>
-            <a:r>
-              <a:t>• Second bullet: an object-storage-dependent static-website workload is the OPPOSITE — its content lives</a:t>
-            </a:r>
-          </a:p>
-          <a:p>
-            <a:r>
-              <a:t>in object storage and scales with it.</a:t>
-            </a:r>
-          </a:p>
-          <a:p>
-            <a:r>
-              <a:t>• Third bullet: be able to explain how you would PROVISION object storage for such a workload if the need</a:t>
-            </a:r>
-          </a:p>
-          <a:p>
-            <a:r>
-              <a:t>arose (the examinable skill).</a:t>
-            </a:r>
-          </a:p>
-          <a:p>
-            <a:r>
-              <a:t>Misconception to pre-empt: "every system should use object storage because it scales." No — fit to the</a:t>
-            </a:r>
-          </a:p>
-          <a:p>
-            <a:r>
-              <a:t>workload: static content → object storage; transactional accounting data → a managed database.</a:t>
-            </a:r>
-          </a:p>
-          <a:p>
-            <a:r>
-              <a:t>Question to pose: "For a static website you'd reach for object storage — walk me through provisioning it.</a:t>
-            </a:r>
-          </a:p>
-          <a:p>
-            <a:r>
-              <a:t>Now why is that the wrong store for Ledgerline's ledger?" (static vs transactional/consistent).</a:t>
-            </a:r>
-          </a:p>
-          <a:p>
-            <a:r>
-              <a:t>UoC/AT1 tie: ICTCLD504 KE 6 → AT1 Part A KE appendix (the object-storage-in-context question).</a:t>
+              <a:t>Activity = practice workbook task 11.</a:t>
+            </a:r>
+          </a:p>
+          <a:p>
+            <a:r>
+              <a:t>The practice vehicle runs MySQL with no single-instance constraint — the data-tier call is theirs to make, potentially the opposite of Ledgerline's, by the same reasoning. That's the learning, not a mistake.</a:t>
+            </a:r>
+          </a:p>
+          <a:p>
+            <a:r>
+              <a:t>Watch for the copied verdict; the constraint differs by design.</a:t>
             </a:r>
           </a:p>
         </p:txBody>
@@ -1625,72 +1420,7 @@
           <a:lstStyle/>
           <a:p>
             <a:r>
-              <a:t>Facilitation — the Section 2 practice; students answer the object-storage-in-context question in</a:t>
-            </a:r>
-          </a:p>
-          <a:p>
-            <a:r>
-              <a:t>writing — a direct rehearsal of the AT1 KE-appendix question.</a:t>
-            </a:r>
-          </a:p>
-          <a:p>
-            <a:r>
-              <a:t>Tell students: "Contrast Ledgerline's storage needs with an object-storage-dependent website workload.</a:t>
-            </a:r>
-          </a:p>
-          <a:p>
-            <a:r>
-              <a:t>Then explain how you would provision object storage for the website workload if it were needed."</a:t>
-            </a:r>
-          </a:p>
-          <a:p>
-            <a:r>
-              <a:t>Steps (put on the board):</a:t>
-            </a:r>
-          </a:p>
-          <a:p>
-            <a:r>
-              <a:t>1. State Ledgerline's storage character — stateful, transactional, database-backed.</a:t>
-            </a:r>
-          </a:p>
-          <a:p>
-            <a:r>
-              <a:t>2. Contrast the static-website workload — content in object storage, scales with it.</a:t>
-            </a:r>
-          </a:p>
-          <a:p>
-            <a:r>
-              <a:t>3. Explain how you'd provision the object storage for that website workload.</a:t>
-            </a:r>
-          </a:p>
-          <a:p>
-            <a:r>
-              <a:t>Must produce: a short written answer with the contrast plus a provisioning explanation.</a:t>
-            </a:r>
-          </a:p>
-          <a:p>
-            <a:r>
-              <a:t>Timing: ~15 min then discuss. Where they get stuck: they describe object storage generically without the</a:t>
-            </a:r>
-          </a:p>
-          <a:p>
-            <a:r>
-              <a:t>CONTRAST, or forget the provisioning step — circulate and check both halves are present.</a:t>
-            </a:r>
-          </a:p>
-          <a:p>
-            <a:r>
-              <a:t>Share-back prompt: read one strong answer and ask the room whether it (a) contrasts and (b) provisions.</a:t>
-            </a:r>
-          </a:p>
-          <a:p>
-            <a:r>
-              <a:t>No-leakage note: this rehearses the KE-appendix question shape; AT1 asks it for Ledgerline — comparable,</a:t>
-            </a:r>
-          </a:p>
-          <a:p>
-            <a:r>
-              <a:t>not identical.</a:t>
+              <a:t>Workbook task 12, first half. Elasticity's cost payoff is releasing capacity — connect back to Topic 2's definition.</a:t>
             </a:r>
           </a:p>
         </p:txBody>
@@ -4793,7 +4523,7 @@
                 </a:solidFill>
                 <a:latin typeface="Roboto"/>
               </a:rPr>
-              <a:t>Designing for scalability and the four components</a:t>
+              <a:t>Designing the improvements: security, reliability, cost</a:t>
             </a:r>
           </a:p>
           <a:p>
@@ -4809,7 +4539,7 @@
                 </a:solidFill>
                 <a:latin typeface="Roboto Light"/>
               </a:rPr>
-              <a:t>Design the scalability improvements by selecting and improving the four resource tiers</a:t>
+              <a:t>Design the security, reliability, scalability and cost improvements — and argue the cost-benefit case</a:t>
             </a:r>
           </a:p>
         </p:txBody>
@@ -4912,7 +4642,7 @@
                 </a:solidFill>
                 <a:latin typeface="Roboto"/>
               </a:rPr>
-              <a:t>Object storage for static web sites</a:t>
+              <a:t>The centrepiece: rejecting an improvement</a:t>
             </a:r>
           </a:p>
         </p:txBody>
@@ -5010,7 +4740,7 @@
                 </a:solidFill>
                 <a:latin typeface="Roboto"/>
               </a:rPr>
-              <a:t>Object storage holds whole objects (files) addressed by key — it scales storage on demand and serves static assets directly.</a:t>
+              <a:t>The accounting product is vendor-certified single-instance only — a failover database is simply not available for it.</a:t>
             </a:r>
           </a:p>
           <a:p>
@@ -5041,7 +4771,7 @@
                 </a:solidFill>
                 <a:latin typeface="Roboto"/>
               </a:rPr>
-              <a:t>It is the natural home for a static web site's content: HTML, images, downloads served without a server.</a:t>
+              <a:t>The only route to one is replacing the product: new licence, data migration, change management, migration risk.</a:t>
             </a:r>
           </a:p>
           <a:p>
@@ -5072,7 +4802,38 @@
                 </a:solidFill>
                 <a:latin typeface="Roboto"/>
               </a:rPr>
-              <a:t>Contextual knowledge here — not a Ledgerline requirement, but the contrast that sharpens what Ledgerline's storage actually needs.</a:t>
+              <a:t>That cost is disproportionate to the reliability gained, so the design rejects it — single-instance database, covered by backup, restore and DR.</a:t>
+            </a:r>
+          </a:p>
+          <a:p>
+            <a:pPr marL="0" indent="0">
+              <a:lnSpc>
+                <a:spcPct val="105000"/>
+              </a:lnSpc>
+              <a:spcBef>
+                <a:spcPts val="0"/>
+              </a:spcBef>
+              <a:spcAft>
+                <a:spcPts val="1000"/>
+              </a:spcAft>
+            </a:pPr>
+            <a:r>
+              <a:rPr sz="2400" b="1" i="0">
+                <a:solidFill>
+                  <a:srgbClr val="EDAB0C"/>
+                </a:solidFill>
+                <a:latin typeface="Roboto"/>
+              </a:rPr>
+              <a:t>■  </a:t>
+            </a:r>
+            <a:r>
+              <a:rPr sz="2400" b="0" i="0">
+                <a:solidFill>
+                  <a:srgbClr val="2A2929"/>
+                </a:solidFill>
+                <a:latin typeface="Roboto"/>
+              </a:rPr>
+              <a:t>"Reliable database = failover database" is the reflex to resist; justify against the goal and the cost, not a checklist.</a:t>
             </a:r>
           </a:p>
         </p:txBody>
@@ -5254,7 +5015,7 @@
                 </a:solidFill>
                 <a:latin typeface="Roboto"/>
               </a:rPr>
-              <a:t>Ledgerline vs a static-website workload</a:t>
+              <a:t>Database reliability — the options weighed</a:t>
             </a:r>
           </a:p>
         </p:txBody>
@@ -5303,16 +5064,404 @@
           </a:p>
         </p:txBody>
       </p:sp>
-      <p:sp>
-        <p:nvSpPr>
-          <p:cNvPr id="4" name="TextBox 3"/>
+      <p:graphicFrame>
+        <p:nvGraphicFramePr>
+          <p:cNvPr id="4" name="Table 3"/>
+          <p:cNvGraphicFramePr>
+            <a:graphicFrameLocks noGrp="1"/>
+          </p:cNvGraphicFramePr>
+          <p:nvPr/>
+        </p:nvGraphicFramePr>
+        <p:xfrm>
+          <a:off x="658368" y="1828800"/>
+          <a:ext cx="10881360" cy="1828800"/>
+        </p:xfrm>
+        <a:graphic>
+          <a:graphicData uri="http://schemas.openxmlformats.org/drawingml/2006/table">
+            <a:tbl>
+              <a:tblPr>
+                <a:tableStyleId>{5C22544A-7EE6-4342-B048-85BDC9FD1C3A}</a:tableStyleId>
+              </a:tblPr>
+              <a:tblGrid>
+                <a:gridCol w="2720340"/>
+                <a:gridCol w="2720340"/>
+                <a:gridCol w="2720340"/>
+                <a:gridCol w="2720340"/>
+              </a:tblGrid>
+              <a:tr h="457200">
+                <a:tc>
+                  <a:txBody>
+                    <a:bodyPr/>
+                    <a:lstStyle/>
+                    <a:p>
+                      <a:r>
+                        <a:rPr sz="1400" b="1" i="0">
+                          <a:solidFill>
+                            <a:srgbClr val="FFFFFF"/>
+                          </a:solidFill>
+                          <a:latin typeface="Roboto"/>
+                        </a:rPr>
+                        <a:t>Option</a:t>
+                      </a:r>
+                    </a:p>
+                  </a:txBody>
+                  <a:tcPr marL="76200" marR="76200">
+                    <a:solidFill>
+                      <a:srgbClr val="27B5CE"/>
+                    </a:solidFill>
+                  </a:tcPr>
+                </a:tc>
+                <a:tc>
+                  <a:txBody>
+                    <a:bodyPr/>
+                    <a:lstStyle/>
+                    <a:p>
+                      <a:r>
+                        <a:rPr sz="1400" b="1" i="0">
+                          <a:solidFill>
+                            <a:srgbClr val="FFFFFF"/>
+                          </a:solidFill>
+                          <a:latin typeface="Roboto"/>
+                        </a:rPr>
+                        <a:t>Reliability gain</a:t>
+                      </a:r>
+                    </a:p>
+                  </a:txBody>
+                  <a:tcPr marL="76200" marR="76200">
+                    <a:solidFill>
+                      <a:srgbClr val="27B5CE"/>
+                    </a:solidFill>
+                  </a:tcPr>
+                </a:tc>
+                <a:tc>
+                  <a:txBody>
+                    <a:bodyPr/>
+                    <a:lstStyle/>
+                    <a:p>
+                      <a:r>
+                        <a:rPr sz="1400" b="1" i="0">
+                          <a:solidFill>
+                            <a:srgbClr val="FFFFFF"/>
+                          </a:solidFill>
+                          <a:latin typeface="Roboto"/>
+                        </a:rPr>
+                        <a:t>Cost / risk</a:t>
+                      </a:r>
+                    </a:p>
+                  </a:txBody>
+                  <a:tcPr marL="76200" marR="76200">
+                    <a:solidFill>
+                      <a:srgbClr val="27B5CE"/>
+                    </a:solidFill>
+                  </a:tcPr>
+                </a:tc>
+                <a:tc>
+                  <a:txBody>
+                    <a:bodyPr/>
+                    <a:lstStyle/>
+                    <a:p>
+                      <a:r>
+                        <a:rPr sz="1400" b="1" i="0">
+                          <a:solidFill>
+                            <a:srgbClr val="FFFFFF"/>
+                          </a:solidFill>
+                          <a:latin typeface="Roboto"/>
+                        </a:rPr>
+                        <a:t>Verdict</a:t>
+                      </a:r>
+                    </a:p>
+                  </a:txBody>
+                  <a:tcPr marL="76200" marR="76200">
+                    <a:solidFill>
+                      <a:srgbClr val="27B5CE"/>
+                    </a:solidFill>
+                  </a:tcPr>
+                </a:tc>
+              </a:tr>
+              <a:tr h="457200">
+                <a:tc>
+                  <a:txBody>
+                    <a:bodyPr/>
+                    <a:lstStyle/>
+                    <a:p>
+                      <a:r>
+                        <a:rPr sz="1300" b="0" i="0">
+                          <a:solidFill>
+                            <a:srgbClr val="2A2929"/>
+                          </a:solidFill>
+                          <a:latin typeface="Roboto"/>
+                        </a:rPr>
+                        <a:t>Single-instance + backup/restore + cross-region DR</a:t>
+                      </a:r>
+                    </a:p>
+                  </a:txBody>
+                  <a:tcPr marL="76200" marR="76200" marT="50800" marB="50800">
+                    <a:solidFill>
+                      <a:srgbClr val="FFFFFF"/>
+                    </a:solidFill>
+                  </a:tcPr>
+                </a:tc>
+                <a:tc>
+                  <a:txBody>
+                    <a:bodyPr/>
+                    <a:lstStyle/>
+                    <a:p>
+                      <a:r>
+                        <a:rPr sz="1300" b="0" i="0">
+                          <a:solidFill>
+                            <a:srgbClr val="2A2929"/>
+                          </a:solidFill>
+                          <a:latin typeface="Roboto"/>
+                        </a:rPr>
+                        <a:t>recover from loss; DR onshore</a:t>
+                      </a:r>
+                    </a:p>
+                  </a:txBody>
+                  <a:tcPr marL="76200" marR="76200" marT="50800" marB="50800">
+                    <a:solidFill>
+                      <a:srgbClr val="FFFFFF"/>
+                    </a:solidFill>
+                  </a:tcPr>
+                </a:tc>
+                <a:tc>
+                  <a:txBody>
+                    <a:bodyPr/>
+                    <a:lstStyle/>
+                    <a:p>
+                      <a:r>
+                        <a:rPr sz="1300" b="0" i="0">
+                          <a:solidFill>
+                            <a:srgbClr val="2A2929"/>
+                          </a:solidFill>
+                          <a:latin typeface="Roboto"/>
+                        </a:rPr>
+                        <a:t>low — no product change</a:t>
+                      </a:r>
+                    </a:p>
+                  </a:txBody>
+                  <a:tcPr marL="76200" marR="76200" marT="50800" marB="50800">
+                    <a:solidFill>
+                      <a:srgbClr val="FFFFFF"/>
+                    </a:solidFill>
+                  </a:tcPr>
+                </a:tc>
+                <a:tc>
+                  <a:txBody>
+                    <a:bodyPr/>
+                    <a:lstStyle/>
+                    <a:p>
+                      <a:r>
+                        <a:rPr sz="1300" b="0" i="0">
+                          <a:solidFill>
+                            <a:srgbClr val="2A2929"/>
+                          </a:solidFill>
+                          <a:latin typeface="Roboto"/>
+                        </a:rPr>
+                        <a:t>CHOSEN</a:t>
+                      </a:r>
+                    </a:p>
+                  </a:txBody>
+                  <a:tcPr marL="76200" marR="76200" marT="50800" marB="50800">
+                    <a:solidFill>
+                      <a:srgbClr val="FFFFFF"/>
+                    </a:solidFill>
+                  </a:tcPr>
+                </a:tc>
+              </a:tr>
+              <a:tr h="457200">
+                <a:tc>
+                  <a:txBody>
+                    <a:bodyPr/>
+                    <a:lstStyle/>
+                    <a:p>
+                      <a:r>
+                        <a:rPr sz="1300" b="0" i="0">
+                          <a:solidFill>
+                            <a:srgbClr val="2A2929"/>
+                          </a:solidFill>
+                          <a:latin typeface="Roboto"/>
+                        </a:rPr>
+                        <a:t>Failover (Multi-AZ) database</a:t>
+                      </a:r>
+                    </a:p>
+                  </a:txBody>
+                  <a:tcPr marL="76200" marR="76200" marT="50800" marB="50800">
+                    <a:solidFill>
+                      <a:srgbClr val="F9F9F9"/>
+                    </a:solidFill>
+                  </a:tcPr>
+                </a:tc>
+                <a:tc>
+                  <a:txBody>
+                    <a:bodyPr/>
+                    <a:lstStyle/>
+                    <a:p>
+                      <a:r>
+                        <a:rPr sz="1300" b="0" i="0">
+                          <a:solidFill>
+                            <a:srgbClr val="2A2929"/>
+                          </a:solidFill>
+                          <a:latin typeface="Roboto"/>
+                        </a:rPr>
+                        <a:t>zero-downtime zone failover</a:t>
+                      </a:r>
+                    </a:p>
+                  </a:txBody>
+                  <a:tcPr marL="76200" marR="76200" marT="50800" marB="50800">
+                    <a:solidFill>
+                      <a:srgbClr val="F9F9F9"/>
+                    </a:solidFill>
+                  </a:tcPr>
+                </a:tc>
+                <a:tc>
+                  <a:txBody>
+                    <a:bodyPr/>
+                    <a:lstStyle/>
+                    <a:p>
+                      <a:r>
+                        <a:rPr sz="1300" b="0" i="0">
+                          <a:solidFill>
+                            <a:srgbClr val="2A2929"/>
+                          </a:solidFill>
+                          <a:latin typeface="Roboto"/>
+                        </a:rPr>
+                        <a:t>not available — vendor single-instance only</a:t>
+                      </a:r>
+                    </a:p>
+                  </a:txBody>
+                  <a:tcPr marL="76200" marR="76200" marT="50800" marB="50800">
+                    <a:solidFill>
+                      <a:srgbClr val="F9F9F9"/>
+                    </a:solidFill>
+                  </a:tcPr>
+                </a:tc>
+                <a:tc>
+                  <a:txBody>
+                    <a:bodyPr/>
+                    <a:lstStyle/>
+                    <a:p>
+                      <a:r>
+                        <a:rPr sz="1300" b="0" i="0">
+                          <a:solidFill>
+                            <a:srgbClr val="2A2929"/>
+                          </a:solidFill>
+                          <a:latin typeface="Roboto"/>
+                        </a:rPr>
+                        <a:t>infeasible</a:t>
+                      </a:r>
+                    </a:p>
+                  </a:txBody>
+                  <a:tcPr marL="76200" marR="76200" marT="50800" marB="50800">
+                    <a:solidFill>
+                      <a:srgbClr val="F9F9F9"/>
+                    </a:solidFill>
+                  </a:tcPr>
+                </a:tc>
+              </a:tr>
+              <a:tr h="457200">
+                <a:tc>
+                  <a:txBody>
+                    <a:bodyPr/>
+                    <a:lstStyle/>
+                    <a:p>
+                      <a:r>
+                        <a:rPr sz="1300" b="0" i="0">
+                          <a:solidFill>
+                            <a:srgbClr val="2A2929"/>
+                          </a:solidFill>
+                          <a:latin typeface="Roboto"/>
+                        </a:rPr>
+                        <a:t>Replace the accounting product</a:t>
+                      </a:r>
+                    </a:p>
+                  </a:txBody>
+                  <a:tcPr marL="76200" marR="76200" marT="50800" marB="50800">
+                    <a:solidFill>
+                      <a:srgbClr val="FFFFFF"/>
+                    </a:solidFill>
+                  </a:tcPr>
+                </a:tc>
+                <a:tc>
+                  <a:txBody>
+                    <a:bodyPr/>
+                    <a:lstStyle/>
+                    <a:p>
+                      <a:r>
+                        <a:rPr sz="1300" b="0" i="0">
+                          <a:solidFill>
+                            <a:srgbClr val="2A2929"/>
+                          </a:solidFill>
+                          <a:latin typeface="Roboto"/>
+                        </a:rPr>
+                        <a:t>enables failover</a:t>
+                      </a:r>
+                    </a:p>
+                  </a:txBody>
+                  <a:tcPr marL="76200" marR="76200" marT="50800" marB="50800">
+                    <a:solidFill>
+                      <a:srgbClr val="FFFFFF"/>
+                    </a:solidFill>
+                  </a:tcPr>
+                </a:tc>
+                <a:tc>
+                  <a:txBody>
+                    <a:bodyPr/>
+                    <a:lstStyle/>
+                    <a:p>
+                      <a:r>
+                        <a:rPr sz="1300" b="0" i="0">
+                          <a:solidFill>
+                            <a:srgbClr val="2A2929"/>
+                          </a:solidFill>
+                          <a:latin typeface="Roboto"/>
+                        </a:rPr>
+                        <a:t>licence + migration + change management + risk</a:t>
+                      </a:r>
+                    </a:p>
+                  </a:txBody>
+                  <a:tcPr marL="76200" marR="76200" marT="50800" marB="50800">
+                    <a:solidFill>
+                      <a:srgbClr val="FFFFFF"/>
+                    </a:solidFill>
+                  </a:tcPr>
+                </a:tc>
+                <a:tc>
+                  <a:txBody>
+                    <a:bodyPr/>
+                    <a:lstStyle/>
+                    <a:p>
+                      <a:r>
+                        <a:rPr sz="1300" b="0" i="0">
+                          <a:solidFill>
+                            <a:srgbClr val="2A2929"/>
+                          </a:solidFill>
+                          <a:latin typeface="Roboto"/>
+                        </a:rPr>
+                        <a:t>disproportionate — rejected</a:t>
+                      </a:r>
+                    </a:p>
+                  </a:txBody>
+                  <a:tcPr marL="76200" marR="76200" marT="50800" marB="50800">
+                    <a:solidFill>
+                      <a:srgbClr val="FFFFFF"/>
+                    </a:solidFill>
+                  </a:tcPr>
+                </a:tc>
+              </a:tr>
+            </a:tbl>
+          </a:graphicData>
+        </a:graphic>
+      </p:graphicFrame>
+      <p:sp>
+        <p:nvSpPr>
+          <p:cNvPr id="5" name="TextBox 4"/>
           <p:cNvSpPr txBox="1"/>
           <p:nvPr/>
         </p:nvSpPr>
         <p:spPr>
           <a:xfrm>
-            <a:off x="658368" y="1691640"/>
-            <a:ext cx="10881360" cy="4480560"/>
+            <a:off x="658368" y="5943600"/>
+            <a:ext cx="10881360" cy="457200"/>
           </a:xfrm>
           <a:prstGeom prst="rect">
             <a:avLst/>
@@ -5320,108 +5469,26 @@
           <a:noFill/>
         </p:spPr>
         <p:txBody>
-          <a:bodyPr wrap="square" anchor="ctr" lIns="0" rIns="0" tIns="0" bIns="0">
+          <a:bodyPr wrap="square" anchor="t" lIns="0" rIns="0" tIns="0" bIns="0">
             <a:spAutoFit/>
           </a:bodyPr>
           <a:lstStyle/>
           <a:p>
-            <a:pPr marL="0" indent="0">
-              <a:lnSpc>
-                <a:spcPct val="105000"/>
-              </a:lnSpc>
-              <a:spcBef>
-                <a:spcPts val="0"/>
-              </a:spcBef>
-              <a:spcAft>
-                <a:spcPts val="1000"/>
-              </a:spcAft>
-            </a:pPr>
-            <a:r>
-              <a:rPr sz="2400" b="1" i="0">
-                <a:solidFill>
-                  <a:srgbClr val="EDAB0C"/>
-                </a:solidFill>
-                <a:latin typeface="Roboto"/>
-              </a:rPr>
-              <a:t>■  </a:t>
-            </a:r>
-            <a:r>
-              <a:rPr sz="2400" b="0" i="0">
-                <a:solidFill>
-                  <a:srgbClr val="2A2929"/>
-                </a:solidFill>
-                <a:latin typeface="Roboto"/>
-              </a:rPr>
-              <a:t>Ledgerline is a stateful accounting system: transactional, consistent, database-backed — object storage is not its primary store.</a:t>
-            </a:r>
-          </a:p>
-          <a:p>
-            <a:pPr marL="0" indent="0">
-              <a:lnSpc>
-                <a:spcPct val="105000"/>
-              </a:lnSpc>
-              <a:spcBef>
-                <a:spcPts val="0"/>
-              </a:spcBef>
-              <a:spcAft>
-                <a:spcPts val="1000"/>
-              </a:spcAft>
-            </a:pPr>
-            <a:r>
-              <a:rPr sz="2400" b="1" i="0">
-                <a:solidFill>
-                  <a:srgbClr val="EDAB0C"/>
-                </a:solidFill>
-                <a:latin typeface="Roboto"/>
-              </a:rPr>
-              <a:t>■  </a:t>
-            </a:r>
-            <a:r>
-              <a:rPr sz="2400" b="0" i="0">
-                <a:solidFill>
-                  <a:srgbClr val="2A2929"/>
-                </a:solidFill>
-                <a:latin typeface="Roboto"/>
-              </a:rPr>
-              <a:t>An object-storage-dependent static-website workload is the opposite: its content lives in object storage and scales with it.</a:t>
-            </a:r>
-          </a:p>
-          <a:p>
-            <a:pPr marL="0" indent="0">
-              <a:lnSpc>
-                <a:spcPct val="105000"/>
-              </a:lnSpc>
-              <a:spcBef>
-                <a:spcPts val="0"/>
-              </a:spcBef>
-              <a:spcAft>
-                <a:spcPts val="1000"/>
-              </a:spcAft>
-            </a:pPr>
-            <a:r>
-              <a:rPr sz="2400" b="1" i="0">
-                <a:solidFill>
-                  <a:srgbClr val="EDAB0C"/>
-                </a:solidFill>
-                <a:latin typeface="Roboto"/>
-              </a:rPr>
-              <a:t>■  </a:t>
-            </a:r>
-            <a:r>
-              <a:rPr sz="2400" b="0" i="0">
-                <a:solidFill>
-                  <a:srgbClr val="2A2929"/>
-                </a:solidFill>
-                <a:latin typeface="Roboto"/>
-              </a:rPr>
-              <a:t>Be able to explain how you would provision object storage for such a workload if the need arose.</a:t>
-            </a:r>
-          </a:p>
-        </p:txBody>
-      </p:sp>
-      <p:sp>
-        <p:nvSpPr>
-          <p:cNvPr id="5" name="Rectangle 4"/>
+            <a:r>
+              <a:rPr sz="1500" b="0" i="1">
+                <a:solidFill>
+                  <a:srgbClr val="484848"/>
+                </a:solidFill>
+                <a:latin typeface="Roboto Light"/>
+              </a:rPr>
+              <a:t>The chosen row must be argued, not just stated — the reasoning is the mark.</a:t>
+            </a:r>
+          </a:p>
+        </p:txBody>
+      </p:sp>
+      <p:sp>
+        <p:nvSpPr>
+          <p:cNvPr id="6" name="Rectangle 5"/>
           <p:cNvSpPr/>
           <p:nvPr/>
         </p:nvSpPr>
@@ -5465,7 +5532,7 @@
       </p:sp>
       <p:sp>
         <p:nvSpPr>
-          <p:cNvPr id="6" name="TextBox 5"/>
+          <p:cNvPr id="7" name="TextBox 6"/>
           <p:cNvSpPr txBox="1"/>
           <p:nvPr/>
         </p:nvSpPr>
@@ -5508,7 +5575,7 @@
       </p:sp>
       <p:sp>
         <p:nvSpPr>
-          <p:cNvPr id="7" name="TextBox 6"/>
+          <p:cNvPr id="8" name="TextBox 7"/>
           <p:cNvSpPr txBox="1"/>
           <p:nvPr/>
         </p:nvSpPr>
@@ -5569,14 +5636,48 @@
       <p:grpSpPr/>
       <p:sp>
         <p:nvSpPr>
-          <p:cNvPr id="2" name="Rectangle 1"/>
+          <p:cNvPr id="2" name="TextBox 1"/>
+          <p:cNvSpPr txBox="1"/>
+          <p:nvPr/>
+        </p:nvSpPr>
+        <p:spPr>
+          <a:xfrm>
+            <a:off x="640080" y="457200"/>
+            <a:ext cx="10881360" cy="960120"/>
+          </a:xfrm>
+          <a:prstGeom prst="rect">
+            <a:avLst/>
+          </a:prstGeom>
+          <a:noFill/>
+        </p:spPr>
+        <p:txBody>
+          <a:bodyPr wrap="square" anchor="t" lIns="0" rIns="0" tIns="0" bIns="0">
+            <a:spAutoFit/>
+          </a:bodyPr>
+          <a:lstStyle/>
+          <a:p>
+            <a:r>
+              <a:rPr sz="2800" b="1" i="0">
+                <a:solidFill>
+                  <a:srgbClr val="2A2929"/>
+                </a:solidFill>
+                <a:latin typeface="Roboto"/>
+              </a:rPr>
+              <a:t>The residency slice</a:t>
+            </a:r>
+          </a:p>
+        </p:txBody>
+      </p:sp>
+      <p:sp>
+        <p:nvSpPr>
+          <p:cNvPr id="3" name="Rectangle 2"/>
           <p:cNvSpPr/>
           <p:nvPr/>
         </p:nvSpPr>
         <p:spPr>
           <a:xfrm>
-            <a:off x="0" y="0"/>
-            <a:ext cx="12191695" cy="1234440"/>
+            <a:off x="658368" y="1371600"/>
+            <a:ext cx="1463040" cy="50800"/>
           </a:xfrm>
           <a:prstGeom prst="rect">
             <a:avLst/>
@@ -5613,67 +5714,14 @@
       </p:sp>
       <p:sp>
         <p:nvSpPr>
-          <p:cNvPr id="3" name="Rounded Rectangle 2"/>
-          <p:cNvSpPr/>
-          <p:nvPr/>
-        </p:nvSpPr>
-        <p:spPr>
-          <a:xfrm>
-            <a:off x="640080" y="384048"/>
-            <a:ext cx="1691640" cy="457200"/>
-          </a:xfrm>
-          <a:prstGeom prst="roundRect">
-            <a:avLst/>
-          </a:prstGeom>
-          <a:solidFill>
-            <a:srgbClr val="2A2929"/>
-          </a:solidFill>
-          <a:ln>
-            <a:noFill/>
-          </a:ln>
-          <a:effectLst/>
-        </p:spPr>
-        <p:style>
-          <a:lnRef idx="1">
-            <a:schemeClr val="accent1"/>
-          </a:lnRef>
-          <a:fillRef idx="3">
-            <a:schemeClr val="accent1"/>
-          </a:fillRef>
-          <a:effectRef idx="2">
-            <a:schemeClr val="accent1"/>
-          </a:effectRef>
-          <a:fontRef idx="minor">
-            <a:schemeClr val="lt1"/>
-          </a:fontRef>
-        </p:style>
-        <p:txBody>
-          <a:bodyPr rtlCol="0" anchor="ctr"/>
-          <a:lstStyle/>
-          <a:p>
-            <a:pPr algn="ctr"/>
-            <a:r>
-              <a:rPr sz="1400" b="1" i="0">
-                <a:solidFill>
-                  <a:srgbClr val="FBB900"/>
-                </a:solidFill>
-                <a:latin typeface="Roboto"/>
-              </a:rPr>
-              <a:t>ACTIVITY</a:t>
-            </a:r>
-          </a:p>
-        </p:txBody>
-      </p:sp>
-      <p:sp>
-        <p:nvSpPr>
           <p:cNvPr id="4" name="TextBox 3"/>
           <p:cNvSpPr txBox="1"/>
           <p:nvPr/>
         </p:nvSpPr>
         <p:spPr>
           <a:xfrm>
-            <a:off x="2560320" y="310896"/>
-            <a:ext cx="8961120" cy="685800"/>
+            <a:off x="658368" y="1691640"/>
+            <a:ext cx="10881360" cy="4480560"/>
           </a:xfrm>
           <a:prstGeom prst="rect">
             <a:avLst/>
@@ -5682,40 +5730,6 @@
         </p:spPr>
         <p:txBody>
           <a:bodyPr wrap="square" anchor="ctr" lIns="0" rIns="0" tIns="0" bIns="0">
-            <a:spAutoFit/>
-          </a:bodyPr>
-          <a:lstStyle/>
-          <a:p>
-            <a:r>
-              <a:rPr sz="2600" b="1" i="0">
-                <a:solidFill>
-                  <a:srgbClr val="FFFFFF"/>
-                </a:solidFill>
-                <a:latin typeface="Roboto"/>
-              </a:rPr>
-              <a:t>Answer the object-storage-in-context question</a:t>
-            </a:r>
-          </a:p>
-        </p:txBody>
-      </p:sp>
-      <p:sp>
-        <p:nvSpPr>
-          <p:cNvPr id="5" name="TextBox 4"/>
-          <p:cNvSpPr txBox="1"/>
-          <p:nvPr/>
-        </p:nvSpPr>
-        <p:spPr>
-          <a:xfrm>
-            <a:off x="658368" y="1554480"/>
-            <a:ext cx="10881360" cy="4297680"/>
-          </a:xfrm>
-          <a:prstGeom prst="rect">
-            <a:avLst/>
-          </a:prstGeom>
-          <a:noFill/>
-        </p:spPr>
-        <p:txBody>
-          <a:bodyPr wrap="square" anchor="t" lIns="0" rIns="0" tIns="0" bIns="0">
             <a:spAutoFit/>
           </a:bodyPr>
           <a:lstStyle/>
@@ -5732,7 +5746,7 @@
               </a:spcAft>
             </a:pPr>
             <a:r>
-              <a:rPr sz="1700" b="1" i="0">
+              <a:rPr sz="2400" b="1" i="0">
                 <a:solidFill>
                   <a:srgbClr val="EDAB0C"/>
                 </a:solidFill>
@@ -5741,13 +5755,13 @@
               <a:t>■  </a:t>
             </a:r>
             <a:r>
-              <a:rPr sz="1700" b="0" i="0">
+              <a:rPr sz="2400" b="0" i="0">
                 <a:solidFill>
                   <a:srgbClr val="2A2929"/>
                 </a:solidFill>
                 <a:latin typeface="Roboto"/>
               </a:rPr>
-              <a:t>Contrast Ledgerline's storage needs with an object-storage-dependent website workload.</a:t>
+              <a:t>A scoped constraint: specific regulated data must reside in a named region; the main system stays where it is.</a:t>
             </a:r>
           </a:p>
           <a:p>
@@ -5763,6 +5777,370 @@
               </a:spcAft>
             </a:pPr>
             <a:r>
+              <a:rPr sz="2400" b="1" i="0">
+                <a:solidFill>
+                  <a:srgbClr val="EDAB0C"/>
+                </a:solidFill>
+                <a:latin typeface="Roboto"/>
+              </a:rPr>
+              <a:t>■  </a:t>
+            </a:r>
+            <a:r>
+              <a:rPr sz="2400" b="0" i="0">
+                <a:solidFill>
+                  <a:srgbClr val="2A2929"/>
+                </a:solidFill>
+                <a:latin typeface="Roboto"/>
+              </a:rPr>
+              <a:t>The design keeps the regulated data in-region — a slice of the reliability and DR design, not a second architecture.</a:t>
+            </a:r>
+          </a:p>
+          <a:p>
+            <a:pPr marL="0" indent="0">
+              <a:lnSpc>
+                <a:spcPct val="105000"/>
+              </a:lnSpc>
+              <a:spcBef>
+                <a:spcPts val="0"/>
+              </a:spcBef>
+              <a:spcAft>
+                <a:spcPts val="1000"/>
+              </a:spcAft>
+            </a:pPr>
+            <a:r>
+              <a:rPr sz="2400" b="1" i="0">
+                <a:solidFill>
+                  <a:srgbClr val="EDAB0C"/>
+                </a:solidFill>
+                <a:latin typeface="Roboto"/>
+              </a:rPr>
+              <a:t>■  </a:t>
+            </a:r>
+            <a:r>
+              <a:rPr sz="2400" b="0" i="0">
+                <a:solidFill>
+                  <a:srgbClr val="2A2929"/>
+                </a:solidFill>
+                <a:latin typeface="Roboto"/>
+              </a:rPr>
+              <a:t>Constraints like this were read precisely in the compliance task; here they get built into the design.</a:t>
+            </a:r>
+          </a:p>
+        </p:txBody>
+      </p:sp>
+      <p:sp>
+        <p:nvSpPr>
+          <p:cNvPr id="5" name="Rectangle 4"/>
+          <p:cNvSpPr/>
+          <p:nvPr/>
+        </p:nvSpPr>
+        <p:spPr>
+          <a:xfrm>
+            <a:off x="0" y="6565392"/>
+            <a:ext cx="12191695" cy="38100"/>
+          </a:xfrm>
+          <a:prstGeom prst="rect">
+            <a:avLst/>
+          </a:prstGeom>
+          <a:solidFill>
+            <a:srgbClr val="27B5CE"/>
+          </a:solidFill>
+          <a:ln>
+            <a:noFill/>
+          </a:ln>
+          <a:effectLst/>
+        </p:spPr>
+        <p:style>
+          <a:lnRef idx="1">
+            <a:schemeClr val="accent1"/>
+          </a:lnRef>
+          <a:fillRef idx="3">
+            <a:schemeClr val="accent1"/>
+          </a:fillRef>
+          <a:effectRef idx="2">
+            <a:schemeClr val="accent1"/>
+          </a:effectRef>
+          <a:fontRef idx="minor">
+            <a:schemeClr val="lt1"/>
+          </a:fontRef>
+        </p:style>
+        <p:txBody>
+          <a:bodyPr rtlCol="0" anchor="ctr"/>
+          <a:lstStyle/>
+          <a:p>
+            <a:pPr algn="ctr"/>
+          </a:p>
+        </p:txBody>
+      </p:sp>
+      <p:sp>
+        <p:nvSpPr>
+          <p:cNvPr id="6" name="TextBox 5"/>
+          <p:cNvSpPr txBox="1"/>
+          <p:nvPr/>
+        </p:nvSpPr>
+        <p:spPr>
+          <a:xfrm>
+            <a:off x="502920" y="6400800"/>
+            <a:ext cx="5486400" cy="320040"/>
+          </a:xfrm>
+          <a:prstGeom prst="rect">
+            <a:avLst/>
+          </a:prstGeom>
+          <a:noFill/>
+        </p:spPr>
+        <p:txBody>
+          <a:bodyPr wrap="square" anchor="t" lIns="0" rIns="0" tIns="0" bIns="0">
+            <a:spAutoFit/>
+          </a:bodyPr>
+          <a:lstStyle/>
+          <a:p>
+            <a:r>
+              <a:rPr sz="1100" b="1" i="0">
+                <a:solidFill>
+                  <a:srgbClr val="2A2929"/>
+                </a:solidFill>
+                <a:latin typeface="Roboto"/>
+              </a:rPr>
+              <a:t>Kangan </a:t>
+            </a:r>
+            <a:r>
+              <a:rPr sz="1100" b="1" i="0">
+                <a:solidFill>
+                  <a:srgbClr val="D68E10"/>
+                </a:solidFill>
+                <a:latin typeface="Roboto"/>
+              </a:rPr>
+              <a:t>Institute</a:t>
+            </a:r>
+          </a:p>
+        </p:txBody>
+      </p:sp>
+      <p:sp>
+        <p:nvSpPr>
+          <p:cNvPr id="7" name="TextBox 6"/>
+          <p:cNvSpPr txBox="1"/>
+          <p:nvPr/>
+        </p:nvSpPr>
+        <p:spPr>
+          <a:xfrm>
+            <a:off x="10515600" y="6400800"/>
+            <a:ext cx="1188720" cy="320040"/>
+          </a:xfrm>
+          <a:prstGeom prst="rect">
+            <a:avLst/>
+          </a:prstGeom>
+          <a:noFill/>
+        </p:spPr>
+        <p:txBody>
+          <a:bodyPr wrap="square" anchor="t" lIns="0" rIns="0" tIns="0" bIns="0">
+            <a:spAutoFit/>
+          </a:bodyPr>
+          <a:lstStyle/>
+          <a:p>
+            <a:pPr algn="r"/>
+            <a:r>
+              <a:rPr sz="1100" b="0" i="0">
+                <a:solidFill>
+                  <a:srgbClr val="7A7A7A"/>
+                </a:solidFill>
+                <a:latin typeface="Roboto"/>
+              </a:rPr>
+              <a:t>9</a:t>
+            </a:r>
+          </a:p>
+        </p:txBody>
+      </p:sp>
+    </p:spTree>
+  </p:cSld>
+  <p:clrMapOvr>
+    <a:masterClrMapping/>
+  </p:clrMapOvr>
+</p:sld>
+</file>
+
+<file path=ppt/slides/slide13.xml><?xml version="1.0" encoding="utf-8"?>
+<p:sld xmlns:a="http://schemas.openxmlformats.org/drawingml/2006/main" xmlns:p="http://schemas.openxmlformats.org/presentationml/2006/main" xmlns:r="http://schemas.openxmlformats.org/officeDocument/2006/relationships">
+  <p:cSld>
+    <p:bg>
+      <p:bgPr>
+        <a:solidFill>
+          <a:srgbClr val="FFFFFF"/>
+        </a:solidFill>
+        <a:effectLst/>
+      </p:bgPr>
+    </p:bg>
+    <p:spTree>
+      <p:nvGrpSpPr>
+        <p:cNvPr id="1" name=""/>
+        <p:cNvGrpSpPr/>
+        <p:nvPr/>
+      </p:nvGrpSpPr>
+      <p:grpSpPr/>
+      <p:sp>
+        <p:nvSpPr>
+          <p:cNvPr id="2" name="Rectangle 1"/>
+          <p:cNvSpPr/>
+          <p:nvPr/>
+        </p:nvSpPr>
+        <p:spPr>
+          <a:xfrm>
+            <a:off x="0" y="0"/>
+            <a:ext cx="12191695" cy="1234440"/>
+          </a:xfrm>
+          <a:prstGeom prst="rect">
+            <a:avLst/>
+          </a:prstGeom>
+          <a:solidFill>
+            <a:srgbClr val="27B5CE"/>
+          </a:solidFill>
+          <a:ln>
+            <a:noFill/>
+          </a:ln>
+          <a:effectLst/>
+        </p:spPr>
+        <p:style>
+          <a:lnRef idx="1">
+            <a:schemeClr val="accent1"/>
+          </a:lnRef>
+          <a:fillRef idx="3">
+            <a:schemeClr val="accent1"/>
+          </a:fillRef>
+          <a:effectRef idx="2">
+            <a:schemeClr val="accent1"/>
+          </a:effectRef>
+          <a:fontRef idx="minor">
+            <a:schemeClr val="lt1"/>
+          </a:fontRef>
+        </p:style>
+        <p:txBody>
+          <a:bodyPr rtlCol="0" anchor="ctr"/>
+          <a:lstStyle/>
+          <a:p>
+            <a:pPr algn="ctr"/>
+          </a:p>
+        </p:txBody>
+      </p:sp>
+      <p:sp>
+        <p:nvSpPr>
+          <p:cNvPr id="3" name="Rounded Rectangle 2"/>
+          <p:cNvSpPr/>
+          <p:nvPr/>
+        </p:nvSpPr>
+        <p:spPr>
+          <a:xfrm>
+            <a:off x="640080" y="384048"/>
+            <a:ext cx="1691640" cy="457200"/>
+          </a:xfrm>
+          <a:prstGeom prst="roundRect">
+            <a:avLst/>
+          </a:prstGeom>
+          <a:solidFill>
+            <a:srgbClr val="2A2929"/>
+          </a:solidFill>
+          <a:ln>
+            <a:noFill/>
+          </a:ln>
+          <a:effectLst/>
+        </p:spPr>
+        <p:style>
+          <a:lnRef idx="1">
+            <a:schemeClr val="accent1"/>
+          </a:lnRef>
+          <a:fillRef idx="3">
+            <a:schemeClr val="accent1"/>
+          </a:fillRef>
+          <a:effectRef idx="2">
+            <a:schemeClr val="accent1"/>
+          </a:effectRef>
+          <a:fontRef idx="minor">
+            <a:schemeClr val="lt1"/>
+          </a:fontRef>
+        </p:style>
+        <p:txBody>
+          <a:bodyPr rtlCol="0" anchor="ctr"/>
+          <a:lstStyle/>
+          <a:p>
+            <a:pPr algn="ctr"/>
+            <a:r>
+              <a:rPr sz="1400" b="1" i="0">
+                <a:solidFill>
+                  <a:srgbClr val="FBB900"/>
+                </a:solidFill>
+                <a:latin typeface="Roboto"/>
+              </a:rPr>
+              <a:t>ACTIVITY</a:t>
+            </a:r>
+          </a:p>
+        </p:txBody>
+      </p:sp>
+      <p:sp>
+        <p:nvSpPr>
+          <p:cNvPr id="4" name="TextBox 3"/>
+          <p:cNvSpPr txBox="1"/>
+          <p:nvPr/>
+        </p:nvSpPr>
+        <p:spPr>
+          <a:xfrm>
+            <a:off x="2560320" y="310896"/>
+            <a:ext cx="8961120" cy="685800"/>
+          </a:xfrm>
+          <a:prstGeom prst="rect">
+            <a:avLst/>
+          </a:prstGeom>
+          <a:noFill/>
+        </p:spPr>
+        <p:txBody>
+          <a:bodyPr wrap="square" anchor="ctr" lIns="0" rIns="0" tIns="0" bIns="0">
+            <a:spAutoFit/>
+          </a:bodyPr>
+          <a:lstStyle/>
+          <a:p>
+            <a:r>
+              <a:rPr sz="2600" b="1" i="0">
+                <a:solidFill>
+                  <a:srgbClr val="FFFFFF"/>
+                </a:solidFill>
+                <a:latin typeface="Roboto"/>
+              </a:rPr>
+              <a:t>Design the reliability and scalability improvements</a:t>
+            </a:r>
+          </a:p>
+        </p:txBody>
+      </p:sp>
+      <p:sp>
+        <p:nvSpPr>
+          <p:cNvPr id="5" name="TextBox 4"/>
+          <p:cNvSpPr txBox="1"/>
+          <p:nvPr/>
+        </p:nvSpPr>
+        <p:spPr>
+          <a:xfrm>
+            <a:off x="658368" y="1554480"/>
+            <a:ext cx="10881360" cy="4297680"/>
+          </a:xfrm>
+          <a:prstGeom prst="rect">
+            <a:avLst/>
+          </a:prstGeom>
+          <a:noFill/>
+        </p:spPr>
+        <p:txBody>
+          <a:bodyPr wrap="square" anchor="t" lIns="0" rIns="0" tIns="0" bIns="0">
+            <a:spAutoFit/>
+          </a:bodyPr>
+          <a:lstStyle/>
+          <a:p>
+            <a:pPr marL="0" indent="0">
+              <a:lnSpc>
+                <a:spcPct val="105000"/>
+              </a:lnSpc>
+              <a:spcBef>
+                <a:spcPts val="0"/>
+              </a:spcBef>
+              <a:spcAft>
+                <a:spcPts val="1000"/>
+              </a:spcAft>
+            </a:pPr>
+            <a:r>
               <a:rPr sz="1700" b="1" i="0">
                 <a:solidFill>
                   <a:srgbClr val="EDAB0C"/>
@@ -5778,7 +6156,38 @@
                 </a:solidFill>
                 <a:latin typeface="Roboto"/>
               </a:rPr>
-              <a:t>Explain how you would provision object storage for the website workload if it were needed.</a:t>
+              <a:t>Workbook — task 11.</a:t>
+            </a:r>
+          </a:p>
+          <a:p>
+            <a:pPr marL="0" indent="0">
+              <a:lnSpc>
+                <a:spcPct val="105000"/>
+              </a:lnSpc>
+              <a:spcBef>
+                <a:spcPts val="0"/>
+              </a:spcBef>
+              <a:spcAft>
+                <a:spcPts val="1000"/>
+              </a:spcAft>
+            </a:pPr>
+            <a:r>
+              <a:rPr sz="1700" b="1" i="0">
+                <a:solidFill>
+                  <a:srgbClr val="EDAB0C"/>
+                </a:solidFill>
+                <a:latin typeface="Roboto"/>
+              </a:rPr>
+              <a:t>■  </a:t>
+            </a:r>
+            <a:r>
+              <a:rPr sz="1700" b="0" i="0">
+                <a:solidFill>
+                  <a:srgbClr val="2A2929"/>
+                </a:solidFill>
+                <a:latin typeface="Roboto"/>
+              </a:rPr>
+              <a:t>Design the reliability and scalability improvements for the practice engagement to your goals, and argue one cost-benefit trade-off explicitly.</a:t>
             </a:r>
           </a:p>
         </p:txBody>
@@ -5858,7 +6267,7 @@
                 </a:solidFill>
                 <a:latin typeface="Roboto"/>
               </a:rPr>
-              <a:t>⏱  ~15 min</a:t>
+              <a:t>⏱  ~35 min</a:t>
             </a:r>
           </a:p>
         </p:txBody>
@@ -5980,7 +6389,7 @@
                 </a:solidFill>
                 <a:latin typeface="Roboto"/>
               </a:rPr>
-              <a:t>9</a:t>
+              <a:t>10</a:t>
             </a:r>
           </a:p>
         </p:txBody>
@@ -5993,7 +6402,7 @@
 </p:sld>
 </file>
 
-<file path=ppt/slides/slide13.xml><?xml version="1.0" encoding="utf-8"?>
+<file path=ppt/slides/slide14.xml><?xml version="1.0" encoding="utf-8"?>
 <p:sld xmlns:a="http://schemas.openxmlformats.org/drawingml/2006/main" xmlns:p="http://schemas.openxmlformats.org/presentationml/2006/main" xmlns:r="http://schemas.openxmlformats.org/officeDocument/2006/relationships">
   <p:cSld>
     <p:bg>
@@ -6056,7 +6465,7 @@
                 </a:solidFill>
                 <a:latin typeface="Roboto"/>
               </a:rPr>
-              <a:t>Topic 3 · Key takeaways</a:t>
+              <a:t>Section 2 · Reliability</a:t>
             </a:r>
           </a:p>
         </p:txBody>
@@ -6229,7 +6638,7 @@
                 </a:solidFill>
                 <a:latin typeface="Roboto"/>
               </a:rPr>
-              <a:t>Scalability = elastic capacity-on-demand, demonstrable by test — not a forecast, not over-provisioning.</a:t>
+              <a:t>Redundancy tier by tier, to the goal.</a:t>
             </a:r>
           </a:p>
         </p:txBody>
@@ -6358,7 +6767,7 @@
                 </a:solidFill>
                 <a:latin typeface="Roboto"/>
               </a:rPr>
-              <a:t>Design across four resource components: network, compute, database, storage — the AT2 IaC seam.</a:t>
+              <a:t>The rejection, argued on cost versus benefit, is the centrepiece.</a:t>
             </a:r>
           </a:p>
         </p:txBody>
@@ -6487,7 +6896,7 @@
                 </a:solidFill>
                 <a:latin typeface="Roboto"/>
               </a:rPr>
-              <a:t>Justify each tier against a Ledgerline business need; right-size, choose the simplest that fits.</a:t>
+              <a:t>Regulated data placed by the compliance reading.</a:t>
             </a:r>
           </a:p>
         </p:txBody>
@@ -6500,54 +6909,8 @@
         </p:nvSpPr>
         <p:spPr>
           <a:xfrm>
-            <a:off x="640080" y="4818888"/>
-            <a:ext cx="10927080" cy="841248"/>
-          </a:xfrm>
-          <a:prstGeom prst="rect">
-            <a:avLst/>
-          </a:prstGeom>
-          <a:solidFill>
-            <a:srgbClr val="FFFFFF"/>
-          </a:solidFill>
-          <a:ln w="12700">
-            <a:solidFill>
-              <a:srgbClr val="CCCCCC"/>
-            </a:solidFill>
-          </a:ln>
-          <a:effectLst/>
-        </p:spPr>
-        <p:style>
-          <a:lnRef idx="1">
-            <a:schemeClr val="accent1"/>
-          </a:lnRef>
-          <a:fillRef idx="3">
-            <a:schemeClr val="accent1"/>
-          </a:fillRef>
-          <a:effectRef idx="2">
-            <a:schemeClr val="accent1"/>
-          </a:effectRef>
-          <a:fontRef idx="minor">
-            <a:schemeClr val="lt1"/>
-          </a:fontRef>
-        </p:style>
-        <p:txBody>
-          <a:bodyPr rtlCol="0" anchor="ctr"/>
-          <a:lstStyle/>
-          <a:p>
-            <a:pPr algn="ctr"/>
-          </a:p>
-        </p:txBody>
-      </p:sp>
-      <p:sp>
-        <p:nvSpPr>
-          <p:cNvPr id="14" name="Rectangle 13"/>
-          <p:cNvSpPr/>
-          <p:nvPr/>
-        </p:nvSpPr>
-        <p:spPr>
-          <a:xfrm>
-            <a:off x="640080" y="4818888"/>
-            <a:ext cx="109728" cy="841248"/>
+            <a:off x="0" y="6565392"/>
+            <a:ext cx="12191695" cy="38100"/>
           </a:xfrm>
           <a:prstGeom prst="rect">
             <a:avLst/>
@@ -6584,90 +6947,7 @@
       </p:sp>
       <p:sp>
         <p:nvSpPr>
-          <p:cNvPr id="15" name="TextBox 14"/>
-          <p:cNvSpPr txBox="1"/>
-          <p:nvPr/>
-        </p:nvSpPr>
-        <p:spPr>
-          <a:xfrm>
-            <a:off x="960120" y="4818888"/>
-            <a:ext cx="10424160" cy="841248"/>
-          </a:xfrm>
-          <a:prstGeom prst="rect">
-            <a:avLst/>
-          </a:prstGeom>
-          <a:noFill/>
-        </p:spPr>
-        <p:txBody>
-          <a:bodyPr wrap="square" anchor="ctr" lIns="0" rIns="0" tIns="0" bIns="0">
-            <a:spAutoFit/>
-          </a:bodyPr>
-          <a:lstStyle/>
-          <a:p>
-            <a:pPr>
-              <a:lnSpc>
-                <a:spcPct val="100000"/>
-              </a:lnSpc>
-            </a:pPr>
-            <a:r>
-              <a:rPr sz="1700" b="0" i="0">
-                <a:solidFill>
-                  <a:srgbClr val="2A2929"/>
-                </a:solidFill>
-                <a:latin typeface="Roboto"/>
-              </a:rPr>
-              <a:t>Object storage suits static-website workloads; Ledgerline is stateful and database-backed — know the contrast.</a:t>
-            </a:r>
-          </a:p>
-        </p:txBody>
-      </p:sp>
-      <p:sp>
-        <p:nvSpPr>
-          <p:cNvPr id="16" name="Rectangle 15"/>
-          <p:cNvSpPr/>
-          <p:nvPr/>
-        </p:nvSpPr>
-        <p:spPr>
-          <a:xfrm>
-            <a:off x="0" y="6565392"/>
-            <a:ext cx="12191695" cy="38100"/>
-          </a:xfrm>
-          <a:prstGeom prst="rect">
-            <a:avLst/>
-          </a:prstGeom>
-          <a:solidFill>
-            <a:srgbClr val="27B5CE"/>
-          </a:solidFill>
-          <a:ln>
-            <a:noFill/>
-          </a:ln>
-          <a:effectLst/>
-        </p:spPr>
-        <p:style>
-          <a:lnRef idx="1">
-            <a:schemeClr val="accent1"/>
-          </a:lnRef>
-          <a:fillRef idx="3">
-            <a:schemeClr val="accent1"/>
-          </a:fillRef>
-          <a:effectRef idx="2">
-            <a:schemeClr val="accent1"/>
-          </a:effectRef>
-          <a:fontRef idx="minor">
-            <a:schemeClr val="lt1"/>
-          </a:fontRef>
-        </p:style>
-        <p:txBody>
-          <a:bodyPr rtlCol="0" anchor="ctr"/>
-          <a:lstStyle/>
-          <a:p>
-            <a:pPr algn="ctr"/>
-          </a:p>
-        </p:txBody>
-      </p:sp>
-      <p:sp>
-        <p:nvSpPr>
-          <p:cNvPr id="17" name="TextBox 16"/>
+          <p:cNvPr id="14" name="TextBox 13"/>
           <p:cNvSpPr txBox="1"/>
           <p:nvPr/>
         </p:nvSpPr>
@@ -6710,7 +6990,7 @@
       </p:sp>
       <p:sp>
         <p:nvSpPr>
-          <p:cNvPr id="18" name="TextBox 17"/>
+          <p:cNvPr id="15" name="TextBox 14"/>
           <p:cNvSpPr txBox="1"/>
           <p:nvPr/>
         </p:nvSpPr>
@@ -6738,7 +7018,7 @@
                 </a:solidFill>
                 <a:latin typeface="Roboto"/>
               </a:rPr>
-              <a:t>10</a:t>
+              <a:t>11</a:t>
             </a:r>
           </a:p>
         </p:txBody>
@@ -6751,13 +7031,13 @@
 </p:sld>
 </file>
 
-<file path=ppt/slides/slide14.xml><?xml version="1.0" encoding="utf-8"?>
+<file path=ppt/slides/slide15.xml><?xml version="1.0" encoding="utf-8"?>
 <p:sld xmlns:a="http://schemas.openxmlformats.org/drawingml/2006/main" xmlns:p="http://schemas.openxmlformats.org/presentationml/2006/main" xmlns:r="http://schemas.openxmlformats.org/officeDocument/2006/relationships">
   <p:cSld>
     <p:bg>
       <p:bgPr>
         <a:solidFill>
-          <a:srgbClr val="2A2929"/>
+          <a:srgbClr val="FFFFFF"/>
         </a:solidFill>
         <a:effectLst/>
       </p:bgPr>
@@ -6778,13 +7058,13 @@
         <p:spPr>
           <a:xfrm>
             <a:off x="0" y="0"/>
-            <a:ext cx="411480" cy="6858000"/>
+            <a:ext cx="3931920" cy="6858000"/>
           </a:xfrm>
           <a:prstGeom prst="rect">
             <a:avLst/>
           </a:prstGeom>
           <a:solidFill>
-            <a:srgbClr val="EDAB0C"/>
+            <a:srgbClr val="205F61"/>
           </a:solidFill>
           <a:ln>
             <a:noFill/>
@@ -6821,8 +7101,8 @@
         </p:nvSpPr>
         <p:spPr>
           <a:xfrm>
-            <a:off x="914400" y="1463040"/>
-            <a:ext cx="10515600" cy="4023360"/>
+            <a:off x="365760" y="2103120"/>
+            <a:ext cx="3291840" cy="2194560"/>
           </a:xfrm>
           <a:prstGeom prst="rect">
             <a:avLst/>
@@ -6836,51 +7116,1829 @@
           <a:lstStyle/>
           <a:p>
             <a:r>
-              <a:rPr sz="4000" b="1" i="0">
+              <a:rPr sz="13000" b="1" i="0">
                 <a:solidFill>
                   <a:srgbClr val="FFFFFF"/>
                 </a:solidFill>
                 <a:latin typeface="Roboto"/>
               </a:rPr>
-              <a:t>Next: Topic 4 — document, present &amp; sign-off</a:t>
+              <a:t>03</a:t>
+            </a:r>
+          </a:p>
+        </p:txBody>
+      </p:sp>
+      <p:sp>
+        <p:nvSpPr>
+          <p:cNvPr id="4" name="TextBox 3"/>
+          <p:cNvSpPr txBox="1"/>
+          <p:nvPr/>
+        </p:nvSpPr>
+        <p:spPr>
+          <a:xfrm>
+            <a:off x="4480560" y="2468880"/>
+            <a:ext cx="7132320" cy="2194560"/>
+          </a:xfrm>
+          <a:prstGeom prst="rect">
+            <a:avLst/>
+          </a:prstGeom>
+          <a:noFill/>
+        </p:spPr>
+        <p:txBody>
+          <a:bodyPr wrap="square" anchor="t" lIns="0" rIns="0" tIns="0" bIns="0">
+            <a:spAutoFit/>
+          </a:bodyPr>
+          <a:lstStyle/>
+          <a:p>
+            <a:r>
+              <a:rPr sz="1600" b="1" i="0">
+                <a:solidFill>
+                  <a:srgbClr val="205F61"/>
+                </a:solidFill>
+                <a:latin typeface="Roboto"/>
+              </a:rPr>
+              <a:t>SECTION</a:t>
             </a:r>
           </a:p>
           <a:p>
             <a:pPr>
+              <a:spcBef>
+                <a:spcPts val="600"/>
+              </a:spcBef>
+            </a:pPr>
+            <a:r>
+              <a:rPr sz="3800" b="1" i="0">
+                <a:solidFill>
+                  <a:srgbClr val="2A2929"/>
+                </a:solidFill>
+                <a:latin typeface="Roboto"/>
+              </a:rPr>
+              <a:t>Cost optimisation and monitoring</a:t>
+            </a:r>
+          </a:p>
+          <a:p>
+            <a:pPr>
+              <a:spcBef>
+                <a:spcPts val="1000"/>
+              </a:spcBef>
+            </a:pPr>
+            <a:r>
+              <a:rPr sz="2000" b="0" i="1">
+                <a:solidFill>
+                  <a:srgbClr val="484848"/>
+                </a:solidFill>
+                <a:latin typeface="Roboto Light"/>
+              </a:rPr>
+              <a:t>pay for what the goals need, and watch it</a:t>
+            </a:r>
+          </a:p>
+        </p:txBody>
+      </p:sp>
+      <p:sp>
+        <p:nvSpPr>
+          <p:cNvPr id="5" name="Rectangle 4"/>
+          <p:cNvSpPr/>
+          <p:nvPr/>
+        </p:nvSpPr>
+        <p:spPr>
+          <a:xfrm>
+            <a:off x="0" y="6565392"/>
+            <a:ext cx="12191695" cy="38100"/>
+          </a:xfrm>
+          <a:prstGeom prst="rect">
+            <a:avLst/>
+          </a:prstGeom>
+          <a:solidFill>
+            <a:srgbClr val="205F61"/>
+          </a:solidFill>
+          <a:ln>
+            <a:noFill/>
+          </a:ln>
+          <a:effectLst/>
+        </p:spPr>
+        <p:style>
+          <a:lnRef idx="1">
+            <a:schemeClr val="accent1"/>
+          </a:lnRef>
+          <a:fillRef idx="3">
+            <a:schemeClr val="accent1"/>
+          </a:fillRef>
+          <a:effectRef idx="2">
+            <a:schemeClr val="accent1"/>
+          </a:effectRef>
+          <a:fontRef idx="minor">
+            <a:schemeClr val="lt1"/>
+          </a:fontRef>
+        </p:style>
+        <p:txBody>
+          <a:bodyPr rtlCol="0" anchor="ctr"/>
+          <a:lstStyle/>
+          <a:p>
+            <a:pPr algn="ctr"/>
+          </a:p>
+        </p:txBody>
+      </p:sp>
+      <p:sp>
+        <p:nvSpPr>
+          <p:cNvPr id="6" name="TextBox 5"/>
+          <p:cNvSpPr txBox="1"/>
+          <p:nvPr/>
+        </p:nvSpPr>
+        <p:spPr>
+          <a:xfrm>
+            <a:off x="502920" y="6400800"/>
+            <a:ext cx="5486400" cy="320040"/>
+          </a:xfrm>
+          <a:prstGeom prst="rect">
+            <a:avLst/>
+          </a:prstGeom>
+          <a:noFill/>
+        </p:spPr>
+        <p:txBody>
+          <a:bodyPr wrap="square" anchor="t" lIns="0" rIns="0" tIns="0" bIns="0">
+            <a:spAutoFit/>
+          </a:bodyPr>
+          <a:lstStyle/>
+          <a:p>
+            <a:r>
+              <a:rPr sz="1100" b="1" i="0">
+                <a:solidFill>
+                  <a:srgbClr val="2A2929"/>
+                </a:solidFill>
+                <a:latin typeface="Roboto"/>
+              </a:rPr>
+              <a:t>Kangan </a:t>
+            </a:r>
+            <a:r>
+              <a:rPr sz="1100" b="1" i="0">
+                <a:solidFill>
+                  <a:srgbClr val="D68E10"/>
+                </a:solidFill>
+                <a:latin typeface="Roboto"/>
+              </a:rPr>
+              <a:t>Institute</a:t>
+            </a:r>
+          </a:p>
+        </p:txBody>
+      </p:sp>
+      <p:sp>
+        <p:nvSpPr>
+          <p:cNvPr id="7" name="TextBox 6"/>
+          <p:cNvSpPr txBox="1"/>
+          <p:nvPr/>
+        </p:nvSpPr>
+        <p:spPr>
+          <a:xfrm>
+            <a:off x="10515600" y="6400800"/>
+            <a:ext cx="1188720" cy="320040"/>
+          </a:xfrm>
+          <a:prstGeom prst="rect">
+            <a:avLst/>
+          </a:prstGeom>
+          <a:noFill/>
+        </p:spPr>
+        <p:txBody>
+          <a:bodyPr wrap="square" anchor="t" lIns="0" rIns="0" tIns="0" bIns="0">
+            <a:spAutoFit/>
+          </a:bodyPr>
+          <a:lstStyle/>
+          <a:p>
+            <a:pPr algn="r"/>
+            <a:r>
+              <a:rPr sz="1100" b="0" i="0">
+                <a:solidFill>
+                  <a:srgbClr val="7A7A7A"/>
+                </a:solidFill>
+                <a:latin typeface="Roboto"/>
+              </a:rPr>
+              <a:t/>
+            </a:r>
+          </a:p>
+        </p:txBody>
+      </p:sp>
+    </p:spTree>
+  </p:cSld>
+  <p:clrMapOvr>
+    <a:masterClrMapping/>
+  </p:clrMapOvr>
+</p:sld>
+</file>
+
+<file path=ppt/slides/slide16.xml><?xml version="1.0" encoding="utf-8"?>
+<p:sld xmlns:a="http://schemas.openxmlformats.org/drawingml/2006/main" xmlns:p="http://schemas.openxmlformats.org/presentationml/2006/main" xmlns:r="http://schemas.openxmlformats.org/officeDocument/2006/relationships">
+  <p:cSld>
+    <p:bg>
+      <p:bgPr>
+        <a:solidFill>
+          <a:srgbClr val="FFFFFF"/>
+        </a:solidFill>
+        <a:effectLst/>
+      </p:bgPr>
+    </p:bg>
+    <p:spTree>
+      <p:nvGrpSpPr>
+        <p:cNvPr id="1" name=""/>
+        <p:cNvGrpSpPr/>
+        <p:nvPr/>
+      </p:nvGrpSpPr>
+      <p:grpSpPr/>
+      <p:sp>
+        <p:nvSpPr>
+          <p:cNvPr id="2" name="TextBox 1"/>
+          <p:cNvSpPr txBox="1"/>
+          <p:nvPr/>
+        </p:nvSpPr>
+        <p:spPr>
+          <a:xfrm>
+            <a:off x="640080" y="457200"/>
+            <a:ext cx="10881360" cy="960120"/>
+          </a:xfrm>
+          <a:prstGeom prst="rect">
+            <a:avLst/>
+          </a:prstGeom>
+          <a:noFill/>
+        </p:spPr>
+        <p:txBody>
+          <a:bodyPr wrap="square" anchor="t" lIns="0" rIns="0" tIns="0" bIns="0">
+            <a:spAutoFit/>
+          </a:bodyPr>
+          <a:lstStyle/>
+          <a:p>
+            <a:r>
+              <a:rPr sz="2800" b="1" i="0">
+                <a:solidFill>
+                  <a:srgbClr val="2A2929"/>
+                </a:solidFill>
+                <a:latin typeface="Roboto"/>
+              </a:rPr>
+              <a:t>The cost pass</a:t>
+            </a:r>
+          </a:p>
+        </p:txBody>
+      </p:sp>
+      <p:sp>
+        <p:nvSpPr>
+          <p:cNvPr id="3" name="Rectangle 2"/>
+          <p:cNvSpPr/>
+          <p:nvPr/>
+        </p:nvSpPr>
+        <p:spPr>
+          <a:xfrm>
+            <a:off x="658368" y="1371600"/>
+            <a:ext cx="1463040" cy="50800"/>
+          </a:xfrm>
+          <a:prstGeom prst="rect">
+            <a:avLst/>
+          </a:prstGeom>
+          <a:solidFill>
+            <a:srgbClr val="205F61"/>
+          </a:solidFill>
+          <a:ln>
+            <a:noFill/>
+          </a:ln>
+          <a:effectLst/>
+        </p:spPr>
+        <p:style>
+          <a:lnRef idx="1">
+            <a:schemeClr val="accent1"/>
+          </a:lnRef>
+          <a:fillRef idx="3">
+            <a:schemeClr val="accent1"/>
+          </a:fillRef>
+          <a:effectRef idx="2">
+            <a:schemeClr val="accent1"/>
+          </a:effectRef>
+          <a:fontRef idx="minor">
+            <a:schemeClr val="lt1"/>
+          </a:fontRef>
+        </p:style>
+        <p:txBody>
+          <a:bodyPr rtlCol="0" anchor="ctr"/>
+          <a:lstStyle/>
+          <a:p>
+            <a:pPr algn="ctr"/>
+          </a:p>
+        </p:txBody>
+      </p:sp>
+      <p:sp>
+        <p:nvSpPr>
+          <p:cNvPr id="4" name="TextBox 3"/>
+          <p:cNvSpPr txBox="1"/>
+          <p:nvPr/>
+        </p:nvSpPr>
+        <p:spPr>
+          <a:xfrm>
+            <a:off x="658368" y="1691640"/>
+            <a:ext cx="10881360" cy="4480560"/>
+          </a:xfrm>
+          <a:prstGeom prst="rect">
+            <a:avLst/>
+          </a:prstGeom>
+          <a:noFill/>
+        </p:spPr>
+        <p:txBody>
+          <a:bodyPr wrap="square" anchor="ctr" lIns="0" rIns="0" tIns="0" bIns="0">
+            <a:spAutoFit/>
+          </a:bodyPr>
+          <a:lstStyle/>
+          <a:p>
+            <a:pPr marL="0" indent="0">
               <a:lnSpc>
                 <a:spcPct val="105000"/>
               </a:lnSpc>
               <a:spcBef>
-                <a:spcPts val="1200"/>
+                <a:spcPts val="0"/>
               </a:spcBef>
+              <a:spcAft>
+                <a:spcPts val="1000"/>
+              </a:spcAft>
             </a:pPr>
             <a:r>
-              <a:rPr sz="1900" b="0" i="0">
-                <a:solidFill>
-                  <a:srgbClr val="E8E8E8"/>
-                </a:solidFill>
-                <a:latin typeface="Roboto Light"/>
-              </a:rPr>
-              <a:t>You've designed the scalability half across the four components; next you document and present the Solution Design for sign-off.</a:t>
-            </a:r>
-          </a:p>
-          <a:p>
-            <a:pPr>
+              <a:rPr sz="2400" b="1" i="0">
+                <a:solidFill>
+                  <a:srgbClr val="EDAB0C"/>
+                </a:solidFill>
+                <a:latin typeface="Roboto"/>
+              </a:rPr>
+              <a:t>■  </a:t>
+            </a:r>
+            <a:r>
+              <a:rPr sz="2400" b="0" i="0">
+                <a:solidFill>
+                  <a:srgbClr val="2A2929"/>
+                </a:solidFill>
+                <a:latin typeface="Roboto"/>
+              </a:rPr>
+              <a:t>Review the design for cost: right-size every tier, release what elasticity makes releasable, and price the improvements.</a:t>
+            </a:r>
+          </a:p>
+          <a:p>
+            <a:pPr marL="0" indent="0">
               <a:lnSpc>
                 <a:spcPct val="105000"/>
               </a:lnSpc>
               <a:spcBef>
-                <a:spcPts val="1200"/>
+                <a:spcPts val="0"/>
+              </a:spcBef>
+              <a:spcAft>
+                <a:spcPts val="1000"/>
+              </a:spcAft>
+            </a:pPr>
+            <a:r>
+              <a:rPr sz="2400" b="1" i="0">
+                <a:solidFill>
+                  <a:srgbClr val="EDAB0C"/>
+                </a:solidFill>
+                <a:latin typeface="Roboto"/>
+              </a:rPr>
+              <a:t>■  </a:t>
+            </a:r>
+            <a:r>
+              <a:rPr sz="2400" b="0" i="0">
+                <a:solidFill>
+                  <a:srgbClr val="2A2929"/>
+                </a:solidFill>
+                <a:latin typeface="Roboto"/>
+              </a:rPr>
+              <a:t>The techniques that deliver the improvements — redundant deployment, health checks, automated backups and snapshots, cross-region copies — each has a running cost; know it.</a:t>
+            </a:r>
+          </a:p>
+          <a:p>
+            <a:pPr marL="0" indent="0">
+              <a:lnSpc>
+                <a:spcPct val="105000"/>
+              </a:lnSpc>
+              <a:spcBef>
+                <a:spcPts val="0"/>
+              </a:spcBef>
+              <a:spcAft>
+                <a:spcPts val="1000"/>
+              </a:spcAft>
+            </a:pPr>
+            <a:r>
+              <a:rPr sz="2400" b="1" i="0">
+                <a:solidFill>
+                  <a:srgbClr val="EDAB0C"/>
+                </a:solidFill>
+                <a:latin typeface="Roboto"/>
+              </a:rPr>
+              <a:t>■  </a:t>
+            </a:r>
+            <a:r>
+              <a:rPr sz="2400" b="0" i="0">
+                <a:solidFill>
+                  <a:srgbClr val="2A2929"/>
+                </a:solidFill>
+                <a:latin typeface="Roboto"/>
+              </a:rPr>
+              <a:t>A design that meets its goals at lower cost beats the same design at higher cost, every time.</a:t>
+            </a:r>
+          </a:p>
+        </p:txBody>
+      </p:sp>
+      <p:sp>
+        <p:nvSpPr>
+          <p:cNvPr id="5" name="Rectangle 4"/>
+          <p:cNvSpPr/>
+          <p:nvPr/>
+        </p:nvSpPr>
+        <p:spPr>
+          <a:xfrm>
+            <a:off x="0" y="6565392"/>
+            <a:ext cx="12191695" cy="38100"/>
+          </a:xfrm>
+          <a:prstGeom prst="rect">
+            <a:avLst/>
+          </a:prstGeom>
+          <a:solidFill>
+            <a:srgbClr val="205F61"/>
+          </a:solidFill>
+          <a:ln>
+            <a:noFill/>
+          </a:ln>
+          <a:effectLst/>
+        </p:spPr>
+        <p:style>
+          <a:lnRef idx="1">
+            <a:schemeClr val="accent1"/>
+          </a:lnRef>
+          <a:fillRef idx="3">
+            <a:schemeClr val="accent1"/>
+          </a:fillRef>
+          <a:effectRef idx="2">
+            <a:schemeClr val="accent1"/>
+          </a:effectRef>
+          <a:fontRef idx="minor">
+            <a:schemeClr val="lt1"/>
+          </a:fontRef>
+        </p:style>
+        <p:txBody>
+          <a:bodyPr rtlCol="0" anchor="ctr"/>
+          <a:lstStyle/>
+          <a:p>
+            <a:pPr algn="ctr"/>
+          </a:p>
+        </p:txBody>
+      </p:sp>
+      <p:sp>
+        <p:nvSpPr>
+          <p:cNvPr id="6" name="TextBox 5"/>
+          <p:cNvSpPr txBox="1"/>
+          <p:nvPr/>
+        </p:nvSpPr>
+        <p:spPr>
+          <a:xfrm>
+            <a:off x="502920" y="6400800"/>
+            <a:ext cx="5486400" cy="320040"/>
+          </a:xfrm>
+          <a:prstGeom prst="rect">
+            <a:avLst/>
+          </a:prstGeom>
+          <a:noFill/>
+        </p:spPr>
+        <p:txBody>
+          <a:bodyPr wrap="square" anchor="t" lIns="0" rIns="0" tIns="0" bIns="0">
+            <a:spAutoFit/>
+          </a:bodyPr>
+          <a:lstStyle/>
+          <a:p>
+            <a:r>
+              <a:rPr sz="1100" b="1" i="0">
+                <a:solidFill>
+                  <a:srgbClr val="2A2929"/>
+                </a:solidFill>
+                <a:latin typeface="Roboto"/>
+              </a:rPr>
+              <a:t>Kangan </a:t>
+            </a:r>
+            <a:r>
+              <a:rPr sz="1100" b="1" i="0">
+                <a:solidFill>
+                  <a:srgbClr val="D68E10"/>
+                </a:solidFill>
+                <a:latin typeface="Roboto"/>
+              </a:rPr>
+              <a:t>Institute</a:t>
+            </a:r>
+          </a:p>
+        </p:txBody>
+      </p:sp>
+      <p:sp>
+        <p:nvSpPr>
+          <p:cNvPr id="7" name="TextBox 6"/>
+          <p:cNvSpPr txBox="1"/>
+          <p:nvPr/>
+        </p:nvSpPr>
+        <p:spPr>
+          <a:xfrm>
+            <a:off x="10515600" y="6400800"/>
+            <a:ext cx="1188720" cy="320040"/>
+          </a:xfrm>
+          <a:prstGeom prst="rect">
+            <a:avLst/>
+          </a:prstGeom>
+          <a:noFill/>
+        </p:spPr>
+        <p:txBody>
+          <a:bodyPr wrap="square" anchor="t" lIns="0" rIns="0" tIns="0" bIns="0">
+            <a:spAutoFit/>
+          </a:bodyPr>
+          <a:lstStyle/>
+          <a:p>
+            <a:pPr algn="r"/>
+            <a:r>
+              <a:rPr sz="1100" b="0" i="0">
+                <a:solidFill>
+                  <a:srgbClr val="7A7A7A"/>
+                </a:solidFill>
+                <a:latin typeface="Roboto"/>
+              </a:rPr>
+              <a:t>12</a:t>
+            </a:r>
+          </a:p>
+        </p:txBody>
+      </p:sp>
+    </p:spTree>
+  </p:cSld>
+  <p:clrMapOvr>
+    <a:masterClrMapping/>
+  </p:clrMapOvr>
+</p:sld>
+</file>
+
+<file path=ppt/slides/slide17.xml><?xml version="1.0" encoding="utf-8"?>
+<p:sld xmlns:a="http://schemas.openxmlformats.org/drawingml/2006/main" xmlns:p="http://schemas.openxmlformats.org/presentationml/2006/main" xmlns:r="http://schemas.openxmlformats.org/officeDocument/2006/relationships">
+  <p:cSld>
+    <p:bg>
+      <p:bgPr>
+        <a:solidFill>
+          <a:srgbClr val="FFFFFF"/>
+        </a:solidFill>
+        <a:effectLst/>
+      </p:bgPr>
+    </p:bg>
+    <p:spTree>
+      <p:nvGrpSpPr>
+        <p:cNvPr id="1" name=""/>
+        <p:cNvGrpSpPr/>
+        <p:nvPr/>
+      </p:nvGrpSpPr>
+      <p:grpSpPr/>
+      <p:sp>
+        <p:nvSpPr>
+          <p:cNvPr id="2" name="TextBox 1"/>
+          <p:cNvSpPr txBox="1"/>
+          <p:nvPr/>
+        </p:nvSpPr>
+        <p:spPr>
+          <a:xfrm>
+            <a:off x="640080" y="457200"/>
+            <a:ext cx="10881360" cy="960120"/>
+          </a:xfrm>
+          <a:prstGeom prst="rect">
+            <a:avLst/>
+          </a:prstGeom>
+          <a:noFill/>
+        </p:spPr>
+        <p:txBody>
+          <a:bodyPr wrap="square" anchor="t" lIns="0" rIns="0" tIns="0" bIns="0">
+            <a:spAutoFit/>
+          </a:bodyPr>
+          <a:lstStyle/>
+          <a:p>
+            <a:r>
+              <a:rPr sz="2800" b="1" i="0">
+                <a:solidFill>
+                  <a:srgbClr val="2A2929"/>
+                </a:solidFill>
+                <a:latin typeface="Roboto"/>
+              </a:rPr>
+              <a:t>Design the monitoring in</a:t>
+            </a:r>
+          </a:p>
+        </p:txBody>
+      </p:sp>
+      <p:sp>
+        <p:nvSpPr>
+          <p:cNvPr id="3" name="Rectangle 2"/>
+          <p:cNvSpPr/>
+          <p:nvPr/>
+        </p:nvSpPr>
+        <p:spPr>
+          <a:xfrm>
+            <a:off x="658368" y="1371600"/>
+            <a:ext cx="1463040" cy="50800"/>
+          </a:xfrm>
+          <a:prstGeom prst="rect">
+            <a:avLst/>
+          </a:prstGeom>
+          <a:solidFill>
+            <a:srgbClr val="205F61"/>
+          </a:solidFill>
+          <a:ln>
+            <a:noFill/>
+          </a:ln>
+          <a:effectLst/>
+        </p:spPr>
+        <p:style>
+          <a:lnRef idx="1">
+            <a:schemeClr val="accent1"/>
+          </a:lnRef>
+          <a:fillRef idx="3">
+            <a:schemeClr val="accent1"/>
+          </a:fillRef>
+          <a:effectRef idx="2">
+            <a:schemeClr val="accent1"/>
+          </a:effectRef>
+          <a:fontRef idx="minor">
+            <a:schemeClr val="lt1"/>
+          </a:fontRef>
+        </p:style>
+        <p:txBody>
+          <a:bodyPr rtlCol="0" anchor="ctr"/>
+          <a:lstStyle/>
+          <a:p>
+            <a:pPr algn="ctr"/>
+          </a:p>
+        </p:txBody>
+      </p:sp>
+      <p:sp>
+        <p:nvSpPr>
+          <p:cNvPr id="4" name="TextBox 3"/>
+          <p:cNvSpPr txBox="1"/>
+          <p:nvPr/>
+        </p:nvSpPr>
+        <p:spPr>
+          <a:xfrm>
+            <a:off x="658368" y="1691640"/>
+            <a:ext cx="10881360" cy="4480560"/>
+          </a:xfrm>
+          <a:prstGeom prst="rect">
+            <a:avLst/>
+          </a:prstGeom>
+          <a:noFill/>
+        </p:spPr>
+        <p:txBody>
+          <a:bodyPr wrap="square" anchor="ctr" lIns="0" rIns="0" tIns="0" bIns="0">
+            <a:spAutoFit/>
+          </a:bodyPr>
+          <a:lstStyle/>
+          <a:p>
+            <a:pPr marL="0" indent="0">
+              <a:lnSpc>
+                <a:spcPct val="105000"/>
+              </a:lnSpc>
+              <a:spcBef>
+                <a:spcPts val="0"/>
+              </a:spcBef>
+              <a:spcAft>
+                <a:spcPts val="1000"/>
+              </a:spcAft>
+            </a:pPr>
+            <a:r>
+              <a:rPr sz="2400" b="1" i="0">
+                <a:solidFill>
+                  <a:srgbClr val="EDAB0C"/>
+                </a:solidFill>
+                <a:latin typeface="Roboto"/>
+              </a:rPr>
+              <a:t>■  </a:t>
+            </a:r>
+            <a:r>
+              <a:rPr sz="2400" b="0" i="0">
+                <a:solidFill>
+                  <a:srgbClr val="2A2929"/>
+                </a:solidFill>
+                <a:latin typeface="Roboto"/>
+              </a:rPr>
+              <a:t>Decide now what the improved system reports: the metrics from task 8, watched by alarms with owners.</a:t>
+            </a:r>
+          </a:p>
+          <a:p>
+            <a:pPr marL="0" indent="0">
+              <a:lnSpc>
+                <a:spcPct val="105000"/>
+              </a:lnSpc>
+              <a:spcBef>
+                <a:spcPts val="0"/>
+              </a:spcBef>
+              <a:spcAft>
+                <a:spcPts val="1000"/>
+              </a:spcAft>
+            </a:pPr>
+            <a:r>
+              <a:rPr sz="2400" b="1" i="0">
+                <a:solidFill>
+                  <a:srgbClr val="EDAB0C"/>
+                </a:solidFill>
+                <a:latin typeface="Roboto"/>
+              </a:rPr>
+              <a:t>■  </a:t>
+            </a:r>
+            <a:r>
+              <a:rPr sz="2400" b="0" i="0">
+                <a:solidFill>
+                  <a:srgbClr val="2A2929"/>
+                </a:solidFill>
+                <a:latin typeface="Roboto"/>
+              </a:rPr>
+              <a:t>Monitoring designed in is cheap; monitoring bolted on later is a retrofit.</a:t>
+            </a:r>
+          </a:p>
+          <a:p>
+            <a:pPr marL="0" indent="0">
+              <a:lnSpc>
+                <a:spcPct val="105000"/>
+              </a:lnSpc>
+              <a:spcBef>
+                <a:spcPts val="0"/>
+              </a:spcBef>
+              <a:spcAft>
+                <a:spcPts val="1000"/>
+              </a:spcAft>
+            </a:pPr>
+            <a:r>
+              <a:rPr sz="2400" b="1" i="0">
+                <a:solidFill>
+                  <a:srgbClr val="EDAB0C"/>
+                </a:solidFill>
+                <a:latin typeface="Roboto"/>
+              </a:rPr>
+              <a:t>■  </a:t>
+            </a:r>
+            <a:r>
+              <a:rPr sz="2400" b="0" i="0">
+                <a:solidFill>
+                  <a:srgbClr val="2A2929"/>
+                </a:solidFill>
+                <a:latin typeface="Roboto"/>
+              </a:rPr>
+              <a:t>This design is what the build's monitoring task implements — the numbers are already set.</a:t>
+            </a:r>
+          </a:p>
+        </p:txBody>
+      </p:sp>
+      <p:sp>
+        <p:nvSpPr>
+          <p:cNvPr id="5" name="Rectangle 4"/>
+          <p:cNvSpPr/>
+          <p:nvPr/>
+        </p:nvSpPr>
+        <p:spPr>
+          <a:xfrm>
+            <a:off x="0" y="6565392"/>
+            <a:ext cx="12191695" cy="38100"/>
+          </a:xfrm>
+          <a:prstGeom prst="rect">
+            <a:avLst/>
+          </a:prstGeom>
+          <a:solidFill>
+            <a:srgbClr val="205F61"/>
+          </a:solidFill>
+          <a:ln>
+            <a:noFill/>
+          </a:ln>
+          <a:effectLst/>
+        </p:spPr>
+        <p:style>
+          <a:lnRef idx="1">
+            <a:schemeClr val="accent1"/>
+          </a:lnRef>
+          <a:fillRef idx="3">
+            <a:schemeClr val="accent1"/>
+          </a:fillRef>
+          <a:effectRef idx="2">
+            <a:schemeClr val="accent1"/>
+          </a:effectRef>
+          <a:fontRef idx="minor">
+            <a:schemeClr val="lt1"/>
+          </a:fontRef>
+        </p:style>
+        <p:txBody>
+          <a:bodyPr rtlCol="0" anchor="ctr"/>
+          <a:lstStyle/>
+          <a:p>
+            <a:pPr algn="ctr"/>
+          </a:p>
+        </p:txBody>
+      </p:sp>
+      <p:sp>
+        <p:nvSpPr>
+          <p:cNvPr id="6" name="TextBox 5"/>
+          <p:cNvSpPr txBox="1"/>
+          <p:nvPr/>
+        </p:nvSpPr>
+        <p:spPr>
+          <a:xfrm>
+            <a:off x="502920" y="6400800"/>
+            <a:ext cx="5486400" cy="320040"/>
+          </a:xfrm>
+          <a:prstGeom prst="rect">
+            <a:avLst/>
+          </a:prstGeom>
+          <a:noFill/>
+        </p:spPr>
+        <p:txBody>
+          <a:bodyPr wrap="square" anchor="t" lIns="0" rIns="0" tIns="0" bIns="0">
+            <a:spAutoFit/>
+          </a:bodyPr>
+          <a:lstStyle/>
+          <a:p>
+            <a:r>
+              <a:rPr sz="1100" b="1" i="0">
+                <a:solidFill>
+                  <a:srgbClr val="2A2929"/>
+                </a:solidFill>
+                <a:latin typeface="Roboto"/>
+              </a:rPr>
+              <a:t>Kangan </a:t>
+            </a:r>
+            <a:r>
+              <a:rPr sz="1100" b="1" i="0">
+                <a:solidFill>
+                  <a:srgbClr val="D68E10"/>
+                </a:solidFill>
+                <a:latin typeface="Roboto"/>
+              </a:rPr>
+              <a:t>Institute</a:t>
+            </a:r>
+          </a:p>
+        </p:txBody>
+      </p:sp>
+      <p:sp>
+        <p:nvSpPr>
+          <p:cNvPr id="7" name="TextBox 6"/>
+          <p:cNvSpPr txBox="1"/>
+          <p:nvPr/>
+        </p:nvSpPr>
+        <p:spPr>
+          <a:xfrm>
+            <a:off x="10515600" y="6400800"/>
+            <a:ext cx="1188720" cy="320040"/>
+          </a:xfrm>
+          <a:prstGeom prst="rect">
+            <a:avLst/>
+          </a:prstGeom>
+          <a:noFill/>
+        </p:spPr>
+        <p:txBody>
+          <a:bodyPr wrap="square" anchor="t" lIns="0" rIns="0" tIns="0" bIns="0">
+            <a:spAutoFit/>
+          </a:bodyPr>
+          <a:lstStyle/>
+          <a:p>
+            <a:pPr algn="r"/>
+            <a:r>
+              <a:rPr sz="1100" b="0" i="0">
+                <a:solidFill>
+                  <a:srgbClr val="7A7A7A"/>
+                </a:solidFill>
+                <a:latin typeface="Roboto"/>
+              </a:rPr>
+              <a:t>13</a:t>
+            </a:r>
+          </a:p>
+        </p:txBody>
+      </p:sp>
+    </p:spTree>
+  </p:cSld>
+  <p:clrMapOvr>
+    <a:masterClrMapping/>
+  </p:clrMapOvr>
+</p:sld>
+</file>
+
+<file path=ppt/slides/slide18.xml><?xml version="1.0" encoding="utf-8"?>
+<p:sld xmlns:a="http://schemas.openxmlformats.org/drawingml/2006/main" xmlns:p="http://schemas.openxmlformats.org/presentationml/2006/main" xmlns:r="http://schemas.openxmlformats.org/officeDocument/2006/relationships">
+  <p:cSld>
+    <p:bg>
+      <p:bgPr>
+        <a:solidFill>
+          <a:srgbClr val="FFFFFF"/>
+        </a:solidFill>
+        <a:effectLst/>
+      </p:bgPr>
+    </p:bg>
+    <p:spTree>
+      <p:nvGrpSpPr>
+        <p:cNvPr id="1" name=""/>
+        <p:cNvGrpSpPr/>
+        <p:nvPr/>
+      </p:nvGrpSpPr>
+      <p:grpSpPr/>
+      <p:sp>
+        <p:nvSpPr>
+          <p:cNvPr id="2" name="Rectangle 1"/>
+          <p:cNvSpPr/>
+          <p:nvPr/>
+        </p:nvSpPr>
+        <p:spPr>
+          <a:xfrm>
+            <a:off x="0" y="0"/>
+            <a:ext cx="12191695" cy="1234440"/>
+          </a:xfrm>
+          <a:prstGeom prst="rect">
+            <a:avLst/>
+          </a:prstGeom>
+          <a:solidFill>
+            <a:srgbClr val="205F61"/>
+          </a:solidFill>
+          <a:ln>
+            <a:noFill/>
+          </a:ln>
+          <a:effectLst/>
+        </p:spPr>
+        <p:style>
+          <a:lnRef idx="1">
+            <a:schemeClr val="accent1"/>
+          </a:lnRef>
+          <a:fillRef idx="3">
+            <a:schemeClr val="accent1"/>
+          </a:fillRef>
+          <a:effectRef idx="2">
+            <a:schemeClr val="accent1"/>
+          </a:effectRef>
+          <a:fontRef idx="minor">
+            <a:schemeClr val="lt1"/>
+          </a:fontRef>
+        </p:style>
+        <p:txBody>
+          <a:bodyPr rtlCol="0" anchor="ctr"/>
+          <a:lstStyle/>
+          <a:p>
+            <a:pPr algn="ctr"/>
+          </a:p>
+        </p:txBody>
+      </p:sp>
+      <p:sp>
+        <p:nvSpPr>
+          <p:cNvPr id="3" name="Rounded Rectangle 2"/>
+          <p:cNvSpPr/>
+          <p:nvPr/>
+        </p:nvSpPr>
+        <p:spPr>
+          <a:xfrm>
+            <a:off x="640080" y="384048"/>
+            <a:ext cx="1691640" cy="457200"/>
+          </a:xfrm>
+          <a:prstGeom prst="roundRect">
+            <a:avLst/>
+          </a:prstGeom>
+          <a:solidFill>
+            <a:srgbClr val="2A2929"/>
+          </a:solidFill>
+          <a:ln>
+            <a:noFill/>
+          </a:ln>
+          <a:effectLst/>
+        </p:spPr>
+        <p:style>
+          <a:lnRef idx="1">
+            <a:schemeClr val="accent1"/>
+          </a:lnRef>
+          <a:fillRef idx="3">
+            <a:schemeClr val="accent1"/>
+          </a:fillRef>
+          <a:effectRef idx="2">
+            <a:schemeClr val="accent1"/>
+          </a:effectRef>
+          <a:fontRef idx="minor">
+            <a:schemeClr val="lt1"/>
+          </a:fontRef>
+        </p:style>
+        <p:txBody>
+          <a:bodyPr rtlCol="0" anchor="ctr"/>
+          <a:lstStyle/>
+          <a:p>
+            <a:pPr algn="ctr"/>
+            <a:r>
+              <a:rPr sz="1400" b="1" i="0">
+                <a:solidFill>
+                  <a:srgbClr val="FBB900"/>
+                </a:solidFill>
+                <a:latin typeface="Roboto"/>
+              </a:rPr>
+              <a:t>ACTIVITY</a:t>
+            </a:r>
+          </a:p>
+        </p:txBody>
+      </p:sp>
+      <p:sp>
+        <p:nvSpPr>
+          <p:cNvPr id="4" name="TextBox 3"/>
+          <p:cNvSpPr txBox="1"/>
+          <p:nvPr/>
+        </p:nvSpPr>
+        <p:spPr>
+          <a:xfrm>
+            <a:off x="2560320" y="310896"/>
+            <a:ext cx="8961120" cy="685800"/>
+          </a:xfrm>
+          <a:prstGeom prst="rect">
+            <a:avLst/>
+          </a:prstGeom>
+          <a:noFill/>
+        </p:spPr>
+        <p:txBody>
+          <a:bodyPr wrap="square" anchor="ctr" lIns="0" rIns="0" tIns="0" bIns="0">
+            <a:spAutoFit/>
+          </a:bodyPr>
+          <a:lstStyle/>
+          <a:p>
+            <a:r>
+              <a:rPr sz="2600" b="1" i="0">
+                <a:solidFill>
+                  <a:srgbClr val="FFFFFF"/>
+                </a:solidFill>
+                <a:latin typeface="Roboto"/>
+              </a:rPr>
+              <a:t>Cost and monitoring</a:t>
+            </a:r>
+          </a:p>
+        </p:txBody>
+      </p:sp>
+      <p:sp>
+        <p:nvSpPr>
+          <p:cNvPr id="5" name="TextBox 4"/>
+          <p:cNvSpPr txBox="1"/>
+          <p:nvPr/>
+        </p:nvSpPr>
+        <p:spPr>
+          <a:xfrm>
+            <a:off x="658368" y="1554480"/>
+            <a:ext cx="10881360" cy="4297680"/>
+          </a:xfrm>
+          <a:prstGeom prst="rect">
+            <a:avLst/>
+          </a:prstGeom>
+          <a:noFill/>
+        </p:spPr>
+        <p:txBody>
+          <a:bodyPr wrap="square" anchor="t" lIns="0" rIns="0" tIns="0" bIns="0">
+            <a:spAutoFit/>
+          </a:bodyPr>
+          <a:lstStyle/>
+          <a:p>
+            <a:pPr marL="0" indent="0">
+              <a:lnSpc>
+                <a:spcPct val="105000"/>
+              </a:lnSpc>
+              <a:spcBef>
+                <a:spcPts val="0"/>
+              </a:spcBef>
+              <a:spcAft>
+                <a:spcPts val="1000"/>
+              </a:spcAft>
+            </a:pPr>
+            <a:r>
+              <a:rPr sz="1700" b="1" i="0">
+                <a:solidFill>
+                  <a:srgbClr val="EDAB0C"/>
+                </a:solidFill>
+                <a:latin typeface="Roboto"/>
+              </a:rPr>
+              <a:t>■  </a:t>
+            </a:r>
+            <a:r>
+              <a:rPr sz="1700" b="0" i="0">
+                <a:solidFill>
+                  <a:srgbClr val="2A2929"/>
+                </a:solidFill>
+                <a:latin typeface="Roboto"/>
+              </a:rPr>
+              <a:t>Workbook — task 12.</a:t>
+            </a:r>
+          </a:p>
+          <a:p>
+            <a:pPr marL="0" indent="0">
+              <a:lnSpc>
+                <a:spcPct val="105000"/>
+              </a:lnSpc>
+              <a:spcBef>
+                <a:spcPts val="0"/>
+              </a:spcBef>
+              <a:spcAft>
+                <a:spcPts val="1000"/>
+              </a:spcAft>
+            </a:pPr>
+            <a:r>
+              <a:rPr sz="1700" b="1" i="0">
+                <a:solidFill>
+                  <a:srgbClr val="EDAB0C"/>
+                </a:solidFill>
+                <a:latin typeface="Roboto"/>
+              </a:rPr>
+              <a:t>■  </a:t>
+            </a:r>
+            <a:r>
+              <a:rPr sz="1700" b="0" i="0">
+                <a:solidFill>
+                  <a:srgbClr val="2A2929"/>
+                </a:solidFill>
+                <a:latin typeface="Roboto"/>
+              </a:rPr>
+              <a:t>Design the cost optimisation and the monitoring for the practice engagement — what is right-sized, what is released, what is watched.</a:t>
+            </a:r>
+          </a:p>
+        </p:txBody>
+      </p:sp>
+      <p:sp>
+        <p:nvSpPr>
+          <p:cNvPr id="6" name="Rounded Rectangle 5"/>
+          <p:cNvSpPr/>
+          <p:nvPr/>
+        </p:nvSpPr>
+        <p:spPr>
+          <a:xfrm>
+            <a:off x="640080" y="5897880"/>
+            <a:ext cx="4023360" cy="457200"/>
+          </a:xfrm>
+          <a:prstGeom prst="roundRect">
+            <a:avLst/>
+          </a:prstGeom>
+          <a:solidFill>
+            <a:srgbClr val="F9F9F9"/>
+          </a:solidFill>
+          <a:ln w="12700">
+            <a:solidFill>
+              <a:srgbClr val="CCCCCC"/>
+            </a:solidFill>
+          </a:ln>
+          <a:effectLst/>
+        </p:spPr>
+        <p:style>
+          <a:lnRef idx="1">
+            <a:schemeClr val="accent1"/>
+          </a:lnRef>
+          <a:fillRef idx="3">
+            <a:schemeClr val="accent1"/>
+          </a:fillRef>
+          <a:effectRef idx="2">
+            <a:schemeClr val="accent1"/>
+          </a:effectRef>
+          <a:fontRef idx="minor">
+            <a:schemeClr val="lt1"/>
+          </a:fontRef>
+        </p:style>
+        <p:txBody>
+          <a:bodyPr rtlCol="0" anchor="ctr"/>
+          <a:lstStyle/>
+          <a:p>
+            <a:pPr algn="ctr"/>
+          </a:p>
+        </p:txBody>
+      </p:sp>
+      <p:sp>
+        <p:nvSpPr>
+          <p:cNvPr id="7" name="TextBox 6"/>
+          <p:cNvSpPr txBox="1"/>
+          <p:nvPr/>
+        </p:nvSpPr>
+        <p:spPr>
+          <a:xfrm>
+            <a:off x="822960" y="5943600"/>
+            <a:ext cx="3657600" cy="365760"/>
+          </a:xfrm>
+          <a:prstGeom prst="rect">
+            <a:avLst/>
+          </a:prstGeom>
+          <a:noFill/>
+        </p:spPr>
+        <p:txBody>
+          <a:bodyPr wrap="square" anchor="ctr" lIns="0" rIns="0" tIns="0" bIns="0">
+            <a:spAutoFit/>
+          </a:bodyPr>
+          <a:lstStyle/>
+          <a:p>
+            <a:r>
+              <a:rPr sz="1500" b="1" i="0">
+                <a:solidFill>
+                  <a:srgbClr val="2A2929"/>
+                </a:solidFill>
+                <a:latin typeface="Roboto"/>
+              </a:rPr>
+              <a:t>⏱  ~25 min</a:t>
+            </a:r>
+          </a:p>
+        </p:txBody>
+      </p:sp>
+      <p:sp>
+        <p:nvSpPr>
+          <p:cNvPr id="8" name="Rectangle 7"/>
+          <p:cNvSpPr/>
+          <p:nvPr/>
+        </p:nvSpPr>
+        <p:spPr>
+          <a:xfrm>
+            <a:off x="0" y="6565392"/>
+            <a:ext cx="12191695" cy="38100"/>
+          </a:xfrm>
+          <a:prstGeom prst="rect">
+            <a:avLst/>
+          </a:prstGeom>
+          <a:solidFill>
+            <a:srgbClr val="205F61"/>
+          </a:solidFill>
+          <a:ln>
+            <a:noFill/>
+          </a:ln>
+          <a:effectLst/>
+        </p:spPr>
+        <p:style>
+          <a:lnRef idx="1">
+            <a:schemeClr val="accent1"/>
+          </a:lnRef>
+          <a:fillRef idx="3">
+            <a:schemeClr val="accent1"/>
+          </a:fillRef>
+          <a:effectRef idx="2">
+            <a:schemeClr val="accent1"/>
+          </a:effectRef>
+          <a:fontRef idx="minor">
+            <a:schemeClr val="lt1"/>
+          </a:fontRef>
+        </p:style>
+        <p:txBody>
+          <a:bodyPr rtlCol="0" anchor="ctr"/>
+          <a:lstStyle/>
+          <a:p>
+            <a:pPr algn="ctr"/>
+          </a:p>
+        </p:txBody>
+      </p:sp>
+      <p:sp>
+        <p:nvSpPr>
+          <p:cNvPr id="9" name="TextBox 8"/>
+          <p:cNvSpPr txBox="1"/>
+          <p:nvPr/>
+        </p:nvSpPr>
+        <p:spPr>
+          <a:xfrm>
+            <a:off x="502920" y="6400800"/>
+            <a:ext cx="5486400" cy="320040"/>
+          </a:xfrm>
+          <a:prstGeom prst="rect">
+            <a:avLst/>
+          </a:prstGeom>
+          <a:noFill/>
+        </p:spPr>
+        <p:txBody>
+          <a:bodyPr wrap="square" anchor="t" lIns="0" rIns="0" tIns="0" bIns="0">
+            <a:spAutoFit/>
+          </a:bodyPr>
+          <a:lstStyle/>
+          <a:p>
+            <a:r>
+              <a:rPr sz="1100" b="1" i="0">
+                <a:solidFill>
+                  <a:srgbClr val="2A2929"/>
+                </a:solidFill>
+                <a:latin typeface="Roboto"/>
+              </a:rPr>
+              <a:t>Kangan </a:t>
+            </a:r>
+            <a:r>
+              <a:rPr sz="1100" b="1" i="0">
+                <a:solidFill>
+                  <a:srgbClr val="D68E10"/>
+                </a:solidFill>
+                <a:latin typeface="Roboto"/>
+              </a:rPr>
+              <a:t>Institute</a:t>
+            </a:r>
+          </a:p>
+        </p:txBody>
+      </p:sp>
+      <p:sp>
+        <p:nvSpPr>
+          <p:cNvPr id="10" name="TextBox 9"/>
+          <p:cNvSpPr txBox="1"/>
+          <p:nvPr/>
+        </p:nvSpPr>
+        <p:spPr>
+          <a:xfrm>
+            <a:off x="10515600" y="6400800"/>
+            <a:ext cx="1188720" cy="320040"/>
+          </a:xfrm>
+          <a:prstGeom prst="rect">
+            <a:avLst/>
+          </a:prstGeom>
+          <a:noFill/>
+        </p:spPr>
+        <p:txBody>
+          <a:bodyPr wrap="square" anchor="t" lIns="0" rIns="0" tIns="0" bIns="0">
+            <a:spAutoFit/>
+          </a:bodyPr>
+          <a:lstStyle/>
+          <a:p>
+            <a:pPr algn="r"/>
+            <a:r>
+              <a:rPr sz="1100" b="0" i="0">
+                <a:solidFill>
+                  <a:srgbClr val="7A7A7A"/>
+                </a:solidFill>
+                <a:latin typeface="Roboto"/>
+              </a:rPr>
+              <a:t>14</a:t>
+            </a:r>
+          </a:p>
+        </p:txBody>
+      </p:sp>
+    </p:spTree>
+  </p:cSld>
+  <p:clrMapOvr>
+    <a:masterClrMapping/>
+  </p:clrMapOvr>
+</p:sld>
+</file>
+
+<file path=ppt/slides/slide19.xml><?xml version="1.0" encoding="utf-8"?>
+<p:sld xmlns:a="http://schemas.openxmlformats.org/drawingml/2006/main" xmlns:p="http://schemas.openxmlformats.org/presentationml/2006/main" xmlns:r="http://schemas.openxmlformats.org/officeDocument/2006/relationships">
+  <p:cSld>
+    <p:bg>
+      <p:bgPr>
+        <a:solidFill>
+          <a:srgbClr val="F9F9F9"/>
+        </a:solidFill>
+        <a:effectLst/>
+      </p:bgPr>
+    </p:bg>
+    <p:spTree>
+      <p:nvGrpSpPr>
+        <p:cNvPr id="1" name=""/>
+        <p:cNvGrpSpPr/>
+        <p:nvPr/>
+      </p:nvGrpSpPr>
+      <p:grpSpPr/>
+      <p:sp>
+        <p:nvSpPr>
+          <p:cNvPr id="2" name="TextBox 1"/>
+          <p:cNvSpPr txBox="1"/>
+          <p:nvPr/>
+        </p:nvSpPr>
+        <p:spPr>
+          <a:xfrm>
+            <a:off x="640080" y="548640"/>
+            <a:ext cx="10881360" cy="1097280"/>
+          </a:xfrm>
+          <a:prstGeom prst="rect">
+            <a:avLst/>
+          </a:prstGeom>
+          <a:noFill/>
+        </p:spPr>
+        <p:txBody>
+          <a:bodyPr wrap="square" anchor="t" lIns="0" rIns="0" tIns="0" bIns="0">
+            <a:spAutoFit/>
+          </a:bodyPr>
+          <a:lstStyle/>
+          <a:p>
+            <a:r>
+              <a:rPr sz="3200" b="1" i="0">
+                <a:solidFill>
+                  <a:srgbClr val="2A2929"/>
+                </a:solidFill>
+                <a:latin typeface="Roboto"/>
+              </a:rPr>
+              <a:t>Key takeaways</a:t>
+            </a:r>
+          </a:p>
+          <a:p>
+            <a:pPr>
+              <a:spcBef>
+                <a:spcPts val="200"/>
               </a:spcBef>
             </a:pPr>
             <a:r>
-              <a:rPr sz="1900" b="0" i="0">
-                <a:solidFill>
-                  <a:srgbClr val="E8E8E8"/>
-                </a:solidFill>
-                <a:latin typeface="Roboto Light"/>
-              </a:rPr>
-              <a:t>Bring these resource selections and their justifications — they are the core of the design.</a:t>
+              <a:rPr sz="1800" b="1" i="0">
+                <a:solidFill>
+                  <a:srgbClr val="205F61"/>
+                </a:solidFill>
+                <a:latin typeface="Roboto"/>
+              </a:rPr>
+              <a:t>Section 3 · Cost and monitoring</a:t>
+            </a:r>
+          </a:p>
+        </p:txBody>
+      </p:sp>
+      <p:sp>
+        <p:nvSpPr>
+          <p:cNvPr id="3" name="Rectangle 2"/>
+          <p:cNvSpPr/>
+          <p:nvPr/>
+        </p:nvSpPr>
+        <p:spPr>
+          <a:xfrm>
+            <a:off x="658368" y="1600200"/>
+            <a:ext cx="1463040" cy="50800"/>
+          </a:xfrm>
+          <a:prstGeom prst="rect">
+            <a:avLst/>
+          </a:prstGeom>
+          <a:solidFill>
+            <a:srgbClr val="205F61"/>
+          </a:solidFill>
+          <a:ln>
+            <a:noFill/>
+          </a:ln>
+          <a:effectLst/>
+        </p:spPr>
+        <p:style>
+          <a:lnRef idx="1">
+            <a:schemeClr val="accent1"/>
+          </a:lnRef>
+          <a:fillRef idx="3">
+            <a:schemeClr val="accent1"/>
+          </a:fillRef>
+          <a:effectRef idx="2">
+            <a:schemeClr val="accent1"/>
+          </a:effectRef>
+          <a:fontRef idx="minor">
+            <a:schemeClr val="lt1"/>
+          </a:fontRef>
+        </p:style>
+        <p:txBody>
+          <a:bodyPr rtlCol="0" anchor="ctr"/>
+          <a:lstStyle/>
+          <a:p>
+            <a:pPr algn="ctr"/>
+          </a:p>
+        </p:txBody>
+      </p:sp>
+      <p:sp>
+        <p:nvSpPr>
+          <p:cNvPr id="4" name="Rectangle 3"/>
+          <p:cNvSpPr/>
+          <p:nvPr/>
+        </p:nvSpPr>
+        <p:spPr>
+          <a:xfrm>
+            <a:off x="640080" y="1965960"/>
+            <a:ext cx="10927080" cy="841248"/>
+          </a:xfrm>
+          <a:prstGeom prst="rect">
+            <a:avLst/>
+          </a:prstGeom>
+          <a:solidFill>
+            <a:srgbClr val="FFFFFF"/>
+          </a:solidFill>
+          <a:ln w="12700">
+            <a:solidFill>
+              <a:srgbClr val="CCCCCC"/>
+            </a:solidFill>
+          </a:ln>
+          <a:effectLst/>
+        </p:spPr>
+        <p:style>
+          <a:lnRef idx="1">
+            <a:schemeClr val="accent1"/>
+          </a:lnRef>
+          <a:fillRef idx="3">
+            <a:schemeClr val="accent1"/>
+          </a:fillRef>
+          <a:effectRef idx="2">
+            <a:schemeClr val="accent1"/>
+          </a:effectRef>
+          <a:fontRef idx="minor">
+            <a:schemeClr val="lt1"/>
+          </a:fontRef>
+        </p:style>
+        <p:txBody>
+          <a:bodyPr rtlCol="0" anchor="ctr"/>
+          <a:lstStyle/>
+          <a:p>
+            <a:pPr algn="ctr"/>
+          </a:p>
+        </p:txBody>
+      </p:sp>
+      <p:sp>
+        <p:nvSpPr>
+          <p:cNvPr id="5" name="Rectangle 4"/>
+          <p:cNvSpPr/>
+          <p:nvPr/>
+        </p:nvSpPr>
+        <p:spPr>
+          <a:xfrm>
+            <a:off x="640080" y="1965960"/>
+            <a:ext cx="109728" cy="841248"/>
+          </a:xfrm>
+          <a:prstGeom prst="rect">
+            <a:avLst/>
+          </a:prstGeom>
+          <a:solidFill>
+            <a:srgbClr val="205F61"/>
+          </a:solidFill>
+          <a:ln>
+            <a:noFill/>
+          </a:ln>
+          <a:effectLst/>
+        </p:spPr>
+        <p:style>
+          <a:lnRef idx="1">
+            <a:schemeClr val="accent1"/>
+          </a:lnRef>
+          <a:fillRef idx="3">
+            <a:schemeClr val="accent1"/>
+          </a:fillRef>
+          <a:effectRef idx="2">
+            <a:schemeClr val="accent1"/>
+          </a:effectRef>
+          <a:fontRef idx="minor">
+            <a:schemeClr val="lt1"/>
+          </a:fontRef>
+        </p:style>
+        <p:txBody>
+          <a:bodyPr rtlCol="0" anchor="ctr"/>
+          <a:lstStyle/>
+          <a:p>
+            <a:pPr algn="ctr"/>
+          </a:p>
+        </p:txBody>
+      </p:sp>
+      <p:sp>
+        <p:nvSpPr>
+          <p:cNvPr id="6" name="TextBox 5"/>
+          <p:cNvSpPr txBox="1"/>
+          <p:nvPr/>
+        </p:nvSpPr>
+        <p:spPr>
+          <a:xfrm>
+            <a:off x="960120" y="1965960"/>
+            <a:ext cx="10424160" cy="841248"/>
+          </a:xfrm>
+          <a:prstGeom prst="rect">
+            <a:avLst/>
+          </a:prstGeom>
+          <a:noFill/>
+        </p:spPr>
+        <p:txBody>
+          <a:bodyPr wrap="square" anchor="ctr" lIns="0" rIns="0" tIns="0" bIns="0">
+            <a:spAutoFit/>
+          </a:bodyPr>
+          <a:lstStyle/>
+          <a:p>
+            <a:pPr>
+              <a:lnSpc>
+                <a:spcPct val="100000"/>
+              </a:lnSpc>
+            </a:pPr>
+            <a:r>
+              <a:rPr sz="1700" b="0" i="0">
+                <a:solidFill>
+                  <a:srgbClr val="2A2929"/>
+                </a:solidFill>
+                <a:latin typeface="Roboto"/>
+              </a:rPr>
+              <a:t>Right-size, release, price the improvements.</a:t>
+            </a:r>
+          </a:p>
+        </p:txBody>
+      </p:sp>
+      <p:sp>
+        <p:nvSpPr>
+          <p:cNvPr id="7" name="Rectangle 6"/>
+          <p:cNvSpPr/>
+          <p:nvPr/>
+        </p:nvSpPr>
+        <p:spPr>
+          <a:xfrm>
+            <a:off x="640080" y="2916936"/>
+            <a:ext cx="10927080" cy="841248"/>
+          </a:xfrm>
+          <a:prstGeom prst="rect">
+            <a:avLst/>
+          </a:prstGeom>
+          <a:solidFill>
+            <a:srgbClr val="FFFFFF"/>
+          </a:solidFill>
+          <a:ln w="12700">
+            <a:solidFill>
+              <a:srgbClr val="CCCCCC"/>
+            </a:solidFill>
+          </a:ln>
+          <a:effectLst/>
+        </p:spPr>
+        <p:style>
+          <a:lnRef idx="1">
+            <a:schemeClr val="accent1"/>
+          </a:lnRef>
+          <a:fillRef idx="3">
+            <a:schemeClr val="accent1"/>
+          </a:fillRef>
+          <a:effectRef idx="2">
+            <a:schemeClr val="accent1"/>
+          </a:effectRef>
+          <a:fontRef idx="minor">
+            <a:schemeClr val="lt1"/>
+          </a:fontRef>
+        </p:style>
+        <p:txBody>
+          <a:bodyPr rtlCol="0" anchor="ctr"/>
+          <a:lstStyle/>
+          <a:p>
+            <a:pPr algn="ctr"/>
+          </a:p>
+        </p:txBody>
+      </p:sp>
+      <p:sp>
+        <p:nvSpPr>
+          <p:cNvPr id="8" name="Rectangle 7"/>
+          <p:cNvSpPr/>
+          <p:nvPr/>
+        </p:nvSpPr>
+        <p:spPr>
+          <a:xfrm>
+            <a:off x="640080" y="2916936"/>
+            <a:ext cx="109728" cy="841248"/>
+          </a:xfrm>
+          <a:prstGeom prst="rect">
+            <a:avLst/>
+          </a:prstGeom>
+          <a:solidFill>
+            <a:srgbClr val="205F61"/>
+          </a:solidFill>
+          <a:ln>
+            <a:noFill/>
+          </a:ln>
+          <a:effectLst/>
+        </p:spPr>
+        <p:style>
+          <a:lnRef idx="1">
+            <a:schemeClr val="accent1"/>
+          </a:lnRef>
+          <a:fillRef idx="3">
+            <a:schemeClr val="accent1"/>
+          </a:fillRef>
+          <a:effectRef idx="2">
+            <a:schemeClr val="accent1"/>
+          </a:effectRef>
+          <a:fontRef idx="minor">
+            <a:schemeClr val="lt1"/>
+          </a:fontRef>
+        </p:style>
+        <p:txBody>
+          <a:bodyPr rtlCol="0" anchor="ctr"/>
+          <a:lstStyle/>
+          <a:p>
+            <a:pPr algn="ctr"/>
+          </a:p>
+        </p:txBody>
+      </p:sp>
+      <p:sp>
+        <p:nvSpPr>
+          <p:cNvPr id="9" name="TextBox 8"/>
+          <p:cNvSpPr txBox="1"/>
+          <p:nvPr/>
+        </p:nvSpPr>
+        <p:spPr>
+          <a:xfrm>
+            <a:off x="960120" y="2916936"/>
+            <a:ext cx="10424160" cy="841248"/>
+          </a:xfrm>
+          <a:prstGeom prst="rect">
+            <a:avLst/>
+          </a:prstGeom>
+          <a:noFill/>
+        </p:spPr>
+        <p:txBody>
+          <a:bodyPr wrap="square" anchor="ctr" lIns="0" rIns="0" tIns="0" bIns="0">
+            <a:spAutoFit/>
+          </a:bodyPr>
+          <a:lstStyle/>
+          <a:p>
+            <a:pPr>
+              <a:lnSpc>
+                <a:spcPct val="100000"/>
+              </a:lnSpc>
+            </a:pPr>
+            <a:r>
+              <a:rPr sz="1700" b="0" i="0">
+                <a:solidFill>
+                  <a:srgbClr val="2A2929"/>
+                </a:solidFill>
+                <a:latin typeface="Roboto"/>
+              </a:rPr>
+              <a:t>Monitor the metrics you set, by design not retrofit.</a:t>
+            </a:r>
+          </a:p>
+        </p:txBody>
+      </p:sp>
+      <p:sp>
+        <p:nvSpPr>
+          <p:cNvPr id="10" name="Rectangle 9"/>
+          <p:cNvSpPr/>
+          <p:nvPr/>
+        </p:nvSpPr>
+        <p:spPr>
+          <a:xfrm>
+            <a:off x="0" y="6565392"/>
+            <a:ext cx="12191695" cy="38100"/>
+          </a:xfrm>
+          <a:prstGeom prst="rect">
+            <a:avLst/>
+          </a:prstGeom>
+          <a:solidFill>
+            <a:srgbClr val="205F61"/>
+          </a:solidFill>
+          <a:ln>
+            <a:noFill/>
+          </a:ln>
+          <a:effectLst/>
+        </p:spPr>
+        <p:style>
+          <a:lnRef idx="1">
+            <a:schemeClr val="accent1"/>
+          </a:lnRef>
+          <a:fillRef idx="3">
+            <a:schemeClr val="accent1"/>
+          </a:fillRef>
+          <a:effectRef idx="2">
+            <a:schemeClr val="accent1"/>
+          </a:effectRef>
+          <a:fontRef idx="minor">
+            <a:schemeClr val="lt1"/>
+          </a:fontRef>
+        </p:style>
+        <p:txBody>
+          <a:bodyPr rtlCol="0" anchor="ctr"/>
+          <a:lstStyle/>
+          <a:p>
+            <a:pPr algn="ctr"/>
+          </a:p>
+        </p:txBody>
+      </p:sp>
+      <p:sp>
+        <p:nvSpPr>
+          <p:cNvPr id="11" name="TextBox 10"/>
+          <p:cNvSpPr txBox="1"/>
+          <p:nvPr/>
+        </p:nvSpPr>
+        <p:spPr>
+          <a:xfrm>
+            <a:off x="502920" y="6400800"/>
+            <a:ext cx="5486400" cy="320040"/>
+          </a:xfrm>
+          <a:prstGeom prst="rect">
+            <a:avLst/>
+          </a:prstGeom>
+          <a:noFill/>
+        </p:spPr>
+        <p:txBody>
+          <a:bodyPr wrap="square" anchor="t" lIns="0" rIns="0" tIns="0" bIns="0">
+            <a:spAutoFit/>
+          </a:bodyPr>
+          <a:lstStyle/>
+          <a:p>
+            <a:r>
+              <a:rPr sz="1100" b="1" i="0">
+                <a:solidFill>
+                  <a:srgbClr val="2A2929"/>
+                </a:solidFill>
+                <a:latin typeface="Roboto"/>
+              </a:rPr>
+              <a:t>Kangan </a:t>
+            </a:r>
+            <a:r>
+              <a:rPr sz="1100" b="1" i="0">
+                <a:solidFill>
+                  <a:srgbClr val="D68E10"/>
+                </a:solidFill>
+                <a:latin typeface="Roboto"/>
+              </a:rPr>
+              <a:t>Institute</a:t>
+            </a:r>
+          </a:p>
+        </p:txBody>
+      </p:sp>
+      <p:sp>
+        <p:nvSpPr>
+          <p:cNvPr id="12" name="TextBox 11"/>
+          <p:cNvSpPr txBox="1"/>
+          <p:nvPr/>
+        </p:nvSpPr>
+        <p:spPr>
+          <a:xfrm>
+            <a:off x="10515600" y="6400800"/>
+            <a:ext cx="1188720" cy="320040"/>
+          </a:xfrm>
+          <a:prstGeom prst="rect">
+            <a:avLst/>
+          </a:prstGeom>
+          <a:noFill/>
+        </p:spPr>
+        <p:txBody>
+          <a:bodyPr wrap="square" anchor="t" lIns="0" rIns="0" tIns="0" bIns="0">
+            <a:spAutoFit/>
+          </a:bodyPr>
+          <a:lstStyle/>
+          <a:p>
+            <a:pPr algn="r"/>
+            <a:r>
+              <a:rPr sz="1100" b="0" i="0">
+                <a:solidFill>
+                  <a:srgbClr val="7A7A7A"/>
+                </a:solidFill>
+                <a:latin typeface="Roboto"/>
+              </a:rPr>
+              <a:t>15</a:t>
             </a:r>
           </a:p>
         </p:txBody>
@@ -6940,7 +8998,7 @@
                 </a:solidFill>
                 <a:latin typeface="Roboto"/>
               </a:rPr>
-              <a:t>The scalability half of the design</a:t>
+              <a:t>The improvement passes</a:t>
             </a:r>
           </a:p>
         </p:txBody>
@@ -7038,7 +9096,7 @@
                 </a:solidFill>
                 <a:latin typeface="Roboto"/>
               </a:rPr>
-              <a:t>Topic 3 continues AT1: you design the scalability improvements for Ledgerline (single-AZ cloud).</a:t>
+              <a:t>The tiers are designed; now you improve them — security, then reliability and scalability, then cost and monitoring.</a:t>
             </a:r>
           </a:p>
           <a:p>
@@ -7069,7 +9127,7 @@
                 </a:solidFill>
                 <a:latin typeface="Roboto"/>
               </a:rPr>
-              <a:t>Structure the design by four resource components — network, compute, database, storage — the same four units the AT2 team later divides the IaC write by.</a:t>
+              <a:t>Each pass reviews the same architecture through a different lens, to the goals and metrics you set.</a:t>
             </a:r>
           </a:p>
           <a:p>
@@ -7100,7 +9158,7 @@
                 </a:solidFill>
                 <a:latin typeface="Roboto"/>
               </a:rPr>
-              <a:t>Scalability here means elastic capacity-on-demand, demonstrable by test at AT3 — not a forecast, and not over-provisioning.</a:t>
+              <a:t>It ends with the argument: every improvement justified on cost versus benefit.</a:t>
             </a:r>
           </a:p>
           <a:p>
@@ -7131,14 +9189,14 @@
                 </a:solidFill>
                 <a:latin typeface="Roboto"/>
               </a:rPr>
-              <a:t>Design only, to the business needs — the build is AT3.</a:t>
+              <a:t>Design only — the build is AT3.</a:t>
             </a:r>
           </a:p>
         </p:txBody>
       </p:sp>
       <p:pic>
         <p:nvPicPr>
-          <p:cNvPr id="5" name="Picture 4" descr="gen-5b848889.png"/>
+          <p:cNvPr id="5" name="Picture 4" descr="gen-4ef48ddc.png"/>
           <p:cNvPicPr>
             <a:picLocks noChangeAspect="1"/>
           </p:cNvPicPr>
@@ -7278,6 +9336,1984 @@
                 <a:latin typeface="Roboto"/>
               </a:rPr>
               <a:t>1</a:t>
+            </a:r>
+          </a:p>
+        </p:txBody>
+      </p:sp>
+    </p:spTree>
+  </p:cSld>
+  <p:clrMapOvr>
+    <a:masterClrMapping/>
+  </p:clrMapOvr>
+</p:sld>
+</file>
+
+<file path=ppt/slides/slide20.xml><?xml version="1.0" encoding="utf-8"?>
+<p:sld xmlns:a="http://schemas.openxmlformats.org/drawingml/2006/main" xmlns:p="http://schemas.openxmlformats.org/presentationml/2006/main" xmlns:r="http://schemas.openxmlformats.org/officeDocument/2006/relationships">
+  <p:cSld>
+    <p:bg>
+      <p:bgPr>
+        <a:solidFill>
+          <a:srgbClr val="FFFFFF"/>
+        </a:solidFill>
+        <a:effectLst/>
+      </p:bgPr>
+    </p:bg>
+    <p:spTree>
+      <p:nvGrpSpPr>
+        <p:cNvPr id="1" name=""/>
+        <p:cNvGrpSpPr/>
+        <p:nvPr/>
+      </p:nvGrpSpPr>
+      <p:grpSpPr/>
+      <p:sp>
+        <p:nvSpPr>
+          <p:cNvPr id="2" name="Rectangle 1"/>
+          <p:cNvSpPr/>
+          <p:nvPr/>
+        </p:nvSpPr>
+        <p:spPr>
+          <a:xfrm>
+            <a:off x="0" y="0"/>
+            <a:ext cx="3931920" cy="6858000"/>
+          </a:xfrm>
+          <a:prstGeom prst="rect">
+            <a:avLst/>
+          </a:prstGeom>
+          <a:solidFill>
+            <a:srgbClr val="004488"/>
+          </a:solidFill>
+          <a:ln>
+            <a:noFill/>
+          </a:ln>
+          <a:effectLst/>
+        </p:spPr>
+        <p:style>
+          <a:lnRef idx="1">
+            <a:schemeClr val="accent1"/>
+          </a:lnRef>
+          <a:fillRef idx="3">
+            <a:schemeClr val="accent1"/>
+          </a:fillRef>
+          <a:effectRef idx="2">
+            <a:schemeClr val="accent1"/>
+          </a:effectRef>
+          <a:fontRef idx="minor">
+            <a:schemeClr val="lt1"/>
+          </a:fontRef>
+        </p:style>
+        <p:txBody>
+          <a:bodyPr rtlCol="0" anchor="ctr"/>
+          <a:lstStyle/>
+          <a:p>
+            <a:pPr algn="ctr"/>
+          </a:p>
+        </p:txBody>
+      </p:sp>
+      <p:sp>
+        <p:nvSpPr>
+          <p:cNvPr id="3" name="TextBox 2"/>
+          <p:cNvSpPr txBox="1"/>
+          <p:nvPr/>
+        </p:nvSpPr>
+        <p:spPr>
+          <a:xfrm>
+            <a:off x="365760" y="2103120"/>
+            <a:ext cx="3291840" cy="2194560"/>
+          </a:xfrm>
+          <a:prstGeom prst="rect">
+            <a:avLst/>
+          </a:prstGeom>
+          <a:noFill/>
+        </p:spPr>
+        <p:txBody>
+          <a:bodyPr wrap="square" anchor="t" lIns="0" rIns="0" tIns="0" bIns="0">
+            <a:spAutoFit/>
+          </a:bodyPr>
+          <a:lstStyle/>
+          <a:p>
+            <a:r>
+              <a:rPr sz="13000" b="1" i="0">
+                <a:solidFill>
+                  <a:srgbClr val="FFFFFF"/>
+                </a:solidFill>
+                <a:latin typeface="Roboto"/>
+              </a:rPr>
+              <a:t>04</a:t>
+            </a:r>
+          </a:p>
+        </p:txBody>
+      </p:sp>
+      <p:sp>
+        <p:nvSpPr>
+          <p:cNvPr id="4" name="TextBox 3"/>
+          <p:cNvSpPr txBox="1"/>
+          <p:nvPr/>
+        </p:nvSpPr>
+        <p:spPr>
+          <a:xfrm>
+            <a:off x="4480560" y="2468880"/>
+            <a:ext cx="7132320" cy="2194560"/>
+          </a:xfrm>
+          <a:prstGeom prst="rect">
+            <a:avLst/>
+          </a:prstGeom>
+          <a:noFill/>
+        </p:spPr>
+        <p:txBody>
+          <a:bodyPr wrap="square" anchor="t" lIns="0" rIns="0" tIns="0" bIns="0">
+            <a:spAutoFit/>
+          </a:bodyPr>
+          <a:lstStyle/>
+          <a:p>
+            <a:r>
+              <a:rPr sz="1600" b="1" i="0">
+                <a:solidFill>
+                  <a:srgbClr val="004488"/>
+                </a:solidFill>
+                <a:latin typeface="Roboto"/>
+              </a:rPr>
+              <a:t>SECTION</a:t>
+            </a:r>
+          </a:p>
+          <a:p>
+            <a:pPr>
+              <a:spcBef>
+                <a:spcPts val="600"/>
+              </a:spcBef>
+            </a:pPr>
+            <a:r>
+              <a:rPr sz="3800" b="1" i="0">
+                <a:solidFill>
+                  <a:srgbClr val="2A2929"/>
+                </a:solidFill>
+                <a:latin typeface="Roboto"/>
+              </a:rPr>
+              <a:t>The cost-benefit justification</a:t>
+            </a:r>
+          </a:p>
+          <a:p>
+            <a:pPr>
+              <a:spcBef>
+                <a:spcPts val="1000"/>
+              </a:spcBef>
+            </a:pPr>
+            <a:r>
+              <a:rPr sz="2000" b="0" i="1">
+                <a:solidFill>
+                  <a:srgbClr val="484848"/>
+                </a:solidFill>
+                <a:latin typeface="Roboto Light"/>
+              </a:rPr>
+              <a:t>every improvement earns its place</a:t>
+            </a:r>
+          </a:p>
+        </p:txBody>
+      </p:sp>
+      <p:sp>
+        <p:nvSpPr>
+          <p:cNvPr id="5" name="Rectangle 4"/>
+          <p:cNvSpPr/>
+          <p:nvPr/>
+        </p:nvSpPr>
+        <p:spPr>
+          <a:xfrm>
+            <a:off x="0" y="6565392"/>
+            <a:ext cx="12191695" cy="38100"/>
+          </a:xfrm>
+          <a:prstGeom prst="rect">
+            <a:avLst/>
+          </a:prstGeom>
+          <a:solidFill>
+            <a:srgbClr val="004488"/>
+          </a:solidFill>
+          <a:ln>
+            <a:noFill/>
+          </a:ln>
+          <a:effectLst/>
+        </p:spPr>
+        <p:style>
+          <a:lnRef idx="1">
+            <a:schemeClr val="accent1"/>
+          </a:lnRef>
+          <a:fillRef idx="3">
+            <a:schemeClr val="accent1"/>
+          </a:fillRef>
+          <a:effectRef idx="2">
+            <a:schemeClr val="accent1"/>
+          </a:effectRef>
+          <a:fontRef idx="minor">
+            <a:schemeClr val="lt1"/>
+          </a:fontRef>
+        </p:style>
+        <p:txBody>
+          <a:bodyPr rtlCol="0" anchor="ctr"/>
+          <a:lstStyle/>
+          <a:p>
+            <a:pPr algn="ctr"/>
+          </a:p>
+        </p:txBody>
+      </p:sp>
+      <p:sp>
+        <p:nvSpPr>
+          <p:cNvPr id="6" name="TextBox 5"/>
+          <p:cNvSpPr txBox="1"/>
+          <p:nvPr/>
+        </p:nvSpPr>
+        <p:spPr>
+          <a:xfrm>
+            <a:off x="502920" y="6400800"/>
+            <a:ext cx="5486400" cy="320040"/>
+          </a:xfrm>
+          <a:prstGeom prst="rect">
+            <a:avLst/>
+          </a:prstGeom>
+          <a:noFill/>
+        </p:spPr>
+        <p:txBody>
+          <a:bodyPr wrap="square" anchor="t" lIns="0" rIns="0" tIns="0" bIns="0">
+            <a:spAutoFit/>
+          </a:bodyPr>
+          <a:lstStyle/>
+          <a:p>
+            <a:r>
+              <a:rPr sz="1100" b="1" i="0">
+                <a:solidFill>
+                  <a:srgbClr val="2A2929"/>
+                </a:solidFill>
+                <a:latin typeface="Roboto"/>
+              </a:rPr>
+              <a:t>Kangan </a:t>
+            </a:r>
+            <a:r>
+              <a:rPr sz="1100" b="1" i="0">
+                <a:solidFill>
+                  <a:srgbClr val="D68E10"/>
+                </a:solidFill>
+                <a:latin typeface="Roboto"/>
+              </a:rPr>
+              <a:t>Institute</a:t>
+            </a:r>
+          </a:p>
+        </p:txBody>
+      </p:sp>
+      <p:sp>
+        <p:nvSpPr>
+          <p:cNvPr id="7" name="TextBox 6"/>
+          <p:cNvSpPr txBox="1"/>
+          <p:nvPr/>
+        </p:nvSpPr>
+        <p:spPr>
+          <a:xfrm>
+            <a:off x="10515600" y="6400800"/>
+            <a:ext cx="1188720" cy="320040"/>
+          </a:xfrm>
+          <a:prstGeom prst="rect">
+            <a:avLst/>
+          </a:prstGeom>
+          <a:noFill/>
+        </p:spPr>
+        <p:txBody>
+          <a:bodyPr wrap="square" anchor="t" lIns="0" rIns="0" tIns="0" bIns="0">
+            <a:spAutoFit/>
+          </a:bodyPr>
+          <a:lstStyle/>
+          <a:p>
+            <a:pPr algn="r"/>
+            <a:r>
+              <a:rPr sz="1100" b="0" i="0">
+                <a:solidFill>
+                  <a:srgbClr val="7A7A7A"/>
+                </a:solidFill>
+                <a:latin typeface="Roboto"/>
+              </a:rPr>
+              <a:t/>
+            </a:r>
+          </a:p>
+        </p:txBody>
+      </p:sp>
+    </p:spTree>
+  </p:cSld>
+  <p:clrMapOvr>
+    <a:masterClrMapping/>
+  </p:clrMapOvr>
+</p:sld>
+</file>
+
+<file path=ppt/slides/slide21.xml><?xml version="1.0" encoding="utf-8"?>
+<p:sld xmlns:a="http://schemas.openxmlformats.org/drawingml/2006/main" xmlns:p="http://schemas.openxmlformats.org/presentationml/2006/main" xmlns:r="http://schemas.openxmlformats.org/officeDocument/2006/relationships">
+  <p:cSld>
+    <p:bg>
+      <p:bgPr>
+        <a:solidFill>
+          <a:srgbClr val="FFFFFF"/>
+        </a:solidFill>
+        <a:effectLst/>
+      </p:bgPr>
+    </p:bg>
+    <p:spTree>
+      <p:nvGrpSpPr>
+        <p:cNvPr id="1" name=""/>
+        <p:cNvGrpSpPr/>
+        <p:nvPr/>
+      </p:nvGrpSpPr>
+      <p:grpSpPr/>
+      <p:sp>
+        <p:nvSpPr>
+          <p:cNvPr id="2" name="TextBox 1"/>
+          <p:cNvSpPr txBox="1"/>
+          <p:nvPr/>
+        </p:nvSpPr>
+        <p:spPr>
+          <a:xfrm>
+            <a:off x="640080" y="457200"/>
+            <a:ext cx="10881360" cy="960120"/>
+          </a:xfrm>
+          <a:prstGeom prst="rect">
+            <a:avLst/>
+          </a:prstGeom>
+          <a:noFill/>
+        </p:spPr>
+        <p:txBody>
+          <a:bodyPr wrap="square" anchor="t" lIns="0" rIns="0" tIns="0" bIns="0">
+            <a:spAutoFit/>
+          </a:bodyPr>
+          <a:lstStyle/>
+          <a:p>
+            <a:r>
+              <a:rPr sz="2800" b="1" i="0">
+                <a:solidFill>
+                  <a:srgbClr val="2A2929"/>
+                </a:solidFill>
+                <a:latin typeface="Roboto"/>
+              </a:rPr>
+              <a:t>Justify on cost versus benefit</a:t>
+            </a:r>
+          </a:p>
+        </p:txBody>
+      </p:sp>
+      <p:sp>
+        <p:nvSpPr>
+          <p:cNvPr id="3" name="Rectangle 2"/>
+          <p:cNvSpPr/>
+          <p:nvPr/>
+        </p:nvSpPr>
+        <p:spPr>
+          <a:xfrm>
+            <a:off x="658368" y="1371600"/>
+            <a:ext cx="1463040" cy="50800"/>
+          </a:xfrm>
+          <a:prstGeom prst="rect">
+            <a:avLst/>
+          </a:prstGeom>
+          <a:solidFill>
+            <a:srgbClr val="004488"/>
+          </a:solidFill>
+          <a:ln>
+            <a:noFill/>
+          </a:ln>
+          <a:effectLst/>
+        </p:spPr>
+        <p:style>
+          <a:lnRef idx="1">
+            <a:schemeClr val="accent1"/>
+          </a:lnRef>
+          <a:fillRef idx="3">
+            <a:schemeClr val="accent1"/>
+          </a:fillRef>
+          <a:effectRef idx="2">
+            <a:schemeClr val="accent1"/>
+          </a:effectRef>
+          <a:fontRef idx="minor">
+            <a:schemeClr val="lt1"/>
+          </a:fontRef>
+        </p:style>
+        <p:txBody>
+          <a:bodyPr rtlCol="0" anchor="ctr"/>
+          <a:lstStyle/>
+          <a:p>
+            <a:pPr algn="ctr"/>
+          </a:p>
+        </p:txBody>
+      </p:sp>
+      <p:sp>
+        <p:nvSpPr>
+          <p:cNvPr id="4" name="TextBox 3"/>
+          <p:cNvSpPr txBox="1"/>
+          <p:nvPr/>
+        </p:nvSpPr>
+        <p:spPr>
+          <a:xfrm>
+            <a:off x="658368" y="1691640"/>
+            <a:ext cx="10881360" cy="4480560"/>
+          </a:xfrm>
+          <a:prstGeom prst="rect">
+            <a:avLst/>
+          </a:prstGeom>
+          <a:noFill/>
+        </p:spPr>
+        <p:txBody>
+          <a:bodyPr wrap="square" anchor="ctr" lIns="0" rIns="0" tIns="0" bIns="0">
+            <a:spAutoFit/>
+          </a:bodyPr>
+          <a:lstStyle/>
+          <a:p>
+            <a:pPr marL="0" indent="0">
+              <a:lnSpc>
+                <a:spcPct val="105000"/>
+              </a:lnSpc>
+              <a:spcBef>
+                <a:spcPts val="0"/>
+              </a:spcBef>
+              <a:spcAft>
+                <a:spcPts val="1000"/>
+              </a:spcAft>
+            </a:pPr>
+            <a:r>
+              <a:rPr sz="2400" b="1" i="0">
+                <a:solidFill>
+                  <a:srgbClr val="EDAB0C"/>
+                </a:solidFill>
+                <a:latin typeface="Roboto"/>
+              </a:rPr>
+              <a:t>■  </a:t>
+            </a:r>
+            <a:r>
+              <a:rPr sz="2400" b="0" i="0">
+                <a:solidFill>
+                  <a:srgbClr val="2A2929"/>
+                </a:solidFill>
+                <a:latin typeface="Roboto"/>
+              </a:rPr>
+              <a:t>Every improvement is justified on cost versus benefit, against the current run cost as the baseline.</a:t>
+            </a:r>
+          </a:p>
+          <a:p>
+            <a:pPr marL="0" indent="0">
+              <a:lnSpc>
+                <a:spcPct val="105000"/>
+              </a:lnSpc>
+              <a:spcBef>
+                <a:spcPts val="0"/>
+              </a:spcBef>
+              <a:spcAft>
+                <a:spcPts val="1000"/>
+              </a:spcAft>
+            </a:pPr>
+            <a:r>
+              <a:rPr sz="2400" b="1" i="0">
+                <a:solidFill>
+                  <a:srgbClr val="EDAB0C"/>
+                </a:solidFill>
+                <a:latin typeface="Roboto"/>
+              </a:rPr>
+              <a:t>■  </a:t>
+            </a:r>
+            <a:r>
+              <a:rPr sz="2400" b="0" i="0">
+                <a:solidFill>
+                  <a:srgbClr val="2A2929"/>
+                </a:solidFill>
+                <a:latin typeface="Roboto"/>
+              </a:rPr>
+              <a:t>The shape: what it costs, what it buys, and why that trade is worth it for this business.</a:t>
+            </a:r>
+          </a:p>
+          <a:p>
+            <a:pPr marL="0" indent="0">
+              <a:lnSpc>
+                <a:spcPct val="105000"/>
+              </a:lnSpc>
+              <a:spcBef>
+                <a:spcPts val="0"/>
+              </a:spcBef>
+              <a:spcAft>
+                <a:spcPts val="1000"/>
+              </a:spcAft>
+            </a:pPr>
+            <a:r>
+              <a:rPr sz="2400" b="1" i="0">
+                <a:solidFill>
+                  <a:srgbClr val="EDAB0C"/>
+                </a:solidFill>
+                <a:latin typeface="Roboto"/>
+              </a:rPr>
+              <a:t>■  </a:t>
+            </a:r>
+            <a:r>
+              <a:rPr sz="2400" b="0" i="0">
+                <a:solidFill>
+                  <a:srgbClr val="2A2929"/>
+                </a:solidFill>
+                <a:latin typeface="Roboto"/>
+              </a:rPr>
+              <a:t>The rejected options belong in the argument too — what you didn't build, and why, is half the case.</a:t>
+            </a:r>
+          </a:p>
+        </p:txBody>
+      </p:sp>
+      <p:sp>
+        <p:nvSpPr>
+          <p:cNvPr id="5" name="Rectangle 4"/>
+          <p:cNvSpPr/>
+          <p:nvPr/>
+        </p:nvSpPr>
+        <p:spPr>
+          <a:xfrm>
+            <a:off x="0" y="6565392"/>
+            <a:ext cx="12191695" cy="38100"/>
+          </a:xfrm>
+          <a:prstGeom prst="rect">
+            <a:avLst/>
+          </a:prstGeom>
+          <a:solidFill>
+            <a:srgbClr val="004488"/>
+          </a:solidFill>
+          <a:ln>
+            <a:noFill/>
+          </a:ln>
+          <a:effectLst/>
+        </p:spPr>
+        <p:style>
+          <a:lnRef idx="1">
+            <a:schemeClr val="accent1"/>
+          </a:lnRef>
+          <a:fillRef idx="3">
+            <a:schemeClr val="accent1"/>
+          </a:fillRef>
+          <a:effectRef idx="2">
+            <a:schemeClr val="accent1"/>
+          </a:effectRef>
+          <a:fontRef idx="minor">
+            <a:schemeClr val="lt1"/>
+          </a:fontRef>
+        </p:style>
+        <p:txBody>
+          <a:bodyPr rtlCol="0" anchor="ctr"/>
+          <a:lstStyle/>
+          <a:p>
+            <a:pPr algn="ctr"/>
+          </a:p>
+        </p:txBody>
+      </p:sp>
+      <p:sp>
+        <p:nvSpPr>
+          <p:cNvPr id="6" name="TextBox 5"/>
+          <p:cNvSpPr txBox="1"/>
+          <p:nvPr/>
+        </p:nvSpPr>
+        <p:spPr>
+          <a:xfrm>
+            <a:off x="502920" y="6400800"/>
+            <a:ext cx="5486400" cy="320040"/>
+          </a:xfrm>
+          <a:prstGeom prst="rect">
+            <a:avLst/>
+          </a:prstGeom>
+          <a:noFill/>
+        </p:spPr>
+        <p:txBody>
+          <a:bodyPr wrap="square" anchor="t" lIns="0" rIns="0" tIns="0" bIns="0">
+            <a:spAutoFit/>
+          </a:bodyPr>
+          <a:lstStyle/>
+          <a:p>
+            <a:r>
+              <a:rPr sz="1100" b="1" i="0">
+                <a:solidFill>
+                  <a:srgbClr val="2A2929"/>
+                </a:solidFill>
+                <a:latin typeface="Roboto"/>
+              </a:rPr>
+              <a:t>Kangan </a:t>
+            </a:r>
+            <a:r>
+              <a:rPr sz="1100" b="1" i="0">
+                <a:solidFill>
+                  <a:srgbClr val="D68E10"/>
+                </a:solidFill>
+                <a:latin typeface="Roboto"/>
+              </a:rPr>
+              <a:t>Institute</a:t>
+            </a:r>
+          </a:p>
+        </p:txBody>
+      </p:sp>
+      <p:sp>
+        <p:nvSpPr>
+          <p:cNvPr id="7" name="TextBox 6"/>
+          <p:cNvSpPr txBox="1"/>
+          <p:nvPr/>
+        </p:nvSpPr>
+        <p:spPr>
+          <a:xfrm>
+            <a:off x="10515600" y="6400800"/>
+            <a:ext cx="1188720" cy="320040"/>
+          </a:xfrm>
+          <a:prstGeom prst="rect">
+            <a:avLst/>
+          </a:prstGeom>
+          <a:noFill/>
+        </p:spPr>
+        <p:txBody>
+          <a:bodyPr wrap="square" anchor="t" lIns="0" rIns="0" tIns="0" bIns="0">
+            <a:spAutoFit/>
+          </a:bodyPr>
+          <a:lstStyle/>
+          <a:p>
+            <a:pPr algn="r"/>
+            <a:r>
+              <a:rPr sz="1100" b="0" i="0">
+                <a:solidFill>
+                  <a:srgbClr val="7A7A7A"/>
+                </a:solidFill>
+                <a:latin typeface="Roboto"/>
+              </a:rPr>
+              <a:t>16</a:t>
+            </a:r>
+          </a:p>
+        </p:txBody>
+      </p:sp>
+    </p:spTree>
+  </p:cSld>
+  <p:clrMapOvr>
+    <a:masterClrMapping/>
+  </p:clrMapOvr>
+</p:sld>
+</file>
+
+<file path=ppt/slides/slide22.xml><?xml version="1.0" encoding="utf-8"?>
+<p:sld xmlns:a="http://schemas.openxmlformats.org/drawingml/2006/main" xmlns:p="http://schemas.openxmlformats.org/presentationml/2006/main" xmlns:r="http://schemas.openxmlformats.org/officeDocument/2006/relationships">
+  <p:cSld>
+    <p:bg>
+      <p:bgPr>
+        <a:solidFill>
+          <a:srgbClr val="FFFFFF"/>
+        </a:solidFill>
+        <a:effectLst/>
+      </p:bgPr>
+    </p:bg>
+    <p:spTree>
+      <p:nvGrpSpPr>
+        <p:cNvPr id="1" name=""/>
+        <p:cNvGrpSpPr/>
+        <p:nvPr/>
+      </p:nvGrpSpPr>
+      <p:grpSpPr/>
+      <p:sp>
+        <p:nvSpPr>
+          <p:cNvPr id="2" name="Rectangle 1"/>
+          <p:cNvSpPr/>
+          <p:nvPr/>
+        </p:nvSpPr>
+        <p:spPr>
+          <a:xfrm>
+            <a:off x="0" y="0"/>
+            <a:ext cx="12191695" cy="1234440"/>
+          </a:xfrm>
+          <a:prstGeom prst="rect">
+            <a:avLst/>
+          </a:prstGeom>
+          <a:solidFill>
+            <a:srgbClr val="004488"/>
+          </a:solidFill>
+          <a:ln>
+            <a:noFill/>
+          </a:ln>
+          <a:effectLst/>
+        </p:spPr>
+        <p:style>
+          <a:lnRef idx="1">
+            <a:schemeClr val="accent1"/>
+          </a:lnRef>
+          <a:fillRef idx="3">
+            <a:schemeClr val="accent1"/>
+          </a:fillRef>
+          <a:effectRef idx="2">
+            <a:schemeClr val="accent1"/>
+          </a:effectRef>
+          <a:fontRef idx="minor">
+            <a:schemeClr val="lt1"/>
+          </a:fontRef>
+        </p:style>
+        <p:txBody>
+          <a:bodyPr rtlCol="0" anchor="ctr"/>
+          <a:lstStyle/>
+          <a:p>
+            <a:pPr algn="ctr"/>
+          </a:p>
+        </p:txBody>
+      </p:sp>
+      <p:sp>
+        <p:nvSpPr>
+          <p:cNvPr id="3" name="Rounded Rectangle 2"/>
+          <p:cNvSpPr/>
+          <p:nvPr/>
+        </p:nvSpPr>
+        <p:spPr>
+          <a:xfrm>
+            <a:off x="640080" y="384048"/>
+            <a:ext cx="1691640" cy="457200"/>
+          </a:xfrm>
+          <a:prstGeom prst="roundRect">
+            <a:avLst/>
+          </a:prstGeom>
+          <a:solidFill>
+            <a:srgbClr val="2A2929"/>
+          </a:solidFill>
+          <a:ln>
+            <a:noFill/>
+          </a:ln>
+          <a:effectLst/>
+        </p:spPr>
+        <p:style>
+          <a:lnRef idx="1">
+            <a:schemeClr val="accent1"/>
+          </a:lnRef>
+          <a:fillRef idx="3">
+            <a:schemeClr val="accent1"/>
+          </a:fillRef>
+          <a:effectRef idx="2">
+            <a:schemeClr val="accent1"/>
+          </a:effectRef>
+          <a:fontRef idx="minor">
+            <a:schemeClr val="lt1"/>
+          </a:fontRef>
+        </p:style>
+        <p:txBody>
+          <a:bodyPr rtlCol="0" anchor="ctr"/>
+          <a:lstStyle/>
+          <a:p>
+            <a:pPr algn="ctr"/>
+            <a:r>
+              <a:rPr sz="1400" b="1" i="0">
+                <a:solidFill>
+                  <a:srgbClr val="FBB900"/>
+                </a:solidFill>
+                <a:latin typeface="Roboto"/>
+              </a:rPr>
+              <a:t>ACTIVITY</a:t>
+            </a:r>
+          </a:p>
+        </p:txBody>
+      </p:sp>
+      <p:sp>
+        <p:nvSpPr>
+          <p:cNvPr id="4" name="TextBox 3"/>
+          <p:cNvSpPr txBox="1"/>
+          <p:nvPr/>
+        </p:nvSpPr>
+        <p:spPr>
+          <a:xfrm>
+            <a:off x="2560320" y="310896"/>
+            <a:ext cx="8961120" cy="685800"/>
+          </a:xfrm>
+          <a:prstGeom prst="rect">
+            <a:avLst/>
+          </a:prstGeom>
+          <a:noFill/>
+        </p:spPr>
+        <p:txBody>
+          <a:bodyPr wrap="square" anchor="ctr" lIns="0" rIns="0" tIns="0" bIns="0">
+            <a:spAutoFit/>
+          </a:bodyPr>
+          <a:lstStyle/>
+          <a:p>
+            <a:r>
+              <a:rPr sz="2600" b="1" i="0">
+                <a:solidFill>
+                  <a:srgbClr val="FFFFFF"/>
+                </a:solidFill>
+                <a:latin typeface="Roboto"/>
+              </a:rPr>
+              <a:t>Write the cost-benefit justification</a:t>
+            </a:r>
+          </a:p>
+        </p:txBody>
+      </p:sp>
+      <p:sp>
+        <p:nvSpPr>
+          <p:cNvPr id="5" name="TextBox 4"/>
+          <p:cNvSpPr txBox="1"/>
+          <p:nvPr/>
+        </p:nvSpPr>
+        <p:spPr>
+          <a:xfrm>
+            <a:off x="658368" y="1554480"/>
+            <a:ext cx="10881360" cy="4297680"/>
+          </a:xfrm>
+          <a:prstGeom prst="rect">
+            <a:avLst/>
+          </a:prstGeom>
+          <a:noFill/>
+        </p:spPr>
+        <p:txBody>
+          <a:bodyPr wrap="square" anchor="t" lIns="0" rIns="0" tIns="0" bIns="0">
+            <a:spAutoFit/>
+          </a:bodyPr>
+          <a:lstStyle/>
+          <a:p>
+            <a:pPr marL="0" indent="0">
+              <a:lnSpc>
+                <a:spcPct val="105000"/>
+              </a:lnSpc>
+              <a:spcBef>
+                <a:spcPts val="0"/>
+              </a:spcBef>
+              <a:spcAft>
+                <a:spcPts val="1000"/>
+              </a:spcAft>
+            </a:pPr>
+            <a:r>
+              <a:rPr sz="1700" b="1" i="0">
+                <a:solidFill>
+                  <a:srgbClr val="EDAB0C"/>
+                </a:solidFill>
+                <a:latin typeface="Roboto"/>
+              </a:rPr>
+              <a:t>■  </a:t>
+            </a:r>
+            <a:r>
+              <a:rPr sz="1700" b="0" i="0">
+                <a:solidFill>
+                  <a:srgbClr val="2A2929"/>
+                </a:solidFill>
+                <a:latin typeface="Roboto"/>
+              </a:rPr>
+              <a:t>Workbook — task 13.</a:t>
+            </a:r>
+          </a:p>
+          <a:p>
+            <a:pPr marL="0" indent="0">
+              <a:lnSpc>
+                <a:spcPct val="105000"/>
+              </a:lnSpc>
+              <a:spcBef>
+                <a:spcPts val="0"/>
+              </a:spcBef>
+              <a:spcAft>
+                <a:spcPts val="1000"/>
+              </a:spcAft>
+            </a:pPr>
+            <a:r>
+              <a:rPr sz="1700" b="1" i="0">
+                <a:solidFill>
+                  <a:srgbClr val="EDAB0C"/>
+                </a:solidFill>
+                <a:latin typeface="Roboto"/>
+              </a:rPr>
+              <a:t>■  </a:t>
+            </a:r>
+            <a:r>
+              <a:rPr sz="1700" b="0" i="0">
+                <a:solidFill>
+                  <a:srgbClr val="2A2929"/>
+                </a:solidFill>
+                <a:latin typeface="Roboto"/>
+              </a:rPr>
+              <a:t>Justify each improvement for the practice engagement on cost versus benefit, citing the current run cost as the baseline.</a:t>
+            </a:r>
+          </a:p>
+        </p:txBody>
+      </p:sp>
+      <p:sp>
+        <p:nvSpPr>
+          <p:cNvPr id="6" name="Rounded Rectangle 5"/>
+          <p:cNvSpPr/>
+          <p:nvPr/>
+        </p:nvSpPr>
+        <p:spPr>
+          <a:xfrm>
+            <a:off x="640080" y="5897880"/>
+            <a:ext cx="4023360" cy="457200"/>
+          </a:xfrm>
+          <a:prstGeom prst="roundRect">
+            <a:avLst/>
+          </a:prstGeom>
+          <a:solidFill>
+            <a:srgbClr val="F9F9F9"/>
+          </a:solidFill>
+          <a:ln w="12700">
+            <a:solidFill>
+              <a:srgbClr val="CCCCCC"/>
+            </a:solidFill>
+          </a:ln>
+          <a:effectLst/>
+        </p:spPr>
+        <p:style>
+          <a:lnRef idx="1">
+            <a:schemeClr val="accent1"/>
+          </a:lnRef>
+          <a:fillRef idx="3">
+            <a:schemeClr val="accent1"/>
+          </a:fillRef>
+          <a:effectRef idx="2">
+            <a:schemeClr val="accent1"/>
+          </a:effectRef>
+          <a:fontRef idx="minor">
+            <a:schemeClr val="lt1"/>
+          </a:fontRef>
+        </p:style>
+        <p:txBody>
+          <a:bodyPr rtlCol="0" anchor="ctr"/>
+          <a:lstStyle/>
+          <a:p>
+            <a:pPr algn="ctr"/>
+          </a:p>
+        </p:txBody>
+      </p:sp>
+      <p:sp>
+        <p:nvSpPr>
+          <p:cNvPr id="7" name="TextBox 6"/>
+          <p:cNvSpPr txBox="1"/>
+          <p:nvPr/>
+        </p:nvSpPr>
+        <p:spPr>
+          <a:xfrm>
+            <a:off x="822960" y="5943600"/>
+            <a:ext cx="3657600" cy="365760"/>
+          </a:xfrm>
+          <a:prstGeom prst="rect">
+            <a:avLst/>
+          </a:prstGeom>
+          <a:noFill/>
+        </p:spPr>
+        <p:txBody>
+          <a:bodyPr wrap="square" anchor="ctr" lIns="0" rIns="0" tIns="0" bIns="0">
+            <a:spAutoFit/>
+          </a:bodyPr>
+          <a:lstStyle/>
+          <a:p>
+            <a:r>
+              <a:rPr sz="1500" b="1" i="0">
+                <a:solidFill>
+                  <a:srgbClr val="2A2929"/>
+                </a:solidFill>
+                <a:latin typeface="Roboto"/>
+              </a:rPr>
+              <a:t>⏱  ~30 min</a:t>
+            </a:r>
+          </a:p>
+        </p:txBody>
+      </p:sp>
+      <p:sp>
+        <p:nvSpPr>
+          <p:cNvPr id="8" name="Rectangle 7"/>
+          <p:cNvSpPr/>
+          <p:nvPr/>
+        </p:nvSpPr>
+        <p:spPr>
+          <a:xfrm>
+            <a:off x="0" y="6565392"/>
+            <a:ext cx="12191695" cy="38100"/>
+          </a:xfrm>
+          <a:prstGeom prst="rect">
+            <a:avLst/>
+          </a:prstGeom>
+          <a:solidFill>
+            <a:srgbClr val="004488"/>
+          </a:solidFill>
+          <a:ln>
+            <a:noFill/>
+          </a:ln>
+          <a:effectLst/>
+        </p:spPr>
+        <p:style>
+          <a:lnRef idx="1">
+            <a:schemeClr val="accent1"/>
+          </a:lnRef>
+          <a:fillRef idx="3">
+            <a:schemeClr val="accent1"/>
+          </a:fillRef>
+          <a:effectRef idx="2">
+            <a:schemeClr val="accent1"/>
+          </a:effectRef>
+          <a:fontRef idx="minor">
+            <a:schemeClr val="lt1"/>
+          </a:fontRef>
+        </p:style>
+        <p:txBody>
+          <a:bodyPr rtlCol="0" anchor="ctr"/>
+          <a:lstStyle/>
+          <a:p>
+            <a:pPr algn="ctr"/>
+          </a:p>
+        </p:txBody>
+      </p:sp>
+      <p:sp>
+        <p:nvSpPr>
+          <p:cNvPr id="9" name="TextBox 8"/>
+          <p:cNvSpPr txBox="1"/>
+          <p:nvPr/>
+        </p:nvSpPr>
+        <p:spPr>
+          <a:xfrm>
+            <a:off x="502920" y="6400800"/>
+            <a:ext cx="5486400" cy="320040"/>
+          </a:xfrm>
+          <a:prstGeom prst="rect">
+            <a:avLst/>
+          </a:prstGeom>
+          <a:noFill/>
+        </p:spPr>
+        <p:txBody>
+          <a:bodyPr wrap="square" anchor="t" lIns="0" rIns="0" tIns="0" bIns="0">
+            <a:spAutoFit/>
+          </a:bodyPr>
+          <a:lstStyle/>
+          <a:p>
+            <a:r>
+              <a:rPr sz="1100" b="1" i="0">
+                <a:solidFill>
+                  <a:srgbClr val="2A2929"/>
+                </a:solidFill>
+                <a:latin typeface="Roboto"/>
+              </a:rPr>
+              <a:t>Kangan </a:t>
+            </a:r>
+            <a:r>
+              <a:rPr sz="1100" b="1" i="0">
+                <a:solidFill>
+                  <a:srgbClr val="D68E10"/>
+                </a:solidFill>
+                <a:latin typeface="Roboto"/>
+              </a:rPr>
+              <a:t>Institute</a:t>
+            </a:r>
+          </a:p>
+        </p:txBody>
+      </p:sp>
+      <p:sp>
+        <p:nvSpPr>
+          <p:cNvPr id="10" name="TextBox 9"/>
+          <p:cNvSpPr txBox="1"/>
+          <p:nvPr/>
+        </p:nvSpPr>
+        <p:spPr>
+          <a:xfrm>
+            <a:off x="10515600" y="6400800"/>
+            <a:ext cx="1188720" cy="320040"/>
+          </a:xfrm>
+          <a:prstGeom prst="rect">
+            <a:avLst/>
+          </a:prstGeom>
+          <a:noFill/>
+        </p:spPr>
+        <p:txBody>
+          <a:bodyPr wrap="square" anchor="t" lIns="0" rIns="0" tIns="0" bIns="0">
+            <a:spAutoFit/>
+          </a:bodyPr>
+          <a:lstStyle/>
+          <a:p>
+            <a:pPr algn="r"/>
+            <a:r>
+              <a:rPr sz="1100" b="0" i="0">
+                <a:solidFill>
+                  <a:srgbClr val="7A7A7A"/>
+                </a:solidFill>
+                <a:latin typeface="Roboto"/>
+              </a:rPr>
+              <a:t>17</a:t>
+            </a:r>
+          </a:p>
+        </p:txBody>
+      </p:sp>
+    </p:spTree>
+  </p:cSld>
+  <p:clrMapOvr>
+    <a:masterClrMapping/>
+  </p:clrMapOvr>
+</p:sld>
+</file>
+
+<file path=ppt/slides/slide23.xml><?xml version="1.0" encoding="utf-8"?>
+<p:sld xmlns:a="http://schemas.openxmlformats.org/drawingml/2006/main" xmlns:p="http://schemas.openxmlformats.org/presentationml/2006/main" xmlns:r="http://schemas.openxmlformats.org/officeDocument/2006/relationships">
+  <p:cSld>
+    <p:bg>
+      <p:bgPr>
+        <a:solidFill>
+          <a:srgbClr val="F9F9F9"/>
+        </a:solidFill>
+        <a:effectLst/>
+      </p:bgPr>
+    </p:bg>
+    <p:spTree>
+      <p:nvGrpSpPr>
+        <p:cNvPr id="1" name=""/>
+        <p:cNvGrpSpPr/>
+        <p:nvPr/>
+      </p:nvGrpSpPr>
+      <p:grpSpPr/>
+      <p:sp>
+        <p:nvSpPr>
+          <p:cNvPr id="2" name="TextBox 1"/>
+          <p:cNvSpPr txBox="1"/>
+          <p:nvPr/>
+        </p:nvSpPr>
+        <p:spPr>
+          <a:xfrm>
+            <a:off x="640080" y="548640"/>
+            <a:ext cx="10881360" cy="1097280"/>
+          </a:xfrm>
+          <a:prstGeom prst="rect">
+            <a:avLst/>
+          </a:prstGeom>
+          <a:noFill/>
+        </p:spPr>
+        <p:txBody>
+          <a:bodyPr wrap="square" anchor="t" lIns="0" rIns="0" tIns="0" bIns="0">
+            <a:spAutoFit/>
+          </a:bodyPr>
+          <a:lstStyle/>
+          <a:p>
+            <a:r>
+              <a:rPr sz="3200" b="1" i="0">
+                <a:solidFill>
+                  <a:srgbClr val="2A2929"/>
+                </a:solidFill>
+                <a:latin typeface="Roboto"/>
+              </a:rPr>
+              <a:t>Key takeaways</a:t>
+            </a:r>
+          </a:p>
+          <a:p>
+            <a:pPr>
+              <a:spcBef>
+                <a:spcPts val="200"/>
+              </a:spcBef>
+            </a:pPr>
+            <a:r>
+              <a:rPr sz="1800" b="1" i="0">
+                <a:solidFill>
+                  <a:srgbClr val="004488"/>
+                </a:solidFill>
+                <a:latin typeface="Roboto"/>
+              </a:rPr>
+              <a:t>Topic 3 · Key takeaways</a:t>
+            </a:r>
+          </a:p>
+        </p:txBody>
+      </p:sp>
+      <p:sp>
+        <p:nvSpPr>
+          <p:cNvPr id="3" name="Rectangle 2"/>
+          <p:cNvSpPr/>
+          <p:nvPr/>
+        </p:nvSpPr>
+        <p:spPr>
+          <a:xfrm>
+            <a:off x="658368" y="1600200"/>
+            <a:ext cx="1463040" cy="50800"/>
+          </a:xfrm>
+          <a:prstGeom prst="rect">
+            <a:avLst/>
+          </a:prstGeom>
+          <a:solidFill>
+            <a:srgbClr val="004488"/>
+          </a:solidFill>
+          <a:ln>
+            <a:noFill/>
+          </a:ln>
+          <a:effectLst/>
+        </p:spPr>
+        <p:style>
+          <a:lnRef idx="1">
+            <a:schemeClr val="accent1"/>
+          </a:lnRef>
+          <a:fillRef idx="3">
+            <a:schemeClr val="accent1"/>
+          </a:fillRef>
+          <a:effectRef idx="2">
+            <a:schemeClr val="accent1"/>
+          </a:effectRef>
+          <a:fontRef idx="minor">
+            <a:schemeClr val="lt1"/>
+          </a:fontRef>
+        </p:style>
+        <p:txBody>
+          <a:bodyPr rtlCol="0" anchor="ctr"/>
+          <a:lstStyle/>
+          <a:p>
+            <a:pPr algn="ctr"/>
+          </a:p>
+        </p:txBody>
+      </p:sp>
+      <p:sp>
+        <p:nvSpPr>
+          <p:cNvPr id="4" name="Rectangle 3"/>
+          <p:cNvSpPr/>
+          <p:nvPr/>
+        </p:nvSpPr>
+        <p:spPr>
+          <a:xfrm>
+            <a:off x="640080" y="1965960"/>
+            <a:ext cx="10927080" cy="841248"/>
+          </a:xfrm>
+          <a:prstGeom prst="rect">
+            <a:avLst/>
+          </a:prstGeom>
+          <a:solidFill>
+            <a:srgbClr val="FFFFFF"/>
+          </a:solidFill>
+          <a:ln w="12700">
+            <a:solidFill>
+              <a:srgbClr val="CCCCCC"/>
+            </a:solidFill>
+          </a:ln>
+          <a:effectLst/>
+        </p:spPr>
+        <p:style>
+          <a:lnRef idx="1">
+            <a:schemeClr val="accent1"/>
+          </a:lnRef>
+          <a:fillRef idx="3">
+            <a:schemeClr val="accent1"/>
+          </a:fillRef>
+          <a:effectRef idx="2">
+            <a:schemeClr val="accent1"/>
+          </a:effectRef>
+          <a:fontRef idx="minor">
+            <a:schemeClr val="lt1"/>
+          </a:fontRef>
+        </p:style>
+        <p:txBody>
+          <a:bodyPr rtlCol="0" anchor="ctr"/>
+          <a:lstStyle/>
+          <a:p>
+            <a:pPr algn="ctr"/>
+          </a:p>
+        </p:txBody>
+      </p:sp>
+      <p:sp>
+        <p:nvSpPr>
+          <p:cNvPr id="5" name="Rectangle 4"/>
+          <p:cNvSpPr/>
+          <p:nvPr/>
+        </p:nvSpPr>
+        <p:spPr>
+          <a:xfrm>
+            <a:off x="640080" y="1965960"/>
+            <a:ext cx="109728" cy="841248"/>
+          </a:xfrm>
+          <a:prstGeom prst="rect">
+            <a:avLst/>
+          </a:prstGeom>
+          <a:solidFill>
+            <a:srgbClr val="004488"/>
+          </a:solidFill>
+          <a:ln>
+            <a:noFill/>
+          </a:ln>
+          <a:effectLst/>
+        </p:spPr>
+        <p:style>
+          <a:lnRef idx="1">
+            <a:schemeClr val="accent1"/>
+          </a:lnRef>
+          <a:fillRef idx="3">
+            <a:schemeClr val="accent1"/>
+          </a:fillRef>
+          <a:effectRef idx="2">
+            <a:schemeClr val="accent1"/>
+          </a:effectRef>
+          <a:fontRef idx="minor">
+            <a:schemeClr val="lt1"/>
+          </a:fontRef>
+        </p:style>
+        <p:txBody>
+          <a:bodyPr rtlCol="0" anchor="ctr"/>
+          <a:lstStyle/>
+          <a:p>
+            <a:pPr algn="ctr"/>
+          </a:p>
+        </p:txBody>
+      </p:sp>
+      <p:sp>
+        <p:nvSpPr>
+          <p:cNvPr id="6" name="TextBox 5"/>
+          <p:cNvSpPr txBox="1"/>
+          <p:nvPr/>
+        </p:nvSpPr>
+        <p:spPr>
+          <a:xfrm>
+            <a:off x="960120" y="1965960"/>
+            <a:ext cx="10424160" cy="841248"/>
+          </a:xfrm>
+          <a:prstGeom prst="rect">
+            <a:avLst/>
+          </a:prstGeom>
+          <a:noFill/>
+        </p:spPr>
+        <p:txBody>
+          <a:bodyPr wrap="square" anchor="ctr" lIns="0" rIns="0" tIns="0" bIns="0">
+            <a:spAutoFit/>
+          </a:bodyPr>
+          <a:lstStyle/>
+          <a:p>
+            <a:pPr>
+              <a:lnSpc>
+                <a:spcPct val="100000"/>
+              </a:lnSpc>
+            </a:pPr>
+            <a:r>
+              <a:rPr sz="1700" b="0" i="0">
+                <a:solidFill>
+                  <a:srgbClr val="2A2929"/>
+                </a:solidFill>
+                <a:latin typeface="Roboto"/>
+              </a:rPr>
+              <a:t>Three passes over one architecture: security, reliability, cost.</a:t>
+            </a:r>
+          </a:p>
+        </p:txBody>
+      </p:sp>
+      <p:sp>
+        <p:nvSpPr>
+          <p:cNvPr id="7" name="Rectangle 6"/>
+          <p:cNvSpPr/>
+          <p:nvPr/>
+        </p:nvSpPr>
+        <p:spPr>
+          <a:xfrm>
+            <a:off x="640080" y="2916936"/>
+            <a:ext cx="10927080" cy="841248"/>
+          </a:xfrm>
+          <a:prstGeom prst="rect">
+            <a:avLst/>
+          </a:prstGeom>
+          <a:solidFill>
+            <a:srgbClr val="FFFFFF"/>
+          </a:solidFill>
+          <a:ln w="12700">
+            <a:solidFill>
+              <a:srgbClr val="CCCCCC"/>
+            </a:solidFill>
+          </a:ln>
+          <a:effectLst/>
+        </p:spPr>
+        <p:style>
+          <a:lnRef idx="1">
+            <a:schemeClr val="accent1"/>
+          </a:lnRef>
+          <a:fillRef idx="3">
+            <a:schemeClr val="accent1"/>
+          </a:fillRef>
+          <a:effectRef idx="2">
+            <a:schemeClr val="accent1"/>
+          </a:effectRef>
+          <a:fontRef idx="minor">
+            <a:schemeClr val="lt1"/>
+          </a:fontRef>
+        </p:style>
+        <p:txBody>
+          <a:bodyPr rtlCol="0" anchor="ctr"/>
+          <a:lstStyle/>
+          <a:p>
+            <a:pPr algn="ctr"/>
+          </a:p>
+        </p:txBody>
+      </p:sp>
+      <p:sp>
+        <p:nvSpPr>
+          <p:cNvPr id="8" name="Rectangle 7"/>
+          <p:cNvSpPr/>
+          <p:nvPr/>
+        </p:nvSpPr>
+        <p:spPr>
+          <a:xfrm>
+            <a:off x="640080" y="2916936"/>
+            <a:ext cx="109728" cy="841248"/>
+          </a:xfrm>
+          <a:prstGeom prst="rect">
+            <a:avLst/>
+          </a:prstGeom>
+          <a:solidFill>
+            <a:srgbClr val="004488"/>
+          </a:solidFill>
+          <a:ln>
+            <a:noFill/>
+          </a:ln>
+          <a:effectLst/>
+        </p:spPr>
+        <p:style>
+          <a:lnRef idx="1">
+            <a:schemeClr val="accent1"/>
+          </a:lnRef>
+          <a:fillRef idx="3">
+            <a:schemeClr val="accent1"/>
+          </a:fillRef>
+          <a:effectRef idx="2">
+            <a:schemeClr val="accent1"/>
+          </a:effectRef>
+          <a:fontRef idx="minor">
+            <a:schemeClr val="lt1"/>
+          </a:fontRef>
+        </p:style>
+        <p:txBody>
+          <a:bodyPr rtlCol="0" anchor="ctr"/>
+          <a:lstStyle/>
+          <a:p>
+            <a:pPr algn="ctr"/>
+          </a:p>
+        </p:txBody>
+      </p:sp>
+      <p:sp>
+        <p:nvSpPr>
+          <p:cNvPr id="9" name="TextBox 8"/>
+          <p:cNvSpPr txBox="1"/>
+          <p:nvPr/>
+        </p:nvSpPr>
+        <p:spPr>
+          <a:xfrm>
+            <a:off x="960120" y="2916936"/>
+            <a:ext cx="10424160" cy="841248"/>
+          </a:xfrm>
+          <a:prstGeom prst="rect">
+            <a:avLst/>
+          </a:prstGeom>
+          <a:noFill/>
+        </p:spPr>
+        <p:txBody>
+          <a:bodyPr wrap="square" anchor="ctr" lIns="0" rIns="0" tIns="0" bIns="0">
+            <a:spAutoFit/>
+          </a:bodyPr>
+          <a:lstStyle/>
+          <a:p>
+            <a:pPr>
+              <a:lnSpc>
+                <a:spcPct val="100000"/>
+              </a:lnSpc>
+            </a:pPr>
+            <a:r>
+              <a:rPr sz="1700" b="0" i="0">
+                <a:solidFill>
+                  <a:srgbClr val="2A2929"/>
+                </a:solidFill>
+                <a:latin typeface="Roboto"/>
+              </a:rPr>
+              <a:t>The strongest design move can be a rejection, argued on cost versus benefit.</a:t>
+            </a:r>
+          </a:p>
+        </p:txBody>
+      </p:sp>
+      <p:sp>
+        <p:nvSpPr>
+          <p:cNvPr id="10" name="Rectangle 9"/>
+          <p:cNvSpPr/>
+          <p:nvPr/>
+        </p:nvSpPr>
+        <p:spPr>
+          <a:xfrm>
+            <a:off x="640080" y="3867912"/>
+            <a:ext cx="10927080" cy="841248"/>
+          </a:xfrm>
+          <a:prstGeom prst="rect">
+            <a:avLst/>
+          </a:prstGeom>
+          <a:solidFill>
+            <a:srgbClr val="FFFFFF"/>
+          </a:solidFill>
+          <a:ln w="12700">
+            <a:solidFill>
+              <a:srgbClr val="CCCCCC"/>
+            </a:solidFill>
+          </a:ln>
+          <a:effectLst/>
+        </p:spPr>
+        <p:style>
+          <a:lnRef idx="1">
+            <a:schemeClr val="accent1"/>
+          </a:lnRef>
+          <a:fillRef idx="3">
+            <a:schemeClr val="accent1"/>
+          </a:fillRef>
+          <a:effectRef idx="2">
+            <a:schemeClr val="accent1"/>
+          </a:effectRef>
+          <a:fontRef idx="minor">
+            <a:schemeClr val="lt1"/>
+          </a:fontRef>
+        </p:style>
+        <p:txBody>
+          <a:bodyPr rtlCol="0" anchor="ctr"/>
+          <a:lstStyle/>
+          <a:p>
+            <a:pPr algn="ctr"/>
+          </a:p>
+        </p:txBody>
+      </p:sp>
+      <p:sp>
+        <p:nvSpPr>
+          <p:cNvPr id="11" name="Rectangle 10"/>
+          <p:cNvSpPr/>
+          <p:nvPr/>
+        </p:nvSpPr>
+        <p:spPr>
+          <a:xfrm>
+            <a:off x="640080" y="3867912"/>
+            <a:ext cx="109728" cy="841248"/>
+          </a:xfrm>
+          <a:prstGeom prst="rect">
+            <a:avLst/>
+          </a:prstGeom>
+          <a:solidFill>
+            <a:srgbClr val="004488"/>
+          </a:solidFill>
+          <a:ln>
+            <a:noFill/>
+          </a:ln>
+          <a:effectLst/>
+        </p:spPr>
+        <p:style>
+          <a:lnRef idx="1">
+            <a:schemeClr val="accent1"/>
+          </a:lnRef>
+          <a:fillRef idx="3">
+            <a:schemeClr val="accent1"/>
+          </a:fillRef>
+          <a:effectRef idx="2">
+            <a:schemeClr val="accent1"/>
+          </a:effectRef>
+          <a:fontRef idx="minor">
+            <a:schemeClr val="lt1"/>
+          </a:fontRef>
+        </p:style>
+        <p:txBody>
+          <a:bodyPr rtlCol="0" anchor="ctr"/>
+          <a:lstStyle/>
+          <a:p>
+            <a:pPr algn="ctr"/>
+          </a:p>
+        </p:txBody>
+      </p:sp>
+      <p:sp>
+        <p:nvSpPr>
+          <p:cNvPr id="12" name="TextBox 11"/>
+          <p:cNvSpPr txBox="1"/>
+          <p:nvPr/>
+        </p:nvSpPr>
+        <p:spPr>
+          <a:xfrm>
+            <a:off x="960120" y="3867912"/>
+            <a:ext cx="10424160" cy="841248"/>
+          </a:xfrm>
+          <a:prstGeom prst="rect">
+            <a:avLst/>
+          </a:prstGeom>
+          <a:noFill/>
+        </p:spPr>
+        <p:txBody>
+          <a:bodyPr wrap="square" anchor="ctr" lIns="0" rIns="0" tIns="0" bIns="0">
+            <a:spAutoFit/>
+          </a:bodyPr>
+          <a:lstStyle/>
+          <a:p>
+            <a:pPr>
+              <a:lnSpc>
+                <a:spcPct val="100000"/>
+              </a:lnSpc>
+            </a:pPr>
+            <a:r>
+              <a:rPr sz="1700" b="0" i="0">
+                <a:solidFill>
+                  <a:srgbClr val="2A2929"/>
+                </a:solidFill>
+                <a:latin typeface="Roboto"/>
+              </a:rPr>
+              <a:t>Monitoring designed in against the metrics you set.</a:t>
+            </a:r>
+          </a:p>
+        </p:txBody>
+      </p:sp>
+      <p:sp>
+        <p:nvSpPr>
+          <p:cNvPr id="13" name="Rectangle 12"/>
+          <p:cNvSpPr/>
+          <p:nvPr/>
+        </p:nvSpPr>
+        <p:spPr>
+          <a:xfrm>
+            <a:off x="640080" y="4818888"/>
+            <a:ext cx="10927080" cy="841248"/>
+          </a:xfrm>
+          <a:prstGeom prst="rect">
+            <a:avLst/>
+          </a:prstGeom>
+          <a:solidFill>
+            <a:srgbClr val="FFFFFF"/>
+          </a:solidFill>
+          <a:ln w="12700">
+            <a:solidFill>
+              <a:srgbClr val="CCCCCC"/>
+            </a:solidFill>
+          </a:ln>
+          <a:effectLst/>
+        </p:spPr>
+        <p:style>
+          <a:lnRef idx="1">
+            <a:schemeClr val="accent1"/>
+          </a:lnRef>
+          <a:fillRef idx="3">
+            <a:schemeClr val="accent1"/>
+          </a:fillRef>
+          <a:effectRef idx="2">
+            <a:schemeClr val="accent1"/>
+          </a:effectRef>
+          <a:fontRef idx="minor">
+            <a:schemeClr val="lt1"/>
+          </a:fontRef>
+        </p:style>
+        <p:txBody>
+          <a:bodyPr rtlCol="0" anchor="ctr"/>
+          <a:lstStyle/>
+          <a:p>
+            <a:pPr algn="ctr"/>
+          </a:p>
+        </p:txBody>
+      </p:sp>
+      <p:sp>
+        <p:nvSpPr>
+          <p:cNvPr id="14" name="Rectangle 13"/>
+          <p:cNvSpPr/>
+          <p:nvPr/>
+        </p:nvSpPr>
+        <p:spPr>
+          <a:xfrm>
+            <a:off x="640080" y="4818888"/>
+            <a:ext cx="109728" cy="841248"/>
+          </a:xfrm>
+          <a:prstGeom prst="rect">
+            <a:avLst/>
+          </a:prstGeom>
+          <a:solidFill>
+            <a:srgbClr val="004488"/>
+          </a:solidFill>
+          <a:ln>
+            <a:noFill/>
+          </a:ln>
+          <a:effectLst/>
+        </p:spPr>
+        <p:style>
+          <a:lnRef idx="1">
+            <a:schemeClr val="accent1"/>
+          </a:lnRef>
+          <a:fillRef idx="3">
+            <a:schemeClr val="accent1"/>
+          </a:fillRef>
+          <a:effectRef idx="2">
+            <a:schemeClr val="accent1"/>
+          </a:effectRef>
+          <a:fontRef idx="minor">
+            <a:schemeClr val="lt1"/>
+          </a:fontRef>
+        </p:style>
+        <p:txBody>
+          <a:bodyPr rtlCol="0" anchor="ctr"/>
+          <a:lstStyle/>
+          <a:p>
+            <a:pPr algn="ctr"/>
+          </a:p>
+        </p:txBody>
+      </p:sp>
+      <p:sp>
+        <p:nvSpPr>
+          <p:cNvPr id="15" name="TextBox 14"/>
+          <p:cNvSpPr txBox="1"/>
+          <p:nvPr/>
+        </p:nvSpPr>
+        <p:spPr>
+          <a:xfrm>
+            <a:off x="960120" y="4818888"/>
+            <a:ext cx="10424160" cy="841248"/>
+          </a:xfrm>
+          <a:prstGeom prst="rect">
+            <a:avLst/>
+          </a:prstGeom>
+          <a:noFill/>
+        </p:spPr>
+        <p:txBody>
+          <a:bodyPr wrap="square" anchor="ctr" lIns="0" rIns="0" tIns="0" bIns="0">
+            <a:spAutoFit/>
+          </a:bodyPr>
+          <a:lstStyle/>
+          <a:p>
+            <a:pPr>
+              <a:lnSpc>
+                <a:spcPct val="100000"/>
+              </a:lnSpc>
+            </a:pPr>
+            <a:r>
+              <a:rPr sz="1700" b="0" i="0">
+                <a:solidFill>
+                  <a:srgbClr val="2A2929"/>
+                </a:solidFill>
+                <a:latin typeface="Roboto"/>
+              </a:rPr>
+              <a:t>Every improvement earns its place against the run-cost baseline.</a:t>
+            </a:r>
+          </a:p>
+        </p:txBody>
+      </p:sp>
+      <p:sp>
+        <p:nvSpPr>
+          <p:cNvPr id="16" name="Rectangle 15"/>
+          <p:cNvSpPr/>
+          <p:nvPr/>
+        </p:nvSpPr>
+        <p:spPr>
+          <a:xfrm>
+            <a:off x="0" y="6565392"/>
+            <a:ext cx="12191695" cy="38100"/>
+          </a:xfrm>
+          <a:prstGeom prst="rect">
+            <a:avLst/>
+          </a:prstGeom>
+          <a:solidFill>
+            <a:srgbClr val="004488"/>
+          </a:solidFill>
+          <a:ln>
+            <a:noFill/>
+          </a:ln>
+          <a:effectLst/>
+        </p:spPr>
+        <p:style>
+          <a:lnRef idx="1">
+            <a:schemeClr val="accent1"/>
+          </a:lnRef>
+          <a:fillRef idx="3">
+            <a:schemeClr val="accent1"/>
+          </a:fillRef>
+          <a:effectRef idx="2">
+            <a:schemeClr val="accent1"/>
+          </a:effectRef>
+          <a:fontRef idx="minor">
+            <a:schemeClr val="lt1"/>
+          </a:fontRef>
+        </p:style>
+        <p:txBody>
+          <a:bodyPr rtlCol="0" anchor="ctr"/>
+          <a:lstStyle/>
+          <a:p>
+            <a:pPr algn="ctr"/>
+          </a:p>
+        </p:txBody>
+      </p:sp>
+      <p:sp>
+        <p:nvSpPr>
+          <p:cNvPr id="17" name="TextBox 16"/>
+          <p:cNvSpPr txBox="1"/>
+          <p:nvPr/>
+        </p:nvSpPr>
+        <p:spPr>
+          <a:xfrm>
+            <a:off x="502920" y="6400800"/>
+            <a:ext cx="5486400" cy="320040"/>
+          </a:xfrm>
+          <a:prstGeom prst="rect">
+            <a:avLst/>
+          </a:prstGeom>
+          <a:noFill/>
+        </p:spPr>
+        <p:txBody>
+          <a:bodyPr wrap="square" anchor="t" lIns="0" rIns="0" tIns="0" bIns="0">
+            <a:spAutoFit/>
+          </a:bodyPr>
+          <a:lstStyle/>
+          <a:p>
+            <a:r>
+              <a:rPr sz="1100" b="1" i="0">
+                <a:solidFill>
+                  <a:srgbClr val="2A2929"/>
+                </a:solidFill>
+                <a:latin typeface="Roboto"/>
+              </a:rPr>
+              <a:t>Kangan </a:t>
+            </a:r>
+            <a:r>
+              <a:rPr sz="1100" b="1" i="0">
+                <a:solidFill>
+                  <a:srgbClr val="D68E10"/>
+                </a:solidFill>
+                <a:latin typeface="Roboto"/>
+              </a:rPr>
+              <a:t>Institute</a:t>
+            </a:r>
+          </a:p>
+        </p:txBody>
+      </p:sp>
+      <p:sp>
+        <p:nvSpPr>
+          <p:cNvPr id="18" name="TextBox 17"/>
+          <p:cNvSpPr txBox="1"/>
+          <p:nvPr/>
+        </p:nvSpPr>
+        <p:spPr>
+          <a:xfrm>
+            <a:off x="10515600" y="6400800"/>
+            <a:ext cx="1188720" cy="320040"/>
+          </a:xfrm>
+          <a:prstGeom prst="rect">
+            <a:avLst/>
+          </a:prstGeom>
+          <a:noFill/>
+        </p:spPr>
+        <p:txBody>
+          <a:bodyPr wrap="square" anchor="t" lIns="0" rIns="0" tIns="0" bIns="0">
+            <a:spAutoFit/>
+          </a:bodyPr>
+          <a:lstStyle/>
+          <a:p>
+            <a:pPr algn="r"/>
+            <a:r>
+              <a:rPr sz="1100" b="0" i="0">
+                <a:solidFill>
+                  <a:srgbClr val="7A7A7A"/>
+                </a:solidFill>
+                <a:latin typeface="Roboto"/>
+              </a:rPr>
+              <a:t>18</a:t>
+            </a:r>
+          </a:p>
+        </p:txBody>
+      </p:sp>
+    </p:spTree>
+  </p:cSld>
+  <p:clrMapOvr>
+    <a:masterClrMapping/>
+  </p:clrMapOvr>
+</p:sld>
+</file>
+
+<file path=ppt/slides/slide24.xml><?xml version="1.0" encoding="utf-8"?>
+<p:sld xmlns:a="http://schemas.openxmlformats.org/drawingml/2006/main" xmlns:p="http://schemas.openxmlformats.org/presentationml/2006/main" xmlns:r="http://schemas.openxmlformats.org/officeDocument/2006/relationships">
+  <p:cSld>
+    <p:bg>
+      <p:bgPr>
+        <a:solidFill>
+          <a:srgbClr val="2A2929"/>
+        </a:solidFill>
+        <a:effectLst/>
+      </p:bgPr>
+    </p:bg>
+    <p:spTree>
+      <p:nvGrpSpPr>
+        <p:cNvPr id="1" name=""/>
+        <p:cNvGrpSpPr/>
+        <p:nvPr/>
+      </p:nvGrpSpPr>
+      <p:grpSpPr/>
+      <p:sp>
+        <p:nvSpPr>
+          <p:cNvPr id="2" name="Rectangle 1"/>
+          <p:cNvSpPr/>
+          <p:nvPr/>
+        </p:nvSpPr>
+        <p:spPr>
+          <a:xfrm>
+            <a:off x="0" y="0"/>
+            <a:ext cx="411480" cy="6858000"/>
+          </a:xfrm>
+          <a:prstGeom prst="rect">
+            <a:avLst/>
+          </a:prstGeom>
+          <a:solidFill>
+            <a:srgbClr val="EDAB0C"/>
+          </a:solidFill>
+          <a:ln>
+            <a:noFill/>
+          </a:ln>
+          <a:effectLst/>
+        </p:spPr>
+        <p:style>
+          <a:lnRef idx="1">
+            <a:schemeClr val="accent1"/>
+          </a:lnRef>
+          <a:fillRef idx="3">
+            <a:schemeClr val="accent1"/>
+          </a:fillRef>
+          <a:effectRef idx="2">
+            <a:schemeClr val="accent1"/>
+          </a:effectRef>
+          <a:fontRef idx="minor">
+            <a:schemeClr val="lt1"/>
+          </a:fontRef>
+        </p:style>
+        <p:txBody>
+          <a:bodyPr rtlCol="0" anchor="ctr"/>
+          <a:lstStyle/>
+          <a:p>
+            <a:pPr algn="ctr"/>
+          </a:p>
+        </p:txBody>
+      </p:sp>
+      <p:sp>
+        <p:nvSpPr>
+          <p:cNvPr id="3" name="TextBox 2"/>
+          <p:cNvSpPr txBox="1"/>
+          <p:nvPr/>
+        </p:nvSpPr>
+        <p:spPr>
+          <a:xfrm>
+            <a:off x="914400" y="1463040"/>
+            <a:ext cx="10515600" cy="4023360"/>
+          </a:xfrm>
+          <a:prstGeom prst="rect">
+            <a:avLst/>
+          </a:prstGeom>
+          <a:noFill/>
+        </p:spPr>
+        <p:txBody>
+          <a:bodyPr wrap="square" anchor="t" lIns="0" rIns="0" tIns="0" bIns="0">
+            <a:spAutoFit/>
+          </a:bodyPr>
+          <a:lstStyle/>
+          <a:p>
+            <a:r>
+              <a:rPr sz="4000" b="1" i="0">
+                <a:solidFill>
+                  <a:srgbClr val="FFFFFF"/>
+                </a:solidFill>
+                <a:latin typeface="Roboto"/>
+              </a:rPr>
+              <a:t>Next: Topic 4 — draw it, document it, present it</a:t>
+            </a:r>
+          </a:p>
+          <a:p>
+            <a:pPr>
+              <a:lnSpc>
+                <a:spcPct val="105000"/>
+              </a:lnSpc>
+              <a:spcBef>
+                <a:spcPts val="1200"/>
+              </a:spcBef>
+            </a:pPr>
+            <a:r>
+              <a:rPr sz="1900" b="0" i="0">
+                <a:solidFill>
+                  <a:srgbClr val="E8E8E8"/>
+                </a:solidFill>
+                <a:latin typeface="Roboto Light"/>
+              </a:rPr>
+              <a:t>The design is complete: analysed, targeted, improved and justified.</a:t>
+            </a:r>
+          </a:p>
+          <a:p>
+            <a:pPr>
+              <a:lnSpc>
+                <a:spcPct val="105000"/>
+              </a:lnSpc>
+              <a:spcBef>
+                <a:spcPts val="1200"/>
+              </a:spcBef>
+            </a:pPr>
+            <a:r>
+              <a:rPr sz="1900" b="0" i="0">
+                <a:solidFill>
+                  <a:srgbClr val="E8E8E8"/>
+                </a:solidFill>
+                <a:latin typeface="Roboto Light"/>
+              </a:rPr>
+              <a:t>Next you draw the improved architecture, document the proposal, and present it for sign-off.</a:t>
             </a:r>
           </a:p>
         </p:txBody>
@@ -7431,7 +11467,7 @@
                 </a:solidFill>
                 <a:latin typeface="Roboto"/>
               </a:rPr>
-              <a:t>The four resource components</a:t>
+              <a:t>The security improvements</a:t>
             </a:r>
           </a:p>
           <a:p>
@@ -7447,7 +11483,7 @@
                 </a:solidFill>
                 <a:latin typeface="Roboto Light"/>
               </a:rPr>
-              <a:t>select and improve each tier to the business needs</a:t>
+              <a:t>the improvement stays secure</a:t>
             </a:r>
           </a:p>
         </p:txBody>
@@ -7629,7 +11665,7 @@
                 </a:solidFill>
                 <a:latin typeface="Roboto"/>
               </a:rPr>
-              <a:t>Scalability = elastic capacity-on-demand</a:t>
+              <a:t>Security layers, and improving them</a:t>
             </a:r>
           </a:p>
         </p:txBody>
@@ -7727,7 +11763,7 @@
                 </a:solidFill>
                 <a:latin typeface="Roboto"/>
               </a:rPr>
-              <a:t>Elastic capacity: add resources as load rises, release them as load falls — pay for what you use.</a:t>
+              <a:t>The layers: network isolation, security groups, least-privilege access, and encryption at rest and in transit as the baseline.</a:t>
             </a:r>
           </a:p>
           <a:p>
@@ -7758,7 +11794,7 @@
                 </a:solidFill>
                 <a:latin typeface="Roboto"/>
               </a:rPr>
-              <a:t>The test of a scalable design is a demonstration: it scales on demand (proven at AT3), not a load forecast on paper.</a:t>
+              <a:t>Review each layer against the goals and design the improvements — tightening what exists before adding anything new.</a:t>
             </a:r>
           </a:p>
           <a:p>
@@ -7789,7 +11825,7 @@
                 </a:solidFill>
                 <a:latin typeface="Roboto"/>
               </a:rPr>
-              <a:t>Over-provisioning fixed spare capacity is not scalability — it is gold-plating; right-size instead.</a:t>
+              <a:t>Every later change must inherit these layers, not bypass them — a DR copy of financial data carries the same protections as the primary.</a:t>
             </a:r>
           </a:p>
         </p:txBody>
@@ -7944,48 +11980,14 @@
       <p:grpSpPr/>
       <p:sp>
         <p:nvSpPr>
-          <p:cNvPr id="2" name="TextBox 1"/>
-          <p:cNvSpPr txBox="1"/>
-          <p:nvPr/>
-        </p:nvSpPr>
-        <p:spPr>
-          <a:xfrm>
-            <a:off x="640080" y="457200"/>
-            <a:ext cx="10881360" cy="960120"/>
-          </a:xfrm>
-          <a:prstGeom prst="rect">
-            <a:avLst/>
-          </a:prstGeom>
-          <a:noFill/>
-        </p:spPr>
-        <p:txBody>
-          <a:bodyPr wrap="square" anchor="t" lIns="0" rIns="0" tIns="0" bIns="0">
-            <a:spAutoFit/>
-          </a:bodyPr>
-          <a:lstStyle/>
-          <a:p>
-            <a:r>
-              <a:rPr sz="2800" b="1" i="0">
-                <a:solidFill>
-                  <a:srgbClr val="2A2929"/>
-                </a:solidFill>
-                <a:latin typeface="Roboto"/>
-              </a:rPr>
-              <a:t>The four resource components</a:t>
-            </a:r>
-          </a:p>
-        </p:txBody>
-      </p:sp>
-      <p:sp>
-        <p:nvSpPr>
-          <p:cNvPr id="3" name="Rectangle 2"/>
+          <p:cNvPr id="2" name="Rectangle 1"/>
           <p:cNvSpPr/>
           <p:nvPr/>
         </p:nvSpPr>
         <p:spPr>
           <a:xfrm>
-            <a:off x="658368" y="1371600"/>
-            <a:ext cx="1463040" cy="50800"/>
+            <a:off x="0" y="0"/>
+            <a:ext cx="12191695" cy="1234440"/>
           </a:xfrm>
           <a:prstGeom prst="rect">
             <a:avLst/>
@@ -8022,14 +12024,101 @@
       </p:sp>
       <p:sp>
         <p:nvSpPr>
+          <p:cNvPr id="3" name="Rounded Rectangle 2"/>
+          <p:cNvSpPr/>
+          <p:nvPr/>
+        </p:nvSpPr>
+        <p:spPr>
+          <a:xfrm>
+            <a:off x="640080" y="384048"/>
+            <a:ext cx="1691640" cy="457200"/>
+          </a:xfrm>
+          <a:prstGeom prst="roundRect">
+            <a:avLst/>
+          </a:prstGeom>
+          <a:solidFill>
+            <a:srgbClr val="2A2929"/>
+          </a:solidFill>
+          <a:ln>
+            <a:noFill/>
+          </a:ln>
+          <a:effectLst/>
+        </p:spPr>
+        <p:style>
+          <a:lnRef idx="1">
+            <a:schemeClr val="accent1"/>
+          </a:lnRef>
+          <a:fillRef idx="3">
+            <a:schemeClr val="accent1"/>
+          </a:fillRef>
+          <a:effectRef idx="2">
+            <a:schemeClr val="accent1"/>
+          </a:effectRef>
+          <a:fontRef idx="minor">
+            <a:schemeClr val="lt1"/>
+          </a:fontRef>
+        </p:style>
+        <p:txBody>
+          <a:bodyPr rtlCol="0" anchor="ctr"/>
+          <a:lstStyle/>
+          <a:p>
+            <a:pPr algn="ctr"/>
+            <a:r>
+              <a:rPr sz="1400" b="1" i="0">
+                <a:solidFill>
+                  <a:srgbClr val="FBB900"/>
+                </a:solidFill>
+                <a:latin typeface="Roboto"/>
+              </a:rPr>
+              <a:t>ACTIVITY</a:t>
+            </a:r>
+          </a:p>
+        </p:txBody>
+      </p:sp>
+      <p:sp>
+        <p:nvSpPr>
           <p:cNvPr id="4" name="TextBox 3"/>
           <p:cNvSpPr txBox="1"/>
           <p:nvPr/>
         </p:nvSpPr>
         <p:spPr>
           <a:xfrm>
-            <a:off x="658368" y="1737360"/>
-            <a:ext cx="5486400" cy="4297680"/>
+            <a:off x="2560320" y="310896"/>
+            <a:ext cx="8961120" cy="685800"/>
+          </a:xfrm>
+          <a:prstGeom prst="rect">
+            <a:avLst/>
+          </a:prstGeom>
+          <a:noFill/>
+        </p:spPr>
+        <p:txBody>
+          <a:bodyPr wrap="square" anchor="ctr" lIns="0" rIns="0" tIns="0" bIns="0">
+            <a:spAutoFit/>
+          </a:bodyPr>
+          <a:lstStyle/>
+          <a:p>
+            <a:r>
+              <a:rPr sz="2600" b="1" i="0">
+                <a:solidFill>
+                  <a:srgbClr val="FFFFFF"/>
+                </a:solidFill>
+                <a:latin typeface="Roboto"/>
+              </a:rPr>
+              <a:t>Design the security improvements</a:t>
+            </a:r>
+          </a:p>
+        </p:txBody>
+      </p:sp>
+      <p:sp>
+        <p:nvSpPr>
+          <p:cNvPr id="5" name="TextBox 4"/>
+          <p:cNvSpPr txBox="1"/>
+          <p:nvPr/>
+        </p:nvSpPr>
+        <p:spPr>
+          <a:xfrm>
+            <a:off x="658368" y="1554480"/>
+            <a:ext cx="10881360" cy="4297680"/>
           </a:xfrm>
           <a:prstGeom prst="rect">
             <a:avLst/>
@@ -8069,7 +12158,7 @@
                 </a:solidFill>
                 <a:latin typeface="Roboto"/>
               </a:rPr>
-              <a:t>Split the design across four tiers: network, compute, database, storage.</a:t>
+              <a:t>Workbook — task 10.</a:t>
             </a:r>
           </a:p>
           <a:p>
@@ -8100,69 +12189,94 @@
                 </a:solidFill>
                 <a:latin typeface="Roboto"/>
               </a:rPr>
-              <a:t>Compute and storage are the tiers that scale elastically on demand; network and database are selected and configured to support that scale.</a:t>
-            </a:r>
-          </a:p>
-          <a:p>
-            <a:pPr marL="0" indent="0">
-              <a:lnSpc>
-                <a:spcPct val="105000"/>
-              </a:lnSpc>
-              <a:spcBef>
-                <a:spcPts val="0"/>
-              </a:spcBef>
-              <a:spcAft>
-                <a:spcPts val="1000"/>
-              </a:spcAft>
-            </a:pPr>
-            <a:r>
-              <a:rPr sz="1700" b="1" i="0">
-                <a:solidFill>
-                  <a:srgbClr val="EDAB0C"/>
-                </a:solidFill>
-                <a:latin typeface="Roboto"/>
-              </a:rPr>
-              <a:t>■  </a:t>
-            </a:r>
-            <a:r>
-              <a:rPr sz="1700" b="0" i="0">
+              <a:t>Review the practice engagement's security layers and design the improvements, each tied to a goal.</a:t>
+            </a:r>
+          </a:p>
+        </p:txBody>
+      </p:sp>
+      <p:sp>
+        <p:nvSpPr>
+          <p:cNvPr id="6" name="Rounded Rectangle 5"/>
+          <p:cNvSpPr/>
+          <p:nvPr/>
+        </p:nvSpPr>
+        <p:spPr>
+          <a:xfrm>
+            <a:off x="640080" y="5897880"/>
+            <a:ext cx="4023360" cy="457200"/>
+          </a:xfrm>
+          <a:prstGeom prst="roundRect">
+            <a:avLst/>
+          </a:prstGeom>
+          <a:solidFill>
+            <a:srgbClr val="F9F9F9"/>
+          </a:solidFill>
+          <a:ln w="12700">
+            <a:solidFill>
+              <a:srgbClr val="CCCCCC"/>
+            </a:solidFill>
+          </a:ln>
+          <a:effectLst/>
+        </p:spPr>
+        <p:style>
+          <a:lnRef idx="1">
+            <a:schemeClr val="accent1"/>
+          </a:lnRef>
+          <a:fillRef idx="3">
+            <a:schemeClr val="accent1"/>
+          </a:fillRef>
+          <a:effectRef idx="2">
+            <a:schemeClr val="accent1"/>
+          </a:effectRef>
+          <a:fontRef idx="minor">
+            <a:schemeClr val="lt1"/>
+          </a:fontRef>
+        </p:style>
+        <p:txBody>
+          <a:bodyPr rtlCol="0" anchor="ctr"/>
+          <a:lstStyle/>
+          <a:p>
+            <a:pPr algn="ctr"/>
+          </a:p>
+        </p:txBody>
+      </p:sp>
+      <p:sp>
+        <p:nvSpPr>
+          <p:cNvPr id="7" name="TextBox 6"/>
+          <p:cNvSpPr txBox="1"/>
+          <p:nvPr/>
+        </p:nvSpPr>
+        <p:spPr>
+          <a:xfrm>
+            <a:off x="822960" y="5943600"/>
+            <a:ext cx="3657600" cy="365760"/>
+          </a:xfrm>
+          <a:prstGeom prst="rect">
+            <a:avLst/>
+          </a:prstGeom>
+          <a:noFill/>
+        </p:spPr>
+        <p:txBody>
+          <a:bodyPr wrap="square" anchor="ctr" lIns="0" rIns="0" tIns="0" bIns="0">
+            <a:spAutoFit/>
+          </a:bodyPr>
+          <a:lstStyle/>
+          <a:p>
+            <a:r>
+              <a:rPr sz="1500" b="1" i="0">
                 <a:solidFill>
                   <a:srgbClr val="2A2929"/>
                 </a:solidFill>
                 <a:latin typeface="Roboto"/>
               </a:rPr>
-              <a:t>These are the same four units the AT2 team later divides the IaC write by — a clean seam from design to build.</a:t>
-            </a:r>
-          </a:p>
-        </p:txBody>
-      </p:sp>
-      <p:pic>
-        <p:nvPicPr>
-          <p:cNvPr id="5" name="Picture 4" descr="four-components.png"/>
-          <p:cNvPicPr>
-            <a:picLocks noChangeAspect="1"/>
-          </p:cNvPicPr>
-          <p:nvPr/>
-        </p:nvPicPr>
-        <p:blipFill>
-          <a:blip r:embed="rId2"/>
-          <a:stretch>
-            <a:fillRect/>
-          </a:stretch>
-        </p:blipFill>
-        <p:spPr>
-          <a:xfrm>
-            <a:off x="6400800" y="3131820"/>
-            <a:ext cx="5120640" cy="1325880"/>
-          </a:xfrm>
-          <a:prstGeom prst="rect">
-            <a:avLst/>
-          </a:prstGeom>
-        </p:spPr>
-      </p:pic>
-      <p:sp>
-        <p:nvSpPr>
-          <p:cNvPr id="6" name="Rectangle 5"/>
+              <a:t>⏱  ~25 min</a:t>
+            </a:r>
+          </a:p>
+        </p:txBody>
+      </p:sp>
+      <p:sp>
+        <p:nvSpPr>
+          <p:cNvPr id="8" name="Rectangle 7"/>
           <p:cNvSpPr/>
           <p:nvPr/>
         </p:nvSpPr>
@@ -8206,7 +12320,7 @@
       </p:sp>
       <p:sp>
         <p:nvSpPr>
-          <p:cNvPr id="7" name="TextBox 6"/>
+          <p:cNvPr id="9" name="TextBox 8"/>
           <p:cNvSpPr txBox="1"/>
           <p:nvPr/>
         </p:nvSpPr>
@@ -8249,7 +12363,7 @@
       </p:sp>
       <p:sp>
         <p:nvSpPr>
-          <p:cNvPr id="8" name="TextBox 7"/>
+          <p:cNvPr id="10" name="TextBox 9"/>
           <p:cNvSpPr txBox="1"/>
           <p:nvPr/>
         </p:nvSpPr>
@@ -8296,7 +12410,7 @@
     <p:bg>
       <p:bgPr>
         <a:solidFill>
-          <a:srgbClr val="FFFFFF"/>
+          <a:srgbClr val="F9F9F9"/>
         </a:solidFill>
         <a:effectLst/>
       </p:bgPr>
@@ -8316,8 +12430,8 @@
         </p:nvSpPr>
         <p:spPr>
           <a:xfrm>
-            <a:off x="640080" y="457200"/>
-            <a:ext cx="10881360" cy="960120"/>
+            <a:off x="640080" y="548640"/>
+            <a:ext cx="10881360" cy="1097280"/>
           </a:xfrm>
           <a:prstGeom prst="rect">
             <a:avLst/>
@@ -8331,13 +12445,29 @@
           <a:lstStyle/>
           <a:p>
             <a:r>
-              <a:rPr sz="2800" b="1" i="0">
+              <a:rPr sz="3200" b="1" i="0">
                 <a:solidFill>
                   <a:srgbClr val="2A2929"/>
                 </a:solidFill>
                 <a:latin typeface="Roboto"/>
               </a:rPr>
-              <a:t>Selecting and improving each tier</a:t>
+              <a:t>Key takeaways</a:t>
+            </a:r>
+          </a:p>
+          <a:p>
+            <a:pPr>
+              <a:spcBef>
+                <a:spcPts val="200"/>
+              </a:spcBef>
+            </a:pPr>
+            <a:r>
+              <a:rPr sz="1800" b="1" i="0">
+                <a:solidFill>
+                  <a:srgbClr val="92268F"/>
+                </a:solidFill>
+                <a:latin typeface="Roboto"/>
+              </a:rPr>
+              <a:t>Section 1 · Security</a:t>
             </a:r>
           </a:p>
         </p:txBody>
@@ -8350,7 +12480,7 @@
         </p:nvSpPr>
         <p:spPr>
           <a:xfrm>
-            <a:off x="658368" y="1371600"/>
+            <a:off x="658368" y="1600200"/>
             <a:ext cx="1463040" cy="50800"/>
           </a:xfrm>
           <a:prstGeom prst="rect">
@@ -8388,148 +12518,47 @@
       </p:sp>
       <p:sp>
         <p:nvSpPr>
-          <p:cNvPr id="4" name="TextBox 3"/>
-          <p:cNvSpPr txBox="1"/>
-          <p:nvPr/>
-        </p:nvSpPr>
-        <p:spPr>
-          <a:xfrm>
-            <a:off x="658368" y="1691640"/>
-            <a:ext cx="10881360" cy="4480560"/>
-          </a:xfrm>
-          <a:prstGeom prst="rect">
-            <a:avLst/>
-          </a:prstGeom>
-          <a:noFill/>
-        </p:spPr>
-        <p:txBody>
-          <a:bodyPr wrap="square" anchor="ctr" lIns="0" rIns="0" tIns="0" bIns="0">
-            <a:spAutoFit/>
-          </a:bodyPr>
-          <a:lstStyle/>
-          <a:p>
-            <a:pPr marL="0" indent="0">
-              <a:lnSpc>
-                <a:spcPct val="105000"/>
-              </a:lnSpc>
-              <a:spcBef>
-                <a:spcPts val="0"/>
-              </a:spcBef>
-              <a:spcAft>
-                <a:spcPts val="1000"/>
-              </a:spcAft>
-            </a:pPr>
-            <a:r>
-              <a:rPr sz="2400" b="1" i="0">
-                <a:solidFill>
-                  <a:srgbClr val="EDAB0C"/>
-                </a:solidFill>
-                <a:latin typeface="Roboto"/>
-              </a:rPr>
-              <a:t>■  </a:t>
-            </a:r>
-            <a:r>
-              <a:rPr sz="2400" b="0" i="0">
-                <a:solidFill>
-                  <a:srgbClr val="2A2929"/>
-                </a:solidFill>
-                <a:latin typeface="Roboto"/>
-              </a:rPr>
-              <a:t>Network: right-size the path and load-spreading so the tier below can scale out behind it.</a:t>
-            </a:r>
-          </a:p>
-          <a:p>
-            <a:pPr marL="0" indent="0">
-              <a:lnSpc>
-                <a:spcPct val="105000"/>
-              </a:lnSpc>
-              <a:spcBef>
-                <a:spcPts val="0"/>
-              </a:spcBef>
-              <a:spcAft>
-                <a:spcPts val="1000"/>
-              </a:spcAft>
-            </a:pPr>
-            <a:r>
-              <a:rPr sz="2400" b="1" i="0">
-                <a:solidFill>
-                  <a:srgbClr val="EDAB0C"/>
-                </a:solidFill>
-                <a:latin typeface="Roboto"/>
-              </a:rPr>
-              <a:t>■  </a:t>
-            </a:r>
-            <a:r>
-              <a:rPr sz="2400" b="0" i="0">
-                <a:solidFill>
-                  <a:srgbClr val="2A2929"/>
-                </a:solidFill>
-                <a:latin typeface="Roboto"/>
-              </a:rPr>
-              <a:t>Compute: move from fixed capacity to a pool that grows and shrinks on demand (auto scaling).</a:t>
-            </a:r>
-          </a:p>
-          <a:p>
-            <a:pPr marL="0" indent="0">
-              <a:lnSpc>
-                <a:spcPct val="105000"/>
-              </a:lnSpc>
-              <a:spcBef>
-                <a:spcPts val="0"/>
-              </a:spcBef>
-              <a:spcAft>
-                <a:spcPts val="1000"/>
-              </a:spcAft>
-            </a:pPr>
-            <a:r>
-              <a:rPr sz="2400" b="1" i="0">
-                <a:solidFill>
-                  <a:srgbClr val="EDAB0C"/>
-                </a:solidFill>
-                <a:latin typeface="Roboto"/>
-              </a:rPr>
-              <a:t>■  </a:t>
-            </a:r>
-            <a:r>
-              <a:rPr sz="2400" b="0" i="0">
-                <a:solidFill>
-                  <a:srgbClr val="2A2929"/>
-                </a:solidFill>
-                <a:latin typeface="Roboto"/>
-              </a:rPr>
-              <a:t>Database: select a managed data service that scales reads without a rebuild; keep Ledgerline's accounting data consistent.</a:t>
-            </a:r>
-          </a:p>
-          <a:p>
-            <a:pPr marL="0" indent="0">
-              <a:lnSpc>
-                <a:spcPct val="105000"/>
-              </a:lnSpc>
-              <a:spcBef>
-                <a:spcPts val="0"/>
-              </a:spcBef>
-              <a:spcAft>
-                <a:spcPts val="1000"/>
-              </a:spcAft>
-            </a:pPr>
-            <a:r>
-              <a:rPr sz="2400" b="1" i="0">
-                <a:solidFill>
-                  <a:srgbClr val="EDAB0C"/>
-                </a:solidFill>
-                <a:latin typeface="Roboto"/>
-              </a:rPr>
-              <a:t>■  </a:t>
-            </a:r>
-            <a:r>
-              <a:rPr sz="2400" b="0" i="0">
-                <a:solidFill>
-                  <a:srgbClr val="2A2929"/>
-                </a:solidFill>
-                <a:latin typeface="Roboto"/>
-              </a:rPr>
-              <a:t>Storage: select storage that grows on demand rather than a fixed-size volume.</a:t>
-            </a:r>
+          <p:cNvPr id="4" name="Rectangle 3"/>
+          <p:cNvSpPr/>
+          <p:nvPr/>
+        </p:nvSpPr>
+        <p:spPr>
+          <a:xfrm>
+            <a:off x="640080" y="1965960"/>
+            <a:ext cx="10927080" cy="841248"/>
+          </a:xfrm>
+          <a:prstGeom prst="rect">
+            <a:avLst/>
+          </a:prstGeom>
+          <a:solidFill>
+            <a:srgbClr val="FFFFFF"/>
+          </a:solidFill>
+          <a:ln w="12700">
+            <a:solidFill>
+              <a:srgbClr val="CCCCCC"/>
+            </a:solidFill>
+          </a:ln>
+          <a:effectLst/>
+        </p:spPr>
+        <p:style>
+          <a:lnRef idx="1">
+            <a:schemeClr val="accent1"/>
+          </a:lnRef>
+          <a:fillRef idx="3">
+            <a:schemeClr val="accent1"/>
+          </a:fillRef>
+          <a:effectRef idx="2">
+            <a:schemeClr val="accent1"/>
+          </a:effectRef>
+          <a:fontRef idx="minor">
+            <a:schemeClr val="lt1"/>
+          </a:fontRef>
+        </p:style>
+        <p:txBody>
+          <a:bodyPr rtlCol="0" anchor="ctr"/>
+          <a:lstStyle/>
+          <a:p>
+            <a:pPr algn="ctr"/>
           </a:p>
         </p:txBody>
       </p:sp>
@@ -8541,8 +12570,8 @@
         </p:nvSpPr>
         <p:spPr>
           <a:xfrm>
-            <a:off x="0" y="6565392"/>
-            <a:ext cx="12191695" cy="38100"/>
+            <a:off x="640080" y="1965960"/>
+            <a:ext cx="109728" cy="841248"/>
           </a:xfrm>
           <a:prstGeom prst="rect">
             <a:avLst/>
@@ -8585,6 +12614,218 @@
         </p:nvSpPr>
         <p:spPr>
           <a:xfrm>
+            <a:off x="960120" y="1965960"/>
+            <a:ext cx="10424160" cy="841248"/>
+          </a:xfrm>
+          <a:prstGeom prst="rect">
+            <a:avLst/>
+          </a:prstGeom>
+          <a:noFill/>
+        </p:spPr>
+        <p:txBody>
+          <a:bodyPr wrap="square" anchor="ctr" lIns="0" rIns="0" tIns="0" bIns="0">
+            <a:spAutoFit/>
+          </a:bodyPr>
+          <a:lstStyle/>
+          <a:p>
+            <a:pPr>
+              <a:lnSpc>
+                <a:spcPct val="100000"/>
+              </a:lnSpc>
+            </a:pPr>
+            <a:r>
+              <a:rPr sz="1700" b="0" i="0">
+                <a:solidFill>
+                  <a:srgbClr val="2A2929"/>
+                </a:solidFill>
+                <a:latin typeface="Roboto"/>
+              </a:rPr>
+              <a:t>Isolation, groups, least privilege, encryption — the baseline layers.</a:t>
+            </a:r>
+          </a:p>
+        </p:txBody>
+      </p:sp>
+      <p:sp>
+        <p:nvSpPr>
+          <p:cNvPr id="7" name="Rectangle 6"/>
+          <p:cNvSpPr/>
+          <p:nvPr/>
+        </p:nvSpPr>
+        <p:spPr>
+          <a:xfrm>
+            <a:off x="640080" y="2916936"/>
+            <a:ext cx="10927080" cy="841248"/>
+          </a:xfrm>
+          <a:prstGeom prst="rect">
+            <a:avLst/>
+          </a:prstGeom>
+          <a:solidFill>
+            <a:srgbClr val="FFFFFF"/>
+          </a:solidFill>
+          <a:ln w="12700">
+            <a:solidFill>
+              <a:srgbClr val="CCCCCC"/>
+            </a:solidFill>
+          </a:ln>
+          <a:effectLst/>
+        </p:spPr>
+        <p:style>
+          <a:lnRef idx="1">
+            <a:schemeClr val="accent1"/>
+          </a:lnRef>
+          <a:fillRef idx="3">
+            <a:schemeClr val="accent1"/>
+          </a:fillRef>
+          <a:effectRef idx="2">
+            <a:schemeClr val="accent1"/>
+          </a:effectRef>
+          <a:fontRef idx="minor">
+            <a:schemeClr val="lt1"/>
+          </a:fontRef>
+        </p:style>
+        <p:txBody>
+          <a:bodyPr rtlCol="0" anchor="ctr"/>
+          <a:lstStyle/>
+          <a:p>
+            <a:pPr algn="ctr"/>
+          </a:p>
+        </p:txBody>
+      </p:sp>
+      <p:sp>
+        <p:nvSpPr>
+          <p:cNvPr id="8" name="Rectangle 7"/>
+          <p:cNvSpPr/>
+          <p:nvPr/>
+        </p:nvSpPr>
+        <p:spPr>
+          <a:xfrm>
+            <a:off x="640080" y="2916936"/>
+            <a:ext cx="109728" cy="841248"/>
+          </a:xfrm>
+          <a:prstGeom prst="rect">
+            <a:avLst/>
+          </a:prstGeom>
+          <a:solidFill>
+            <a:srgbClr val="92268F"/>
+          </a:solidFill>
+          <a:ln>
+            <a:noFill/>
+          </a:ln>
+          <a:effectLst/>
+        </p:spPr>
+        <p:style>
+          <a:lnRef idx="1">
+            <a:schemeClr val="accent1"/>
+          </a:lnRef>
+          <a:fillRef idx="3">
+            <a:schemeClr val="accent1"/>
+          </a:fillRef>
+          <a:effectRef idx="2">
+            <a:schemeClr val="accent1"/>
+          </a:effectRef>
+          <a:fontRef idx="minor">
+            <a:schemeClr val="lt1"/>
+          </a:fontRef>
+        </p:style>
+        <p:txBody>
+          <a:bodyPr rtlCol="0" anchor="ctr"/>
+          <a:lstStyle/>
+          <a:p>
+            <a:pPr algn="ctr"/>
+          </a:p>
+        </p:txBody>
+      </p:sp>
+      <p:sp>
+        <p:nvSpPr>
+          <p:cNvPr id="9" name="TextBox 8"/>
+          <p:cNvSpPr txBox="1"/>
+          <p:nvPr/>
+        </p:nvSpPr>
+        <p:spPr>
+          <a:xfrm>
+            <a:off x="960120" y="2916936"/>
+            <a:ext cx="10424160" cy="841248"/>
+          </a:xfrm>
+          <a:prstGeom prst="rect">
+            <a:avLst/>
+          </a:prstGeom>
+          <a:noFill/>
+        </p:spPr>
+        <p:txBody>
+          <a:bodyPr wrap="square" anchor="ctr" lIns="0" rIns="0" tIns="0" bIns="0">
+            <a:spAutoFit/>
+          </a:bodyPr>
+          <a:lstStyle/>
+          <a:p>
+            <a:pPr>
+              <a:lnSpc>
+                <a:spcPct val="100000"/>
+              </a:lnSpc>
+            </a:pPr>
+            <a:r>
+              <a:rPr sz="1700" b="0" i="0">
+                <a:solidFill>
+                  <a:srgbClr val="2A2929"/>
+                </a:solidFill>
+                <a:latin typeface="Roboto"/>
+              </a:rPr>
+              <a:t>Improvements inherit the layers; copies carry the same protections.</a:t>
+            </a:r>
+          </a:p>
+        </p:txBody>
+      </p:sp>
+      <p:sp>
+        <p:nvSpPr>
+          <p:cNvPr id="10" name="Rectangle 9"/>
+          <p:cNvSpPr/>
+          <p:nvPr/>
+        </p:nvSpPr>
+        <p:spPr>
+          <a:xfrm>
+            <a:off x="0" y="6565392"/>
+            <a:ext cx="12191695" cy="38100"/>
+          </a:xfrm>
+          <a:prstGeom prst="rect">
+            <a:avLst/>
+          </a:prstGeom>
+          <a:solidFill>
+            <a:srgbClr val="92268F"/>
+          </a:solidFill>
+          <a:ln>
+            <a:noFill/>
+          </a:ln>
+          <a:effectLst/>
+        </p:spPr>
+        <p:style>
+          <a:lnRef idx="1">
+            <a:schemeClr val="accent1"/>
+          </a:lnRef>
+          <a:fillRef idx="3">
+            <a:schemeClr val="accent1"/>
+          </a:fillRef>
+          <a:effectRef idx="2">
+            <a:schemeClr val="accent1"/>
+          </a:effectRef>
+          <a:fontRef idx="minor">
+            <a:schemeClr val="lt1"/>
+          </a:fontRef>
+        </p:style>
+        <p:txBody>
+          <a:bodyPr rtlCol="0" anchor="ctr"/>
+          <a:lstStyle/>
+          <a:p>
+            <a:pPr algn="ctr"/>
+          </a:p>
+        </p:txBody>
+      </p:sp>
+      <p:sp>
+        <p:nvSpPr>
+          <p:cNvPr id="11" name="TextBox 10"/>
+          <p:cNvSpPr txBox="1"/>
+          <p:nvPr/>
+        </p:nvSpPr>
+        <p:spPr>
+          <a:xfrm>
             <a:off x="502920" y="6400800"/>
             <a:ext cx="5486400" cy="320040"/>
           </a:xfrm>
@@ -8622,7 +12863,7 @@
       </p:sp>
       <p:sp>
         <p:nvSpPr>
-          <p:cNvPr id="7" name="TextBox 6"/>
+          <p:cNvPr id="12" name="TextBox 11"/>
           <p:cNvSpPr txBox="1"/>
           <p:nvPr/>
         </p:nvSpPr>
@@ -8683,54 +12924,20 @@
       <p:grpSpPr/>
       <p:sp>
         <p:nvSpPr>
-          <p:cNvPr id="2" name="TextBox 1"/>
-          <p:cNvSpPr txBox="1"/>
-          <p:nvPr/>
-        </p:nvSpPr>
-        <p:spPr>
-          <a:xfrm>
-            <a:off x="640080" y="457200"/>
-            <a:ext cx="10881360" cy="960120"/>
-          </a:xfrm>
-          <a:prstGeom prst="rect">
-            <a:avLst/>
-          </a:prstGeom>
-          <a:noFill/>
-        </p:spPr>
-        <p:txBody>
-          <a:bodyPr wrap="square" anchor="t" lIns="0" rIns="0" tIns="0" bIns="0">
-            <a:spAutoFit/>
-          </a:bodyPr>
-          <a:lstStyle/>
-          <a:p>
-            <a:r>
-              <a:rPr sz="2800" b="1" i="0">
-                <a:solidFill>
-                  <a:srgbClr val="2A2929"/>
-                </a:solidFill>
-                <a:latin typeface="Roboto"/>
-              </a:rPr>
-              <a:t>Justify against the business needs</a:t>
-            </a:r>
-          </a:p>
-        </p:txBody>
-      </p:sp>
-      <p:sp>
-        <p:nvSpPr>
-          <p:cNvPr id="3" name="Rectangle 2"/>
+          <p:cNvPr id="2" name="Rectangle 1"/>
           <p:cNvSpPr/>
           <p:nvPr/>
         </p:nvSpPr>
         <p:spPr>
           <a:xfrm>
-            <a:off x="658368" y="1371600"/>
-            <a:ext cx="1463040" cy="50800"/>
+            <a:off x="0" y="0"/>
+            <a:ext cx="3931920" cy="6858000"/>
           </a:xfrm>
           <a:prstGeom prst="rect">
             <a:avLst/>
           </a:prstGeom>
           <a:solidFill>
-            <a:srgbClr val="92268F"/>
+            <a:srgbClr val="27B5CE"/>
           </a:solidFill>
           <a:ln>
             <a:noFill/>
@@ -8761,14 +12968,48 @@
       </p:sp>
       <p:sp>
         <p:nvSpPr>
+          <p:cNvPr id="3" name="TextBox 2"/>
+          <p:cNvSpPr txBox="1"/>
+          <p:nvPr/>
+        </p:nvSpPr>
+        <p:spPr>
+          <a:xfrm>
+            <a:off x="365760" y="2103120"/>
+            <a:ext cx="3291840" cy="2194560"/>
+          </a:xfrm>
+          <a:prstGeom prst="rect">
+            <a:avLst/>
+          </a:prstGeom>
+          <a:noFill/>
+        </p:spPr>
+        <p:txBody>
+          <a:bodyPr wrap="square" anchor="t" lIns="0" rIns="0" tIns="0" bIns="0">
+            <a:spAutoFit/>
+          </a:bodyPr>
+          <a:lstStyle/>
+          <a:p>
+            <a:r>
+              <a:rPr sz="13000" b="1" i="0">
+                <a:solidFill>
+                  <a:srgbClr val="FFFFFF"/>
+                </a:solidFill>
+                <a:latin typeface="Roboto"/>
+              </a:rPr>
+              <a:t>02</a:t>
+            </a:r>
+          </a:p>
+        </p:txBody>
+      </p:sp>
+      <p:sp>
+        <p:nvSpPr>
           <p:cNvPr id="4" name="TextBox 3"/>
           <p:cNvSpPr txBox="1"/>
           <p:nvPr/>
         </p:nvSpPr>
         <p:spPr>
           <a:xfrm>
-            <a:off x="658368" y="1691640"/>
-            <a:ext cx="10881360" cy="4480560"/>
+            <a:off x="4480560" y="2468880"/>
+            <a:ext cx="7132320" cy="2194560"/>
           </a:xfrm>
           <a:prstGeom prst="rect">
             <a:avLst/>
@@ -8776,101 +13017,51 @@
           <a:noFill/>
         </p:spPr>
         <p:txBody>
-          <a:bodyPr wrap="square" anchor="ctr" lIns="0" rIns="0" tIns="0" bIns="0">
+          <a:bodyPr wrap="square" anchor="t" lIns="0" rIns="0" tIns="0" bIns="0">
             <a:spAutoFit/>
           </a:bodyPr>
           <a:lstStyle/>
           <a:p>
-            <a:pPr marL="0" indent="0">
-              <a:lnSpc>
-                <a:spcPct val="105000"/>
-              </a:lnSpc>
+            <a:r>
+              <a:rPr sz="1600" b="1" i="0">
+                <a:solidFill>
+                  <a:srgbClr val="27B5CE"/>
+                </a:solidFill>
+                <a:latin typeface="Roboto"/>
+              </a:rPr>
+              <a:t>SECTION</a:t>
+            </a:r>
+          </a:p>
+          <a:p>
+            <a:pPr>
               <a:spcBef>
-                <a:spcPts val="0"/>
+                <a:spcPts val="600"/>
               </a:spcBef>
-              <a:spcAft>
+            </a:pPr>
+            <a:r>
+              <a:rPr sz="3800" b="1" i="0">
+                <a:solidFill>
+                  <a:srgbClr val="2A2929"/>
+                </a:solidFill>
+                <a:latin typeface="Roboto"/>
+              </a:rPr>
+              <a:t>The reliability and scalability improvements</a:t>
+            </a:r>
+          </a:p>
+          <a:p>
+            <a:pPr>
+              <a:spcBef>
                 <a:spcPts val="1000"/>
-              </a:spcAft>
+              </a:spcBef>
             </a:pPr>
             <a:r>
-              <a:rPr sz="2400" b="1" i="0">
-                <a:solidFill>
-                  <a:srgbClr val="EDAB0C"/>
-                </a:solidFill>
-                <a:latin typeface="Roboto"/>
-              </a:rPr>
-              <a:t>■  </a:t>
-            </a:r>
-            <a:r>
-              <a:rPr sz="2400" b="0" i="0">
-                <a:solidFill>
-                  <a:srgbClr val="2A2929"/>
-                </a:solidFill>
-                <a:latin typeface="Roboto"/>
-              </a:rPr>
-              <a:t>Tie every resource choice to a stated Ledgerline business need — why this tier, why this size.</a:t>
-            </a:r>
-          </a:p>
-          <a:p>
-            <a:pPr marL="0" indent="0">
-              <a:lnSpc>
-                <a:spcPct val="105000"/>
-              </a:lnSpc>
-              <a:spcBef>
-                <a:spcPts val="0"/>
-              </a:spcBef>
-              <a:spcAft>
-                <a:spcPts val="1000"/>
-              </a:spcAft>
-            </a:pPr>
-            <a:r>
-              <a:rPr sz="2400" b="1" i="0">
-                <a:solidFill>
-                  <a:srgbClr val="EDAB0C"/>
-                </a:solidFill>
-                <a:latin typeface="Roboto"/>
-              </a:rPr>
-              <a:t>■  </a:t>
-            </a:r>
-            <a:r>
-              <a:rPr sz="2400" b="0" i="0">
-                <a:solidFill>
-                  <a:srgbClr val="2A2929"/>
-                </a:solidFill>
-                <a:latin typeface="Roboto"/>
-              </a:rPr>
-              <a:t>Choose the simplest option that meets the need; note where capacity scales elastically and how it would be demonstrated by test.</a:t>
-            </a:r>
-          </a:p>
-          <a:p>
-            <a:pPr marL="0" indent="0">
-              <a:lnSpc>
-                <a:spcPct val="105000"/>
-              </a:lnSpc>
-              <a:spcBef>
-                <a:spcPts val="0"/>
-              </a:spcBef>
-              <a:spcAft>
-                <a:spcPts val="1000"/>
-              </a:spcAft>
-            </a:pPr>
-            <a:r>
-              <a:rPr sz="2400" b="1" i="0">
-                <a:solidFill>
-                  <a:srgbClr val="EDAB0C"/>
-                </a:solidFill>
-                <a:latin typeface="Roboto"/>
-              </a:rPr>
-              <a:t>■  </a:t>
-            </a:r>
-            <a:r>
-              <a:rPr sz="2400" b="0" i="0">
-                <a:solidFill>
-                  <a:srgbClr val="2A2929"/>
-                </a:solidFill>
-                <a:latin typeface="Roboto"/>
-              </a:rPr>
-              <a:t>Do not over-engineer: no tier scaled beyond what a need justifies.</a:t>
+              <a:rPr sz="2000" b="0" i="1">
+                <a:solidFill>
+                  <a:srgbClr val="484848"/>
+                </a:solidFill>
+                <a:latin typeface="Roboto Light"/>
+              </a:rPr>
+              <a:t>improve reliability to the goal, not beyond it</a:t>
             </a:r>
           </a:p>
         </p:txBody>
@@ -8890,7 +13081,7 @@
             <a:avLst/>
           </a:prstGeom>
           <a:solidFill>
-            <a:srgbClr val="92268F"/>
+            <a:srgbClr val="27B5CE"/>
           </a:solidFill>
           <a:ln>
             <a:noFill/>
@@ -8992,7 +13183,7 @@
                 </a:solidFill>
                 <a:latin typeface="Roboto"/>
               </a:rPr>
-              <a:t>5</a:t>
+              <a:t/>
             </a:r>
           </a:p>
         </p:txBody>
@@ -9025,20 +13216,54 @@
       <p:grpSpPr/>
       <p:sp>
         <p:nvSpPr>
-          <p:cNvPr id="2" name="Rectangle 1"/>
+          <p:cNvPr id="2" name="TextBox 1"/>
+          <p:cNvSpPr txBox="1"/>
+          <p:nvPr/>
+        </p:nvSpPr>
+        <p:spPr>
+          <a:xfrm>
+            <a:off x="640080" y="457200"/>
+            <a:ext cx="10881360" cy="960120"/>
+          </a:xfrm>
+          <a:prstGeom prst="rect">
+            <a:avLst/>
+          </a:prstGeom>
+          <a:noFill/>
+        </p:spPr>
+        <p:txBody>
+          <a:bodyPr wrap="square" anchor="t" lIns="0" rIns="0" tIns="0" bIns="0">
+            <a:spAutoFit/>
+          </a:bodyPr>
+          <a:lstStyle/>
+          <a:p>
+            <a:r>
+              <a:rPr sz="2800" b="1" i="0">
+                <a:solidFill>
+                  <a:srgbClr val="2A2929"/>
+                </a:solidFill>
+                <a:latin typeface="Roboto"/>
+              </a:rPr>
+              <a:t>What makes a cloud system reliable</a:t>
+            </a:r>
+          </a:p>
+        </p:txBody>
+      </p:sp>
+      <p:sp>
+        <p:nvSpPr>
+          <p:cNvPr id="3" name="Rectangle 2"/>
           <p:cNvSpPr/>
           <p:nvPr/>
         </p:nvSpPr>
         <p:spPr>
           <a:xfrm>
-            <a:off x="0" y="0"/>
-            <a:ext cx="12191695" cy="1234440"/>
+            <a:off x="658368" y="1371600"/>
+            <a:ext cx="1463040" cy="50800"/>
           </a:xfrm>
           <a:prstGeom prst="rect">
             <a:avLst/>
           </a:prstGeom>
           <a:solidFill>
-            <a:srgbClr val="92268F"/>
+            <a:srgbClr val="27B5CE"/>
           </a:solidFill>
           <a:ln>
             <a:noFill/>
@@ -9069,67 +13294,14 @@
       </p:sp>
       <p:sp>
         <p:nvSpPr>
-          <p:cNvPr id="3" name="Rounded Rectangle 2"/>
-          <p:cNvSpPr/>
-          <p:nvPr/>
-        </p:nvSpPr>
-        <p:spPr>
-          <a:xfrm>
-            <a:off x="640080" y="384048"/>
-            <a:ext cx="1691640" cy="457200"/>
-          </a:xfrm>
-          <a:prstGeom prst="roundRect">
-            <a:avLst/>
-          </a:prstGeom>
-          <a:solidFill>
-            <a:srgbClr val="2A2929"/>
-          </a:solidFill>
-          <a:ln>
-            <a:noFill/>
-          </a:ln>
-          <a:effectLst/>
-        </p:spPr>
-        <p:style>
-          <a:lnRef idx="1">
-            <a:schemeClr val="accent1"/>
-          </a:lnRef>
-          <a:fillRef idx="3">
-            <a:schemeClr val="accent1"/>
-          </a:fillRef>
-          <a:effectRef idx="2">
-            <a:schemeClr val="accent1"/>
-          </a:effectRef>
-          <a:fontRef idx="minor">
-            <a:schemeClr val="lt1"/>
-          </a:fontRef>
-        </p:style>
-        <p:txBody>
-          <a:bodyPr rtlCol="0" anchor="ctr"/>
-          <a:lstStyle/>
-          <a:p>
-            <a:pPr algn="ctr"/>
-            <a:r>
-              <a:rPr sz="1400" b="1" i="0">
-                <a:solidFill>
-                  <a:srgbClr val="FBB900"/>
-                </a:solidFill>
-                <a:latin typeface="Roboto"/>
-              </a:rPr>
-              <a:t>ACTIVITY</a:t>
-            </a:r>
-          </a:p>
-        </p:txBody>
-      </p:sp>
-      <p:sp>
-        <p:nvSpPr>
           <p:cNvPr id="4" name="TextBox 3"/>
           <p:cNvSpPr txBox="1"/>
           <p:nvPr/>
         </p:nvSpPr>
         <p:spPr>
           <a:xfrm>
-            <a:off x="2560320" y="310896"/>
-            <a:ext cx="8961120" cy="685800"/>
+            <a:off x="658368" y="1691640"/>
+            <a:ext cx="10881360" cy="4480560"/>
           </a:xfrm>
           <a:prstGeom prst="rect">
             <a:avLst/>
@@ -9138,40 +13310,6 @@
         </p:spPr>
         <p:txBody>
           <a:bodyPr wrap="square" anchor="ctr" lIns="0" rIns="0" tIns="0" bIns="0">
-            <a:spAutoFit/>
-          </a:bodyPr>
-          <a:lstStyle/>
-          <a:p>
-            <a:r>
-              <a:rPr sz="2600" b="1" i="0">
-                <a:solidFill>
-                  <a:srgbClr val="FFFFFF"/>
-                </a:solidFill>
-                <a:latin typeface="Roboto"/>
-              </a:rPr>
-              <a:t>Design the four tiers for the practice engagement</a:t>
-            </a:r>
-          </a:p>
-        </p:txBody>
-      </p:sp>
-      <p:sp>
-        <p:nvSpPr>
-          <p:cNvPr id="5" name="TextBox 4"/>
-          <p:cNvSpPr txBox="1"/>
-          <p:nvPr/>
-        </p:nvSpPr>
-        <p:spPr>
-          <a:xfrm>
-            <a:off x="658368" y="1554480"/>
-            <a:ext cx="10881360" cy="4297680"/>
-          </a:xfrm>
-          <a:prstGeom prst="rect">
-            <a:avLst/>
-          </a:prstGeom>
-          <a:noFill/>
-        </p:spPr>
-        <p:txBody>
-          <a:bodyPr wrap="square" anchor="t" lIns="0" rIns="0" tIns="0" bIns="0">
             <a:spAutoFit/>
           </a:bodyPr>
           <a:lstStyle/>
@@ -9188,7 +13326,7 @@
               </a:spcAft>
             </a:pPr>
             <a:r>
-              <a:rPr sz="1700" b="1" i="0">
+              <a:rPr sz="2400" b="1" i="0">
                 <a:solidFill>
                   <a:srgbClr val="EDAB0C"/>
                 </a:solidFill>
@@ -9197,13 +13335,13 @@
               <a:t>■  </a:t>
             </a:r>
             <a:r>
-              <a:rPr sz="1700" b="0" i="0">
+              <a:rPr sz="2400" b="0" i="0">
                 <a:solidFill>
                   <a:srgbClr val="2A2929"/>
                 </a:solidFill>
                 <a:latin typeface="Roboto"/>
               </a:rPr>
-              <a:t>For the practice-vehicle engagement, select and improve the network, compute, database and storage tiers to its business needs.</a:t>
+              <a:t>Reliability: the system keeps serving through component and zone failures, and recovers from loss.</a:t>
             </a:r>
           </a:p>
           <a:p>
@@ -9219,7 +13357,7 @@
               </a:spcAft>
             </a:pPr>
             <a:r>
-              <a:rPr sz="1700" b="1" i="0">
+              <a:rPr sz="2400" b="1" i="0">
                 <a:solidFill>
                   <a:srgbClr val="EDAB0C"/>
                 </a:solidFill>
@@ -9228,38 +13366,67 @@
               <a:t>■  </a:t>
             </a:r>
             <a:r>
-              <a:rPr sz="1700" b="0" i="0">
+              <a:rPr sz="2400" b="0" i="0">
                 <a:solidFill>
                   <a:srgbClr val="2A2929"/>
                 </a:solidFill>
                 <a:latin typeface="Roboto"/>
               </a:rPr>
-              <a:t>Mark where capacity scales elastically, and justify each choice against a named need.</a:t>
-            </a:r>
-          </a:p>
-        </p:txBody>
-      </p:sp>
-      <p:sp>
-        <p:nvSpPr>
-          <p:cNvPr id="6" name="Rounded Rectangle 5"/>
+              <a:t>Three building blocks: redundancy across zones, backup and restore, and cross-region disaster recovery.</a:t>
+            </a:r>
+          </a:p>
+          <a:p>
+            <a:pPr marL="0" indent="0">
+              <a:lnSpc>
+                <a:spcPct val="105000"/>
+              </a:lnSpc>
+              <a:spcBef>
+                <a:spcPts val="0"/>
+              </a:spcBef>
+              <a:spcAft>
+                <a:spcPts val="1000"/>
+              </a:spcAft>
+            </a:pPr>
+            <a:r>
+              <a:rPr sz="2400" b="1" i="0">
+                <a:solidFill>
+                  <a:srgbClr val="EDAB0C"/>
+                </a:solidFill>
+                <a:latin typeface="Roboto"/>
+              </a:rPr>
+              <a:t>■  </a:t>
+            </a:r>
+            <a:r>
+              <a:rPr sz="2400" b="0" i="0">
+                <a:solidFill>
+                  <a:srgbClr val="2A2929"/>
+                </a:solidFill>
+                <a:latin typeface="Roboto"/>
+              </a:rPr>
+              <a:t>Backup recovers data in place; DR survives losing a whole region — different failures, different tools.</a:t>
+            </a:r>
+          </a:p>
+        </p:txBody>
+      </p:sp>
+      <p:sp>
+        <p:nvSpPr>
+          <p:cNvPr id="5" name="Rectangle 4"/>
           <p:cNvSpPr/>
           <p:nvPr/>
         </p:nvSpPr>
         <p:spPr>
           <a:xfrm>
-            <a:off x="640080" y="5897880"/>
-            <a:ext cx="4023360" cy="457200"/>
-          </a:xfrm>
-          <a:prstGeom prst="roundRect">
+            <a:off x="0" y="6565392"/>
+            <a:ext cx="12191695" cy="38100"/>
+          </a:xfrm>
+          <a:prstGeom prst="rect">
             <a:avLst/>
           </a:prstGeom>
           <a:solidFill>
-            <a:srgbClr val="F9F9F9"/>
+            <a:srgbClr val="27B5CE"/>
           </a:solidFill>
-          <a:ln w="12700">
-            <a:solidFill>
-              <a:srgbClr val="CCCCCC"/>
-            </a:solidFill>
+          <a:ln>
+            <a:noFill/>
           </a:ln>
           <a:effectLst/>
         </p:spPr>
@@ -9287,85 +13454,7 @@
       </p:sp>
       <p:sp>
         <p:nvSpPr>
-          <p:cNvPr id="7" name="TextBox 6"/>
-          <p:cNvSpPr txBox="1"/>
-          <p:nvPr/>
-        </p:nvSpPr>
-        <p:spPr>
-          <a:xfrm>
-            <a:off x="822960" y="5943600"/>
-            <a:ext cx="3657600" cy="365760"/>
-          </a:xfrm>
-          <a:prstGeom prst="rect">
-            <a:avLst/>
-          </a:prstGeom>
-          <a:noFill/>
-        </p:spPr>
-        <p:txBody>
-          <a:bodyPr wrap="square" anchor="ctr" lIns="0" rIns="0" tIns="0" bIns="0">
-            <a:spAutoFit/>
-          </a:bodyPr>
-          <a:lstStyle/>
-          <a:p>
-            <a:r>
-              <a:rPr sz="1500" b="1" i="0">
-                <a:solidFill>
-                  <a:srgbClr val="2A2929"/>
-                </a:solidFill>
-                <a:latin typeface="Roboto"/>
-              </a:rPr>
-              <a:t>⏱  ~30 min</a:t>
-            </a:r>
-          </a:p>
-        </p:txBody>
-      </p:sp>
-      <p:sp>
-        <p:nvSpPr>
-          <p:cNvPr id="8" name="Rectangle 7"/>
-          <p:cNvSpPr/>
-          <p:nvPr/>
-        </p:nvSpPr>
-        <p:spPr>
-          <a:xfrm>
-            <a:off x="0" y="6565392"/>
-            <a:ext cx="12191695" cy="38100"/>
-          </a:xfrm>
-          <a:prstGeom prst="rect">
-            <a:avLst/>
-          </a:prstGeom>
-          <a:solidFill>
-            <a:srgbClr val="92268F"/>
-          </a:solidFill>
-          <a:ln>
-            <a:noFill/>
-          </a:ln>
-          <a:effectLst/>
-        </p:spPr>
-        <p:style>
-          <a:lnRef idx="1">
-            <a:schemeClr val="accent1"/>
-          </a:lnRef>
-          <a:fillRef idx="3">
-            <a:schemeClr val="accent1"/>
-          </a:fillRef>
-          <a:effectRef idx="2">
-            <a:schemeClr val="accent1"/>
-          </a:effectRef>
-          <a:fontRef idx="minor">
-            <a:schemeClr val="lt1"/>
-          </a:fontRef>
-        </p:style>
-        <p:txBody>
-          <a:bodyPr rtlCol="0" anchor="ctr"/>
-          <a:lstStyle/>
-          <a:p>
-            <a:pPr algn="ctr"/>
-          </a:p>
-        </p:txBody>
-      </p:sp>
-      <p:sp>
-        <p:nvSpPr>
-          <p:cNvPr id="9" name="TextBox 8"/>
+          <p:cNvPr id="6" name="TextBox 5"/>
           <p:cNvSpPr txBox="1"/>
           <p:nvPr/>
         </p:nvSpPr>
@@ -9408,7 +13497,7 @@
       </p:sp>
       <p:sp>
         <p:nvSpPr>
-          <p:cNvPr id="10" name="TextBox 9"/>
+          <p:cNvPr id="7" name="TextBox 6"/>
           <p:cNvSpPr txBox="1"/>
           <p:nvPr/>
         </p:nvSpPr>
@@ -9436,7 +13525,7 @@
                 </a:solidFill>
                 <a:latin typeface="Roboto"/>
               </a:rPr>
-              <a:t>6</a:t>
+              <a:t>5</a:t>
             </a:r>
           </a:p>
         </p:txBody>
@@ -9469,14 +13558,48 @@
       <p:grpSpPr/>
       <p:sp>
         <p:nvSpPr>
-          <p:cNvPr id="2" name="Rectangle 1"/>
+          <p:cNvPr id="2" name="TextBox 1"/>
+          <p:cNvSpPr txBox="1"/>
+          <p:nvPr/>
+        </p:nvSpPr>
+        <p:spPr>
+          <a:xfrm>
+            <a:off x="640080" y="457200"/>
+            <a:ext cx="10881360" cy="960120"/>
+          </a:xfrm>
+          <a:prstGeom prst="rect">
+            <a:avLst/>
+          </a:prstGeom>
+          <a:noFill/>
+        </p:spPr>
+        <p:txBody>
+          <a:bodyPr wrap="square" anchor="t" lIns="0" rIns="0" tIns="0" bIns="0">
+            <a:spAutoFit/>
+          </a:bodyPr>
+          <a:lstStyle/>
+          <a:p>
+            <a:r>
+              <a:rPr sz="2800" b="1" i="0">
+                <a:solidFill>
+                  <a:srgbClr val="2A2929"/>
+                </a:solidFill>
+                <a:latin typeface="Roboto"/>
+              </a:rPr>
+              <a:t>The reliability target</a:t>
+            </a:r>
+          </a:p>
+        </p:txBody>
+      </p:sp>
+      <p:sp>
+        <p:nvSpPr>
+          <p:cNvPr id="3" name="Rectangle 2"/>
           <p:cNvSpPr/>
           <p:nvPr/>
         </p:nvSpPr>
         <p:spPr>
           <a:xfrm>
-            <a:off x="0" y="0"/>
-            <a:ext cx="3931920" cy="6858000"/>
+            <a:off x="658368" y="1371600"/>
+            <a:ext cx="1463040" cy="50800"/>
           </a:xfrm>
           <a:prstGeom prst="rect">
             <a:avLst/>
@@ -9513,14 +13636,14 @@
       </p:sp>
       <p:sp>
         <p:nvSpPr>
-          <p:cNvPr id="3" name="TextBox 2"/>
+          <p:cNvPr id="4" name="TextBox 3"/>
           <p:cNvSpPr txBox="1"/>
           <p:nvPr/>
         </p:nvSpPr>
         <p:spPr>
           <a:xfrm>
-            <a:off x="365760" y="2103120"/>
-            <a:ext cx="3291840" cy="2194560"/>
+            <a:off x="658368" y="1737360"/>
+            <a:ext cx="5486400" cy="4297680"/>
           </a:xfrm>
           <a:prstGeom prst="rect">
             <a:avLst/>
@@ -9533,87 +13656,127 @@
           </a:bodyPr>
           <a:lstStyle/>
           <a:p>
-            <a:r>
-              <a:rPr sz="13000" b="1" i="0">
-                <a:solidFill>
-                  <a:srgbClr val="FFFFFF"/>
-                </a:solidFill>
-                <a:latin typeface="Roboto"/>
-              </a:rPr>
-              <a:t>02</a:t>
-            </a:r>
-          </a:p>
-        </p:txBody>
-      </p:sp>
-      <p:sp>
-        <p:nvSpPr>
-          <p:cNvPr id="4" name="TextBox 3"/>
-          <p:cNvSpPr txBox="1"/>
-          <p:nvPr/>
-        </p:nvSpPr>
-        <p:spPr>
-          <a:xfrm>
-            <a:off x="4480560" y="2468880"/>
-            <a:ext cx="7132320" cy="2194560"/>
-          </a:xfrm>
-          <a:prstGeom prst="rect">
-            <a:avLst/>
-          </a:prstGeom>
-          <a:noFill/>
-        </p:spPr>
-        <p:txBody>
-          <a:bodyPr wrap="square" anchor="t" lIns="0" rIns="0" tIns="0" bIns="0">
-            <a:spAutoFit/>
-          </a:bodyPr>
-          <a:lstStyle/>
-          <a:p>
-            <a:r>
-              <a:rPr sz="1600" b="1" i="0">
-                <a:solidFill>
-                  <a:srgbClr val="27B5CE"/>
-                </a:solidFill>
-                <a:latin typeface="Roboto"/>
-              </a:rPr>
-              <a:t>SECTION</a:t>
-            </a:r>
-          </a:p>
-          <a:p>
-            <a:pPr>
+            <a:pPr marL="0" indent="0">
+              <a:lnSpc>
+                <a:spcPct val="105000"/>
+              </a:lnSpc>
               <a:spcBef>
-                <a:spcPts val="600"/>
+                <a:spcPts val="0"/>
               </a:spcBef>
+              <a:spcAft>
+                <a:spcPts val="1000"/>
+              </a:spcAft>
             </a:pPr>
             <a:r>
-              <a:rPr sz="3800" b="1" i="0">
+              <a:rPr sz="1700" b="1" i="0">
+                <a:solidFill>
+                  <a:srgbClr val="EDAB0C"/>
+                </a:solidFill>
+                <a:latin typeface="Roboto"/>
+              </a:rPr>
+              <a:t>■  </a:t>
+            </a:r>
+            <a:r>
+              <a:rPr sz="1700" b="0" i="0">
                 <a:solidFill>
                   <a:srgbClr val="2A2929"/>
                 </a:solidFill>
                 <a:latin typeface="Roboto"/>
               </a:rPr>
-              <a:t>Object storage in context</a:t>
-            </a:r>
-          </a:p>
-          <a:p>
-            <a:pPr>
+              <a:t>Review the single-zone baseline against the reliability goals; name where a single failure takes the system down.</a:t>
+            </a:r>
+          </a:p>
+          <a:p>
+            <a:pPr marL="0" indent="0">
+              <a:lnSpc>
+                <a:spcPct val="105000"/>
+              </a:lnSpc>
               <a:spcBef>
+                <a:spcPts val="0"/>
+              </a:spcBef>
+              <a:spcAft>
                 <a:spcPts val="1000"/>
+              </a:spcAft>
+            </a:pPr>
+            <a:r>
+              <a:rPr sz="1700" b="1" i="0">
+                <a:solidFill>
+                  <a:srgbClr val="EDAB0C"/>
+                </a:solidFill>
+                <a:latin typeface="Roboto"/>
+              </a:rPr>
+              <a:t>■  </a:t>
+            </a:r>
+            <a:r>
+              <a:rPr sz="1700" b="0" i="0">
+                <a:solidFill>
+                  <a:srgbClr val="2A2929"/>
+                </a:solidFill>
+                <a:latin typeface="Roboto"/>
+              </a:rPr>
+              <a:t>The shape of the target: the application tier redundant across zones behind a load balancer; the database covered by backup and restore; a cross-region DR copy, onshore.</a:t>
+            </a:r>
+          </a:p>
+          <a:p>
+            <a:pPr marL="0" indent="0">
+              <a:lnSpc>
+                <a:spcPct val="105000"/>
+              </a:lnSpc>
+              <a:spcBef>
+                <a:spcPts val="0"/>
               </a:spcBef>
+              <a:spcAft>
+                <a:spcPts val="1000"/>
+              </a:spcAft>
             </a:pPr>
             <a:r>
-              <a:rPr sz="2000" b="0" i="1">
-                <a:solidFill>
-                  <a:srgbClr val="484848"/>
-                </a:solidFill>
-                <a:latin typeface="Roboto Light"/>
-              </a:rPr>
-              <a:t>contrast a stateful system with an object-storage-dependent one</a:t>
-            </a:r>
-          </a:p>
-        </p:txBody>
-      </p:sp>
-      <p:sp>
-        <p:nvSpPr>
-          <p:cNvPr id="5" name="Rectangle 4"/>
+              <a:rPr sz="1700" b="1" i="0">
+                <a:solidFill>
+                  <a:srgbClr val="EDAB0C"/>
+                </a:solidFill>
+                <a:latin typeface="Roboto"/>
+              </a:rPr>
+              <a:t>■  </a:t>
+            </a:r>
+            <a:r>
+              <a:rPr sz="1700" b="0" i="0">
+                <a:solidFill>
+                  <a:srgbClr val="2A2929"/>
+                </a:solidFill>
+                <a:latin typeface="Roboto"/>
+              </a:rPr>
+              <a:t>One tier is deliberately not made redundant — the next slide argues why.</a:t>
+            </a:r>
+          </a:p>
+        </p:txBody>
+      </p:sp>
+      <p:pic>
+        <p:nvPicPr>
+          <p:cNvPr id="5" name="Picture 4" descr="reliability-target.png"/>
+          <p:cNvPicPr>
+            <a:picLocks noChangeAspect="1"/>
+          </p:cNvPicPr>
+          <p:nvPr/>
+        </p:nvPicPr>
+        <p:blipFill>
+          <a:blip r:embed="rId2"/>
+          <a:stretch>
+            <a:fillRect/>
+          </a:stretch>
+        </p:blipFill>
+        <p:spPr>
+          <a:xfrm>
+            <a:off x="6400800" y="2057400"/>
+            <a:ext cx="5120640" cy="3474720"/>
+          </a:xfrm>
+          <a:prstGeom prst="rect">
+            <a:avLst/>
+          </a:prstGeom>
+        </p:spPr>
+      </p:pic>
+      <p:sp>
+        <p:nvSpPr>
+          <p:cNvPr id="6" name="Rectangle 5"/>
           <p:cNvSpPr/>
           <p:nvPr/>
         </p:nvSpPr>
@@ -9657,7 +13820,7 @@
       </p:sp>
       <p:sp>
         <p:nvSpPr>
-          <p:cNvPr id="6" name="TextBox 5"/>
+          <p:cNvPr id="7" name="TextBox 6"/>
           <p:cNvSpPr txBox="1"/>
           <p:nvPr/>
         </p:nvSpPr>
@@ -9700,7 +13863,7 @@
       </p:sp>
       <p:sp>
         <p:nvSpPr>
-          <p:cNvPr id="7" name="TextBox 6"/>
+          <p:cNvPr id="8" name="TextBox 7"/>
           <p:cNvSpPr txBox="1"/>
           <p:nvPr/>
         </p:nvSpPr>
@@ -9728,7 +13891,7 @@
                 </a:solidFill>
                 <a:latin typeface="Roboto"/>
               </a:rPr>
-              <a:t/>
+              <a:t>6</a:t>
             </a:r>
           </a:p>
         </p:txBody>
